--- a/Презентация_к_ВКР_ЦирулевНВ_М8О-408Б-22.pptx
+++ b/Презентация_к_ВКР_ЦирулевНВ_М8О-408Б-22.pptx
@@ -1,28 +1,32 @@
 
 <file path=ppt/presentation.xml><?xml version="1.0" encoding="utf-8"?>
-<p:presentation xmlns:a="http://schemas.openxmlformats.org/drawingml/2006/main" xmlns:r="http://schemas.openxmlformats.org/officeDocument/2006/relationships" xmlns:p="http://schemas.openxmlformats.org/presentationml/2006/main" saveSubsetFonts="1">
+<p:presentation xmlns:a="http://schemas.openxmlformats.org/drawingml/2006/main" xmlns:r="http://schemas.openxmlformats.org/officeDocument/2006/relationships" xmlns:p="http://schemas.openxmlformats.org/presentationml/2006/main" showSpecialPlsOnTitleSld="0" saveSubsetFonts="1">
   <p:sldMasterIdLst>
     <p:sldMasterId id="2147483648" r:id="rId1"/>
   </p:sldMasterIdLst>
+  <p:notesMasterIdLst>
+    <p:notesMasterId r:id="rId21"/>
+  </p:notesMasterIdLst>
   <p:sldIdLst>
     <p:sldId id="257" r:id="rId2"/>
     <p:sldId id="258" r:id="rId3"/>
     <p:sldId id="259" r:id="rId4"/>
     <p:sldId id="261" r:id="rId5"/>
-    <p:sldId id="264" r:id="rId6"/>
-    <p:sldId id="262" r:id="rId7"/>
-    <p:sldId id="263" r:id="rId8"/>
-    <p:sldId id="269" r:id="rId9"/>
-    <p:sldId id="270" r:id="rId10"/>
-    <p:sldId id="271" r:id="rId11"/>
-    <p:sldId id="272" r:id="rId12"/>
-    <p:sldId id="275" r:id="rId13"/>
-    <p:sldId id="265" r:id="rId14"/>
-    <p:sldId id="266" r:id="rId15"/>
-    <p:sldId id="267" r:id="rId16"/>
-    <p:sldId id="268" r:id="rId17"/>
-    <p:sldId id="260" r:id="rId18"/>
-    <p:sldId id="274" r:id="rId19"/>
+    <p:sldId id="262" r:id="rId6"/>
+    <p:sldId id="263" r:id="rId7"/>
+    <p:sldId id="276" r:id="rId8"/>
+    <p:sldId id="277" r:id="rId9"/>
+    <p:sldId id="265" r:id="rId10"/>
+    <p:sldId id="266" r:id="rId11"/>
+    <p:sldId id="278" r:id="rId12"/>
+    <p:sldId id="268" r:id="rId13"/>
+    <p:sldId id="269" r:id="rId14"/>
+    <p:sldId id="270" r:id="rId15"/>
+    <p:sldId id="271" r:id="rId16"/>
+    <p:sldId id="272" r:id="rId17"/>
+    <p:sldId id="275" r:id="rId18"/>
+    <p:sldId id="260" r:id="rId19"/>
+    <p:sldId id="274" r:id="rId20"/>
   </p:sldIdLst>
   <p:sldSz cx="12192000" cy="6858000"/>
   <p:notesSz cx="6858000" cy="9144000"/>
@@ -129,6 +133,608 @@
 </p:presentation>
 </file>
 
+<file path=ppt/notesMasters/notesMaster1.xml><?xml version="1.0" encoding="utf-8"?>
+<p:notesMaster xmlns:a="http://schemas.openxmlformats.org/drawingml/2006/main" xmlns:r="http://schemas.openxmlformats.org/officeDocument/2006/relationships" xmlns:p="http://schemas.openxmlformats.org/presentationml/2006/main">
+  <p:cSld>
+    <p:bg>
+      <p:bgRef idx="1001">
+        <a:schemeClr val="bg1"/>
+      </p:bgRef>
+    </p:bg>
+    <p:spTree>
+      <p:nvGrpSpPr>
+        <p:cNvPr id="1" name=""/>
+        <p:cNvGrpSpPr/>
+        <p:nvPr/>
+      </p:nvGrpSpPr>
+      <p:grpSpPr>
+        <a:xfrm>
+          <a:off x="0" y="0"/>
+          <a:ext cx="0" cy="0"/>
+          <a:chOff x="0" y="0"/>
+          <a:chExt cx="0" cy="0"/>
+        </a:xfrm>
+      </p:grpSpPr>
+      <p:sp>
+        <p:nvSpPr>
+          <p:cNvPr id="2" name="Верхний колонтитул 1"/>
+          <p:cNvSpPr>
+            <a:spLocks noGrp="1"/>
+          </p:cNvSpPr>
+          <p:nvPr>
+            <p:ph type="hdr" sz="quarter"/>
+          </p:nvPr>
+        </p:nvSpPr>
+        <p:spPr>
+          <a:xfrm>
+            <a:off x="0" y="0"/>
+            <a:ext cx="2971800" cy="458788"/>
+          </a:xfrm>
+          <a:prstGeom prst="rect">
+            <a:avLst/>
+          </a:prstGeom>
+        </p:spPr>
+        <p:txBody>
+          <a:bodyPr vert="horz" lIns="91440" tIns="45720" rIns="91440" bIns="45720" rtlCol="0"/>
+          <a:lstStyle>
+            <a:lvl1pPr algn="l">
+              <a:defRPr sz="1200"/>
+            </a:lvl1pPr>
+          </a:lstStyle>
+          <a:p>
+            <a:endParaRPr lang="ru-RU"/>
+          </a:p>
+        </p:txBody>
+      </p:sp>
+      <p:sp>
+        <p:nvSpPr>
+          <p:cNvPr id="3" name="Дата 2"/>
+          <p:cNvSpPr>
+            <a:spLocks noGrp="1"/>
+          </p:cNvSpPr>
+          <p:nvPr>
+            <p:ph type="dt" idx="1"/>
+          </p:nvPr>
+        </p:nvSpPr>
+        <p:spPr>
+          <a:xfrm>
+            <a:off x="3884613" y="0"/>
+            <a:ext cx="2971800" cy="458788"/>
+          </a:xfrm>
+          <a:prstGeom prst="rect">
+            <a:avLst/>
+          </a:prstGeom>
+        </p:spPr>
+        <p:txBody>
+          <a:bodyPr vert="horz" lIns="91440" tIns="45720" rIns="91440" bIns="45720" rtlCol="0"/>
+          <a:lstStyle>
+            <a:lvl1pPr algn="r">
+              <a:defRPr sz="1200"/>
+            </a:lvl1pPr>
+          </a:lstStyle>
+          <a:p>
+            <a:fld id="{571B4E93-09C8-4657-9AE1-E207D92A3462}" type="datetimeFigureOut">
+              <a:rPr lang="ru-RU" smtClean="0"/>
+              <a:t>24.05.2026</a:t>
+            </a:fld>
+            <a:endParaRPr lang="ru-RU"/>
+          </a:p>
+        </p:txBody>
+      </p:sp>
+      <p:sp>
+        <p:nvSpPr>
+          <p:cNvPr id="4" name="Образ слайда 3"/>
+          <p:cNvSpPr>
+            <a:spLocks noGrp="1" noRot="1" noChangeAspect="1"/>
+          </p:cNvSpPr>
+          <p:nvPr>
+            <p:ph type="sldImg" idx="2"/>
+          </p:nvPr>
+        </p:nvSpPr>
+        <p:spPr>
+          <a:xfrm>
+            <a:off x="685800" y="1143000"/>
+            <a:ext cx="5486400" cy="3086100"/>
+          </a:xfrm>
+          <a:prstGeom prst="rect">
+            <a:avLst/>
+          </a:prstGeom>
+          <a:noFill/>
+          <a:ln w="12700">
+            <a:solidFill>
+              <a:prstClr val="black"/>
+            </a:solidFill>
+          </a:ln>
+        </p:spPr>
+        <p:txBody>
+          <a:bodyPr vert="horz" lIns="91440" tIns="45720" rIns="91440" bIns="45720" rtlCol="0" anchor="ctr"/>
+          <a:lstStyle/>
+          <a:p>
+            <a:endParaRPr lang="ru-RU"/>
+          </a:p>
+        </p:txBody>
+      </p:sp>
+      <p:sp>
+        <p:nvSpPr>
+          <p:cNvPr id="5" name="Заметки 4"/>
+          <p:cNvSpPr>
+            <a:spLocks noGrp="1"/>
+          </p:cNvSpPr>
+          <p:nvPr>
+            <p:ph type="body" sz="quarter" idx="3"/>
+          </p:nvPr>
+        </p:nvSpPr>
+        <p:spPr>
+          <a:xfrm>
+            <a:off x="685800" y="4400550"/>
+            <a:ext cx="5486400" cy="3600450"/>
+          </a:xfrm>
+          <a:prstGeom prst="rect">
+            <a:avLst/>
+          </a:prstGeom>
+        </p:spPr>
+        <p:txBody>
+          <a:bodyPr vert="horz" lIns="91440" tIns="45720" rIns="91440" bIns="45720" rtlCol="0"/>
+          <a:lstStyle/>
+          <a:p>
+            <a:pPr lvl="0"/>
+            <a:r>
+              <a:rPr lang="ru-RU" smtClean="0"/>
+              <a:t>Образец текста</a:t>
+            </a:r>
+          </a:p>
+          <a:p>
+            <a:pPr lvl="1"/>
+            <a:r>
+              <a:rPr lang="ru-RU" smtClean="0"/>
+              <a:t>Второй уровень</a:t>
+            </a:r>
+          </a:p>
+          <a:p>
+            <a:pPr lvl="2"/>
+            <a:r>
+              <a:rPr lang="ru-RU" smtClean="0"/>
+              <a:t>Третий уровень</a:t>
+            </a:r>
+          </a:p>
+          <a:p>
+            <a:pPr lvl="3"/>
+            <a:r>
+              <a:rPr lang="ru-RU" smtClean="0"/>
+              <a:t>Четвертый уровень</a:t>
+            </a:r>
+          </a:p>
+          <a:p>
+            <a:pPr lvl="4"/>
+            <a:r>
+              <a:rPr lang="ru-RU" smtClean="0"/>
+              <a:t>Пятый уровень</a:t>
+            </a:r>
+            <a:endParaRPr lang="ru-RU"/>
+          </a:p>
+        </p:txBody>
+      </p:sp>
+      <p:sp>
+        <p:nvSpPr>
+          <p:cNvPr id="6" name="Нижний колонтитул 5"/>
+          <p:cNvSpPr>
+            <a:spLocks noGrp="1"/>
+          </p:cNvSpPr>
+          <p:nvPr>
+            <p:ph type="ftr" sz="quarter" idx="4"/>
+          </p:nvPr>
+        </p:nvSpPr>
+        <p:spPr>
+          <a:xfrm>
+            <a:off x="0" y="8685213"/>
+            <a:ext cx="2971800" cy="458787"/>
+          </a:xfrm>
+          <a:prstGeom prst="rect">
+            <a:avLst/>
+          </a:prstGeom>
+        </p:spPr>
+        <p:txBody>
+          <a:bodyPr vert="horz" lIns="91440" tIns="45720" rIns="91440" bIns="45720" rtlCol="0" anchor="b"/>
+          <a:lstStyle>
+            <a:lvl1pPr algn="l">
+              <a:defRPr sz="1200"/>
+            </a:lvl1pPr>
+          </a:lstStyle>
+          <a:p>
+            <a:endParaRPr lang="ru-RU"/>
+          </a:p>
+        </p:txBody>
+      </p:sp>
+      <p:sp>
+        <p:nvSpPr>
+          <p:cNvPr id="7" name="Номер слайда 6"/>
+          <p:cNvSpPr>
+            <a:spLocks noGrp="1"/>
+          </p:cNvSpPr>
+          <p:nvPr>
+            <p:ph type="sldNum" sz="quarter" idx="5"/>
+          </p:nvPr>
+        </p:nvSpPr>
+        <p:spPr>
+          <a:xfrm>
+            <a:off x="3884613" y="8685213"/>
+            <a:ext cx="2971800" cy="458787"/>
+          </a:xfrm>
+          <a:prstGeom prst="rect">
+            <a:avLst/>
+          </a:prstGeom>
+        </p:spPr>
+        <p:txBody>
+          <a:bodyPr vert="horz" lIns="91440" tIns="45720" rIns="91440" bIns="45720" rtlCol="0" anchor="b"/>
+          <a:lstStyle>
+            <a:lvl1pPr algn="r">
+              <a:defRPr sz="1200"/>
+            </a:lvl1pPr>
+          </a:lstStyle>
+          <a:p>
+            <a:fld id="{9A51E630-1A06-4B65-8509-713E93B70306}" type="slidenum">
+              <a:rPr lang="ru-RU" smtClean="0"/>
+              <a:t>‹#›</a:t>
+            </a:fld>
+            <a:endParaRPr lang="ru-RU"/>
+          </a:p>
+        </p:txBody>
+      </p:sp>
+    </p:spTree>
+    <p:extLst>
+      <p:ext uri="{BB962C8B-B14F-4D97-AF65-F5344CB8AC3E}">
+        <p14:creationId xmlns:p14="http://schemas.microsoft.com/office/powerpoint/2010/main" val="3749785338"/>
+      </p:ext>
+    </p:extLst>
+  </p:cSld>
+  <p:clrMap bg1="lt1" tx1="dk1" bg2="lt2" tx2="dk2" accent1="accent1" accent2="accent2" accent3="accent3" accent4="accent4" accent5="accent5" accent6="accent6" hlink="hlink" folHlink="folHlink"/>
+  <p:notesStyle>
+    <a:lvl1pPr marL="0" algn="l" defTabSz="914400" rtl="0" eaLnBrk="1" latinLnBrk="0" hangingPunct="1">
+      <a:defRPr sz="1200" kern="1200">
+        <a:solidFill>
+          <a:schemeClr val="tx1"/>
+        </a:solidFill>
+        <a:latin typeface="+mn-lt"/>
+        <a:ea typeface="+mn-ea"/>
+        <a:cs typeface="+mn-cs"/>
+      </a:defRPr>
+    </a:lvl1pPr>
+    <a:lvl2pPr marL="457200" algn="l" defTabSz="914400" rtl="0" eaLnBrk="1" latinLnBrk="0" hangingPunct="1">
+      <a:defRPr sz="1200" kern="1200">
+        <a:solidFill>
+          <a:schemeClr val="tx1"/>
+        </a:solidFill>
+        <a:latin typeface="+mn-lt"/>
+        <a:ea typeface="+mn-ea"/>
+        <a:cs typeface="+mn-cs"/>
+      </a:defRPr>
+    </a:lvl2pPr>
+    <a:lvl3pPr marL="914400" algn="l" defTabSz="914400" rtl="0" eaLnBrk="1" latinLnBrk="0" hangingPunct="1">
+      <a:defRPr sz="1200" kern="1200">
+        <a:solidFill>
+          <a:schemeClr val="tx1"/>
+        </a:solidFill>
+        <a:latin typeface="+mn-lt"/>
+        <a:ea typeface="+mn-ea"/>
+        <a:cs typeface="+mn-cs"/>
+      </a:defRPr>
+    </a:lvl3pPr>
+    <a:lvl4pPr marL="1371600" algn="l" defTabSz="914400" rtl="0" eaLnBrk="1" latinLnBrk="0" hangingPunct="1">
+      <a:defRPr sz="1200" kern="1200">
+        <a:solidFill>
+          <a:schemeClr val="tx1"/>
+        </a:solidFill>
+        <a:latin typeface="+mn-lt"/>
+        <a:ea typeface="+mn-ea"/>
+        <a:cs typeface="+mn-cs"/>
+      </a:defRPr>
+    </a:lvl4pPr>
+    <a:lvl5pPr marL="1828800" algn="l" defTabSz="914400" rtl="0" eaLnBrk="1" latinLnBrk="0" hangingPunct="1">
+      <a:defRPr sz="1200" kern="1200">
+        <a:solidFill>
+          <a:schemeClr val="tx1"/>
+        </a:solidFill>
+        <a:latin typeface="+mn-lt"/>
+        <a:ea typeface="+mn-ea"/>
+        <a:cs typeface="+mn-cs"/>
+      </a:defRPr>
+    </a:lvl5pPr>
+    <a:lvl6pPr marL="2286000" algn="l" defTabSz="914400" rtl="0" eaLnBrk="1" latinLnBrk="0" hangingPunct="1">
+      <a:defRPr sz="1200" kern="1200">
+        <a:solidFill>
+          <a:schemeClr val="tx1"/>
+        </a:solidFill>
+        <a:latin typeface="+mn-lt"/>
+        <a:ea typeface="+mn-ea"/>
+        <a:cs typeface="+mn-cs"/>
+      </a:defRPr>
+    </a:lvl6pPr>
+    <a:lvl7pPr marL="2743200" algn="l" defTabSz="914400" rtl="0" eaLnBrk="1" latinLnBrk="0" hangingPunct="1">
+      <a:defRPr sz="1200" kern="1200">
+        <a:solidFill>
+          <a:schemeClr val="tx1"/>
+        </a:solidFill>
+        <a:latin typeface="+mn-lt"/>
+        <a:ea typeface="+mn-ea"/>
+        <a:cs typeface="+mn-cs"/>
+      </a:defRPr>
+    </a:lvl7pPr>
+    <a:lvl8pPr marL="3200400" algn="l" defTabSz="914400" rtl="0" eaLnBrk="1" latinLnBrk="0" hangingPunct="1">
+      <a:defRPr sz="1200" kern="1200">
+        <a:solidFill>
+          <a:schemeClr val="tx1"/>
+        </a:solidFill>
+        <a:latin typeface="+mn-lt"/>
+        <a:ea typeface="+mn-ea"/>
+        <a:cs typeface="+mn-cs"/>
+      </a:defRPr>
+    </a:lvl8pPr>
+    <a:lvl9pPr marL="3657600" algn="l" defTabSz="914400" rtl="0" eaLnBrk="1" latinLnBrk="0" hangingPunct="1">
+      <a:defRPr sz="1200" kern="1200">
+        <a:solidFill>
+          <a:schemeClr val="tx1"/>
+        </a:solidFill>
+        <a:latin typeface="+mn-lt"/>
+        <a:ea typeface="+mn-ea"/>
+        <a:cs typeface="+mn-cs"/>
+      </a:defRPr>
+    </a:lvl9pPr>
+  </p:notesStyle>
+</p:notesMaster>
+</file>
+
+<file path=ppt/notesSlides/notesSlide1.xml><?xml version="1.0" encoding="utf-8"?>
+<p:notes xmlns:a="http://schemas.openxmlformats.org/drawingml/2006/main" xmlns:r="http://schemas.openxmlformats.org/officeDocument/2006/relationships" xmlns:p="http://schemas.openxmlformats.org/presentationml/2006/main">
+  <p:cSld>
+    <p:spTree>
+      <p:nvGrpSpPr>
+        <p:cNvPr id="1" name=""/>
+        <p:cNvGrpSpPr/>
+        <p:nvPr/>
+      </p:nvGrpSpPr>
+      <p:grpSpPr>
+        <a:xfrm>
+          <a:off x="0" y="0"/>
+          <a:ext cx="0" cy="0"/>
+          <a:chOff x="0" y="0"/>
+          <a:chExt cx="0" cy="0"/>
+        </a:xfrm>
+      </p:grpSpPr>
+      <p:sp>
+        <p:nvSpPr>
+          <p:cNvPr id="2" name="Образ слайда 1"/>
+          <p:cNvSpPr>
+            <a:spLocks noGrp="1" noRot="1" noChangeAspect="1"/>
+          </p:cNvSpPr>
+          <p:nvPr>
+            <p:ph type="sldImg"/>
+          </p:nvPr>
+        </p:nvSpPr>
+        <p:spPr/>
+      </p:sp>
+      <p:sp>
+        <p:nvSpPr>
+          <p:cNvPr id="3" name="Заметки 2"/>
+          <p:cNvSpPr>
+            <a:spLocks noGrp="1"/>
+          </p:cNvSpPr>
+          <p:nvPr>
+            <p:ph type="body" idx="1"/>
+          </p:nvPr>
+        </p:nvSpPr>
+        <p:spPr/>
+        <p:txBody>
+          <a:bodyPr/>
+          <a:lstStyle/>
+          <a:p>
+            <a:endParaRPr lang="ru-RU"/>
+          </a:p>
+        </p:txBody>
+      </p:sp>
+      <p:sp>
+        <p:nvSpPr>
+          <p:cNvPr id="4" name="Номер слайда 3"/>
+          <p:cNvSpPr>
+            <a:spLocks noGrp="1"/>
+          </p:cNvSpPr>
+          <p:nvPr>
+            <p:ph type="sldNum" sz="quarter" idx="10"/>
+          </p:nvPr>
+        </p:nvSpPr>
+        <p:spPr/>
+        <p:txBody>
+          <a:bodyPr/>
+          <a:lstStyle/>
+          <a:p>
+            <a:fld id="{9A51E630-1A06-4B65-8509-713E93B70306}" type="slidenum">
+              <a:rPr lang="ru-RU" smtClean="0"/>
+              <a:t>1</a:t>
+            </a:fld>
+            <a:endParaRPr lang="ru-RU"/>
+          </a:p>
+        </p:txBody>
+      </p:sp>
+    </p:spTree>
+    <p:extLst>
+      <p:ext uri="{BB962C8B-B14F-4D97-AF65-F5344CB8AC3E}">
+        <p14:creationId xmlns:p14="http://schemas.microsoft.com/office/powerpoint/2010/main" val="218094269"/>
+      </p:ext>
+    </p:extLst>
+  </p:cSld>
+  <p:clrMapOvr>
+    <a:masterClrMapping/>
+  </p:clrMapOvr>
+</p:notes>
+</file>
+
+<file path=ppt/notesSlides/notesSlide2.xml><?xml version="1.0" encoding="utf-8"?>
+<p:notes xmlns:a="http://schemas.openxmlformats.org/drawingml/2006/main" xmlns:r="http://schemas.openxmlformats.org/officeDocument/2006/relationships" xmlns:p="http://schemas.openxmlformats.org/presentationml/2006/main">
+  <p:cSld>
+    <p:spTree>
+      <p:nvGrpSpPr>
+        <p:cNvPr id="1" name=""/>
+        <p:cNvGrpSpPr/>
+        <p:nvPr/>
+      </p:nvGrpSpPr>
+      <p:grpSpPr>
+        <a:xfrm>
+          <a:off x="0" y="0"/>
+          <a:ext cx="0" cy="0"/>
+          <a:chOff x="0" y="0"/>
+          <a:chExt cx="0" cy="0"/>
+        </a:xfrm>
+      </p:grpSpPr>
+      <p:sp>
+        <p:nvSpPr>
+          <p:cNvPr id="2" name="Образ слайда 1"/>
+          <p:cNvSpPr>
+            <a:spLocks noGrp="1" noRot="1" noChangeAspect="1"/>
+          </p:cNvSpPr>
+          <p:nvPr>
+            <p:ph type="sldImg"/>
+          </p:nvPr>
+        </p:nvSpPr>
+        <p:spPr/>
+      </p:sp>
+      <p:sp>
+        <p:nvSpPr>
+          <p:cNvPr id="3" name="Заметки 2"/>
+          <p:cNvSpPr>
+            <a:spLocks noGrp="1"/>
+          </p:cNvSpPr>
+          <p:nvPr>
+            <p:ph type="body" idx="1"/>
+          </p:nvPr>
+        </p:nvSpPr>
+        <p:spPr/>
+        <p:txBody>
+          <a:bodyPr/>
+          <a:lstStyle/>
+          <a:p>
+            <a:endParaRPr lang="ru-RU"/>
+          </a:p>
+        </p:txBody>
+      </p:sp>
+      <p:sp>
+        <p:nvSpPr>
+          <p:cNvPr id="4" name="Номер слайда 3"/>
+          <p:cNvSpPr>
+            <a:spLocks noGrp="1"/>
+          </p:cNvSpPr>
+          <p:nvPr>
+            <p:ph type="sldNum" sz="quarter" idx="10"/>
+          </p:nvPr>
+        </p:nvSpPr>
+        <p:spPr/>
+        <p:txBody>
+          <a:bodyPr/>
+          <a:lstStyle/>
+          <a:p>
+            <a:fld id="{9A51E630-1A06-4B65-8509-713E93B70306}" type="slidenum">
+              <a:rPr lang="ru-RU" smtClean="0"/>
+              <a:t>2</a:t>
+            </a:fld>
+            <a:endParaRPr lang="ru-RU"/>
+          </a:p>
+        </p:txBody>
+      </p:sp>
+    </p:spTree>
+    <p:extLst>
+      <p:ext uri="{BB962C8B-B14F-4D97-AF65-F5344CB8AC3E}">
+        <p14:creationId xmlns:p14="http://schemas.microsoft.com/office/powerpoint/2010/main" val="4072320958"/>
+      </p:ext>
+    </p:extLst>
+  </p:cSld>
+  <p:clrMapOvr>
+    <a:masterClrMapping/>
+  </p:clrMapOvr>
+</p:notes>
+</file>
+
+<file path=ppt/notesSlides/notesSlide3.xml><?xml version="1.0" encoding="utf-8"?>
+<p:notes xmlns:a="http://schemas.openxmlformats.org/drawingml/2006/main" xmlns:r="http://schemas.openxmlformats.org/officeDocument/2006/relationships" xmlns:p="http://schemas.openxmlformats.org/presentationml/2006/main">
+  <p:cSld>
+    <p:spTree>
+      <p:nvGrpSpPr>
+        <p:cNvPr id="1" name=""/>
+        <p:cNvGrpSpPr/>
+        <p:nvPr/>
+      </p:nvGrpSpPr>
+      <p:grpSpPr>
+        <a:xfrm>
+          <a:off x="0" y="0"/>
+          <a:ext cx="0" cy="0"/>
+          <a:chOff x="0" y="0"/>
+          <a:chExt cx="0" cy="0"/>
+        </a:xfrm>
+      </p:grpSpPr>
+      <p:sp>
+        <p:nvSpPr>
+          <p:cNvPr id="2" name="Образ слайда 1"/>
+          <p:cNvSpPr>
+            <a:spLocks noGrp="1" noRot="1" noChangeAspect="1"/>
+          </p:cNvSpPr>
+          <p:nvPr>
+            <p:ph type="sldImg"/>
+          </p:nvPr>
+        </p:nvSpPr>
+        <p:spPr/>
+      </p:sp>
+      <p:sp>
+        <p:nvSpPr>
+          <p:cNvPr id="3" name="Заметки 2"/>
+          <p:cNvSpPr>
+            <a:spLocks noGrp="1"/>
+          </p:cNvSpPr>
+          <p:nvPr>
+            <p:ph type="body" idx="1"/>
+          </p:nvPr>
+        </p:nvSpPr>
+        <p:spPr/>
+        <p:txBody>
+          <a:bodyPr/>
+          <a:lstStyle/>
+          <a:p>
+            <a:endParaRPr lang="ru-RU"/>
+          </a:p>
+        </p:txBody>
+      </p:sp>
+      <p:sp>
+        <p:nvSpPr>
+          <p:cNvPr id="4" name="Номер слайда 3"/>
+          <p:cNvSpPr>
+            <a:spLocks noGrp="1"/>
+          </p:cNvSpPr>
+          <p:nvPr>
+            <p:ph type="sldNum" sz="quarter" idx="10"/>
+          </p:nvPr>
+        </p:nvSpPr>
+        <p:spPr/>
+        <p:txBody>
+          <a:bodyPr/>
+          <a:lstStyle/>
+          <a:p>
+            <a:fld id="{9A51E630-1A06-4B65-8509-713E93B70306}" type="slidenum">
+              <a:rPr lang="ru-RU" smtClean="0"/>
+              <a:t>6</a:t>
+            </a:fld>
+            <a:endParaRPr lang="ru-RU"/>
+          </a:p>
+        </p:txBody>
+      </p:sp>
+    </p:spTree>
+    <p:extLst>
+      <p:ext uri="{BB962C8B-B14F-4D97-AF65-F5344CB8AC3E}">
+        <p14:creationId xmlns:p14="http://schemas.microsoft.com/office/powerpoint/2010/main" val="1239640364"/>
+      </p:ext>
+    </p:extLst>
+  </p:cSld>
+  <p:clrMapOvr>
+    <a:masterClrMapping/>
+  </p:clrMapOvr>
+</p:notes>
+</file>
+
 <file path=ppt/slideLayouts/slideLayout1.xml><?xml version="1.0" encoding="utf-8"?>
 <p:sldLayout xmlns:a="http://schemas.openxmlformats.org/drawingml/2006/main" xmlns:r="http://schemas.openxmlformats.org/officeDocument/2006/relationships" xmlns:p="http://schemas.openxmlformats.org/presentationml/2006/main" type="title" preserve="1">
   <p:cSld name="Титульный слайд">
@@ -258,9 +864,9 @@
           <a:bodyPr/>
           <a:lstStyle/>
           <a:p>
-            <a:fld id="{95CB5F0A-6C7A-41AA-BA2C-973DBB5D056E}" type="datetimeFigureOut">
-              <a:rPr lang="ru-RU" smtClean="0"/>
-              <a:t>21.05.2026</a:t>
+            <a:fld id="{6D5D7D07-0564-4A47-AA84-8EF523C2E389}" type="datetime1">
+              <a:rPr lang="ru-RU" smtClean="0"/>
+              <a:t>24.05.2026</a:t>
             </a:fld>
             <a:endParaRPr lang="ru-RU"/>
           </a:p>
@@ -428,9 +1034,9 @@
           <a:bodyPr/>
           <a:lstStyle/>
           <a:p>
-            <a:fld id="{95CB5F0A-6C7A-41AA-BA2C-973DBB5D056E}" type="datetimeFigureOut">
-              <a:rPr lang="ru-RU" smtClean="0"/>
-              <a:t>21.05.2026</a:t>
+            <a:fld id="{E4E72D43-09B3-4D62-92E3-360381D9C2F6}" type="datetime1">
+              <a:rPr lang="ru-RU" smtClean="0"/>
+              <a:t>24.05.2026</a:t>
             </a:fld>
             <a:endParaRPr lang="ru-RU"/>
           </a:p>
@@ -608,9 +1214,9 @@
           <a:bodyPr/>
           <a:lstStyle/>
           <a:p>
-            <a:fld id="{95CB5F0A-6C7A-41AA-BA2C-973DBB5D056E}" type="datetimeFigureOut">
-              <a:rPr lang="ru-RU" smtClean="0"/>
-              <a:t>21.05.2026</a:t>
+            <a:fld id="{5B966904-3332-4021-8626-8C0397F396FE}" type="datetime1">
+              <a:rPr lang="ru-RU" smtClean="0"/>
+              <a:t>24.05.2026</a:t>
             </a:fld>
             <a:endParaRPr lang="ru-RU"/>
           </a:p>
@@ -778,9 +1384,9 @@
           <a:bodyPr/>
           <a:lstStyle/>
           <a:p>
-            <a:fld id="{95CB5F0A-6C7A-41AA-BA2C-973DBB5D056E}" type="datetimeFigureOut">
-              <a:rPr lang="ru-RU" smtClean="0"/>
-              <a:t>21.05.2026</a:t>
+            <a:fld id="{13052302-0383-4AD1-9449-8797A7A73218}" type="datetime1">
+              <a:rPr lang="ru-RU" smtClean="0"/>
+              <a:t>24.05.2026</a:t>
             </a:fld>
             <a:endParaRPr lang="ru-RU"/>
           </a:p>
@@ -818,10 +1424,18 @@
         <p:spPr/>
         <p:txBody>
           <a:bodyPr/>
-          <a:lstStyle/>
+          <a:lstStyle>
+            <a:lvl1pPr>
+              <a:defRPr sz="1800">
+                <a:latin typeface="Times New Roman" panose="02020603050405020304" pitchFamily="18" charset="0"/>
+                <a:cs typeface="Times New Roman" panose="02020603050405020304" pitchFamily="18" charset="0"/>
+              </a:defRPr>
+            </a:lvl1pPr>
+          </a:lstStyle>
           <a:p>
             <a:fld id="{65A3789A-D406-449F-860F-117B58A45219}" type="slidenum">
               <a:rPr lang="ru-RU" smtClean="0"/>
+              <a:pPr/>
               <a:t>‹#›</a:t>
             </a:fld>
             <a:endParaRPr lang="ru-RU"/>
@@ -838,6 +1452,13 @@
   <p:clrMapOvr>
     <a:masterClrMapping/>
   </p:clrMapOvr>
+  <p:timing>
+    <p:tnLst>
+      <p:par>
+        <p:cTn id="1" dur="indefinite" restart="never" nodeType="tmRoot"/>
+      </p:par>
+    </p:tnLst>
+  </p:timing>
 </p:sldLayout>
 </file>
 
@@ -1024,9 +1645,9 @@
           <a:bodyPr/>
           <a:lstStyle/>
           <a:p>
-            <a:fld id="{95CB5F0A-6C7A-41AA-BA2C-973DBB5D056E}" type="datetimeFigureOut">
-              <a:rPr lang="ru-RU" smtClean="0"/>
-              <a:t>21.05.2026</a:t>
+            <a:fld id="{6F049C46-2208-4326-B2F2-580AEF474A78}" type="datetime1">
+              <a:rPr lang="ru-RU" smtClean="0"/>
+              <a:t>24.05.2026</a:t>
             </a:fld>
             <a:endParaRPr lang="ru-RU"/>
           </a:p>
@@ -1256,9 +1877,9 @@
           <a:bodyPr/>
           <a:lstStyle/>
           <a:p>
-            <a:fld id="{95CB5F0A-6C7A-41AA-BA2C-973DBB5D056E}" type="datetimeFigureOut">
-              <a:rPr lang="ru-RU" smtClean="0"/>
-              <a:t>21.05.2026</a:t>
+            <a:fld id="{FD4B8C27-E1E2-4B89-8318-D50CE0BB87D4}" type="datetime1">
+              <a:rPr lang="ru-RU" smtClean="0"/>
+              <a:t>24.05.2026</a:t>
             </a:fld>
             <a:endParaRPr lang="ru-RU"/>
           </a:p>
@@ -1623,9 +2244,9 @@
           <a:bodyPr/>
           <a:lstStyle/>
           <a:p>
-            <a:fld id="{95CB5F0A-6C7A-41AA-BA2C-973DBB5D056E}" type="datetimeFigureOut">
-              <a:rPr lang="ru-RU" smtClean="0"/>
-              <a:t>21.05.2026</a:t>
+            <a:fld id="{4C4C8A41-9D88-4F87-9C62-37D5804BE088}" type="datetime1">
+              <a:rPr lang="ru-RU" smtClean="0"/>
+              <a:t>24.05.2026</a:t>
             </a:fld>
             <a:endParaRPr lang="ru-RU"/>
           </a:p>
@@ -1741,9 +2362,9 @@
           <a:bodyPr/>
           <a:lstStyle/>
           <a:p>
-            <a:fld id="{95CB5F0A-6C7A-41AA-BA2C-973DBB5D056E}" type="datetimeFigureOut">
-              <a:rPr lang="ru-RU" smtClean="0"/>
-              <a:t>21.05.2026</a:t>
+            <a:fld id="{BF9184BC-4182-4655-889A-9B0525A544CD}" type="datetime1">
+              <a:rPr lang="ru-RU" smtClean="0"/>
+              <a:t>24.05.2026</a:t>
             </a:fld>
             <a:endParaRPr lang="ru-RU"/>
           </a:p>
@@ -1836,9 +2457,9 @@
           <a:bodyPr/>
           <a:lstStyle/>
           <a:p>
-            <a:fld id="{95CB5F0A-6C7A-41AA-BA2C-973DBB5D056E}" type="datetimeFigureOut">
-              <a:rPr lang="ru-RU" smtClean="0"/>
-              <a:t>21.05.2026</a:t>
+            <a:fld id="{B068B67E-82D6-4143-BB07-2516ACE40AF5}" type="datetime1">
+              <a:rPr lang="ru-RU" smtClean="0"/>
+              <a:t>24.05.2026</a:t>
             </a:fld>
             <a:endParaRPr lang="ru-RU"/>
           </a:p>
@@ -2113,9 +2734,9 @@
           <a:bodyPr/>
           <a:lstStyle/>
           <a:p>
-            <a:fld id="{95CB5F0A-6C7A-41AA-BA2C-973DBB5D056E}" type="datetimeFigureOut">
-              <a:rPr lang="ru-RU" smtClean="0"/>
-              <a:t>21.05.2026</a:t>
+            <a:fld id="{4407820B-2673-43EF-8199-C82C44DB62A0}" type="datetime1">
+              <a:rPr lang="ru-RU" smtClean="0"/>
+              <a:t>24.05.2026</a:t>
             </a:fld>
             <a:endParaRPr lang="ru-RU"/>
           </a:p>
@@ -2366,9 +2987,9 @@
           <a:bodyPr/>
           <a:lstStyle/>
           <a:p>
-            <a:fld id="{95CB5F0A-6C7A-41AA-BA2C-973DBB5D056E}" type="datetimeFigureOut">
-              <a:rPr lang="ru-RU" smtClean="0"/>
-              <a:t>21.05.2026</a:t>
+            <a:fld id="{07A42FD7-A1F4-4DDE-AB85-A9215765061C}" type="datetime1">
+              <a:rPr lang="ru-RU" smtClean="0"/>
+              <a:t>24.05.2026</a:t>
             </a:fld>
             <a:endParaRPr lang="ru-RU"/>
           </a:p>
@@ -2579,9 +3200,9 @@
             </a:lvl1pPr>
           </a:lstStyle>
           <a:p>
-            <a:fld id="{95CB5F0A-6C7A-41AA-BA2C-973DBB5D056E}" type="datetimeFigureOut">
-              <a:rPr lang="ru-RU" smtClean="0"/>
-              <a:t>21.05.2026</a:t>
+            <a:fld id="{DEB13D50-65F6-4088-BB37-A869858272C4}" type="datetime1">
+              <a:rPr lang="ru-RU" smtClean="0"/>
+              <a:t>24.05.2026</a:t>
             </a:fld>
             <a:endParaRPr lang="ru-RU"/>
           </a:p>
@@ -2686,6 +3307,7 @@
     <p:sldLayoutId id="2147483658" r:id="rId10"/>
     <p:sldLayoutId id="2147483659" r:id="rId11"/>
   </p:sldLayoutIdLst>
+  <p:hf hdr="0" ftr="0" dt="0"/>
   <p:txStyles>
     <p:titleStyle>
       <a:lvl1pPr algn="l" defTabSz="914400" rtl="0" eaLnBrk="1" latinLnBrk="0" hangingPunct="1">
@@ -3310,18 +3932,6 @@
               <a:t> </a:t>
             </a:r>
             <a:r>
-              <a:rPr lang="ru-RU" sz="2600" b="1" dirty="0" err="1" smtClean="0">
-                <a:solidFill>
-                  <a:schemeClr val="tx1"/>
-                </a:solidFill>
-                <a:latin typeface="Times New Roman" panose="02020603050405020304" pitchFamily="18" charset="0"/>
-                <a:ea typeface="Times New Roman" panose="02020603050405020304"/>
-                <a:cs typeface="Times New Roman" panose="02020603050405020304" pitchFamily="18" charset="0"/>
-                <a:sym typeface="Times New Roman" panose="02020603050405020304"/>
-              </a:rPr>
-              <a:t>Цирлев</a:t>
-            </a:r>
-            <a:r>
               <a:rPr lang="ru-RU" sz="2600" b="1" dirty="0" smtClean="0">
                 <a:solidFill>
                   <a:schemeClr val="tx1"/>
@@ -3331,7 +3941,28 @@
                 <a:cs typeface="Times New Roman" panose="02020603050405020304" pitchFamily="18" charset="0"/>
                 <a:sym typeface="Times New Roman" panose="02020603050405020304"/>
               </a:rPr>
-              <a:t> Николай Владимирович</a:t>
+              <a:t>Цир</a:t>
+            </a:r>
+            <a:r>
+              <a:rPr lang="ru-RU" sz="2600" b="1" dirty="0">
+                <a:latin typeface="Times New Roman" panose="02020603050405020304" pitchFamily="18" charset="0"/>
+                <a:ea typeface="Times New Roman" panose="02020603050405020304"/>
+                <a:cs typeface="Times New Roman" panose="02020603050405020304" pitchFamily="18" charset="0"/>
+                <a:sym typeface="Times New Roman" panose="02020603050405020304"/>
+              </a:rPr>
+              <a:t>у</a:t>
+            </a:r>
+            <a:r>
+              <a:rPr lang="ru-RU" sz="2600" b="1" dirty="0" smtClean="0">
+                <a:solidFill>
+                  <a:schemeClr val="tx1"/>
+                </a:solidFill>
+                <a:latin typeface="Times New Roman" panose="02020603050405020304" pitchFamily="18" charset="0"/>
+                <a:ea typeface="Times New Roman" panose="02020603050405020304"/>
+                <a:cs typeface="Times New Roman" panose="02020603050405020304" pitchFamily="18" charset="0"/>
+                <a:sym typeface="Times New Roman" panose="02020603050405020304"/>
+              </a:rPr>
+              <a:t>лев Николай Владимирович</a:t>
             </a:r>
             <a:endParaRPr lang="ru-RU" sz="2600" dirty="0">
               <a:solidFill>
@@ -3989,7 +4620,7 @@
           <p:nvPr/>
         </p:nvPicPr>
         <p:blipFill>
-          <a:blip r:embed="rId2"/>
+          <a:blip r:embed="rId3"/>
           <a:stretch>
             <a:fillRect/>
           </a:stretch>
@@ -4015,7 +4646,7 @@
           <p:nvPr/>
         </p:nvPicPr>
         <p:blipFill>
-          <a:blip r:embed="rId3"/>
+          <a:blip r:embed="rId4"/>
           <a:stretch>
             <a:fillRect/>
           </a:stretch>
@@ -4083,694 +4714,6 @@
         </p:nvSpPr>
         <p:spPr/>
         <p:txBody>
-          <a:bodyPr/>
-          <a:lstStyle/>
-          <a:p>
-            <a:r>
-              <a:rPr lang="ru-RU" dirty="0" smtClean="0">
-                <a:latin typeface="Times New Roman" panose="02020603050405020304" pitchFamily="18" charset="0"/>
-                <a:cs typeface="Times New Roman" panose="02020603050405020304" pitchFamily="18" charset="0"/>
-              </a:rPr>
-              <a:t>Демонстрация </a:t>
-            </a:r>
-            <a:r>
-              <a:rPr lang="en-US" dirty="0" smtClean="0">
-                <a:latin typeface="Times New Roman" panose="02020603050405020304" pitchFamily="18" charset="0"/>
-                <a:cs typeface="Times New Roman" panose="02020603050405020304" pitchFamily="18" charset="0"/>
-              </a:rPr>
-              <a:t>UI</a:t>
-            </a:r>
-            <a:endParaRPr lang="ru-RU" dirty="0">
-              <a:latin typeface="Times New Roman" panose="02020603050405020304" pitchFamily="18" charset="0"/>
-              <a:cs typeface="Times New Roman" panose="02020603050405020304" pitchFamily="18" charset="0"/>
-            </a:endParaRPr>
-          </a:p>
-        </p:txBody>
-      </p:sp>
-      <p:sp>
-        <p:nvSpPr>
-          <p:cNvPr id="5" name="TextBox 4"/>
-          <p:cNvSpPr txBox="1"/>
-          <p:nvPr/>
-        </p:nvSpPr>
-        <p:spPr>
-          <a:xfrm>
-            <a:off x="838200" y="1690688"/>
-            <a:ext cx="5058972" cy="646331"/>
-          </a:xfrm>
-          <a:prstGeom prst="rect">
-            <a:avLst/>
-          </a:prstGeom>
-          <a:noFill/>
-        </p:spPr>
-        <p:txBody>
-          <a:bodyPr wrap="square" rtlCol="0">
-            <a:spAutoFit/>
-          </a:bodyPr>
-          <a:lstStyle/>
-          <a:p>
-            <a:pPr algn="just"/>
-            <a:r>
-              <a:rPr lang="ru-RU" dirty="0" smtClean="0">
-                <a:latin typeface="Times New Roman" panose="02020603050405020304" pitchFamily="18" charset="0"/>
-                <a:cs typeface="Times New Roman" panose="02020603050405020304" pitchFamily="18" charset="0"/>
-              </a:rPr>
-              <a:t>Содержательная страница сгенерированного</a:t>
-            </a:r>
-            <a:r>
-              <a:rPr lang="en-US" dirty="0" smtClean="0">
-                <a:latin typeface="Times New Roman" panose="02020603050405020304" pitchFamily="18" charset="0"/>
-                <a:cs typeface="Times New Roman" panose="02020603050405020304" pitchFamily="18" charset="0"/>
-              </a:rPr>
-              <a:t> </a:t>
-            </a:r>
-            <a:r>
-              <a:rPr lang="ru-RU" dirty="0" smtClean="0">
-                <a:latin typeface="Times New Roman" panose="02020603050405020304" pitchFamily="18" charset="0"/>
-                <a:cs typeface="Times New Roman" panose="02020603050405020304" pitchFamily="18" charset="0"/>
-              </a:rPr>
-              <a:t>проекта договора в формате DOCX</a:t>
-            </a:r>
-            <a:endParaRPr lang="ru-RU" dirty="0">
-              <a:latin typeface="Times New Roman" panose="02020603050405020304" pitchFamily="18" charset="0"/>
-              <a:cs typeface="Times New Roman" panose="02020603050405020304" pitchFamily="18" charset="0"/>
-            </a:endParaRPr>
-          </a:p>
-        </p:txBody>
-      </p:sp>
-      <p:pic>
-        <p:nvPicPr>
-          <p:cNvPr id="3" name="Рисунок 2"/>
-          <p:cNvPicPr>
-            <a:picLocks noChangeAspect="1"/>
-          </p:cNvPicPr>
-          <p:nvPr/>
-        </p:nvPicPr>
-        <p:blipFill>
-          <a:blip r:embed="rId2">
-            <a:extLst>
-              <a:ext uri="{28A0092B-C50C-407E-A947-70E740481C1C}">
-                <a14:useLocalDpi xmlns:a14="http://schemas.microsoft.com/office/drawing/2010/main" val="0"/>
-              </a:ext>
-            </a:extLst>
-          </a:blip>
-          <a:stretch>
-            <a:fillRect/>
-          </a:stretch>
-        </p:blipFill>
-        <p:spPr>
-          <a:xfrm>
-            <a:off x="6485174" y="291415"/>
-            <a:ext cx="4868626" cy="6300575"/>
-          </a:xfrm>
-          <a:prstGeom prst="rect">
-            <a:avLst/>
-          </a:prstGeom>
-        </p:spPr>
-      </p:pic>
-    </p:spTree>
-    <p:extLst>
-      <p:ext uri="{BB962C8B-B14F-4D97-AF65-F5344CB8AC3E}">
-        <p14:creationId xmlns:p14="http://schemas.microsoft.com/office/powerpoint/2010/main" val="1125818833"/>
-      </p:ext>
-    </p:extLst>
-  </p:cSld>
-  <p:clrMapOvr>
-    <a:masterClrMapping/>
-  </p:clrMapOvr>
-  <p:timing>
-    <p:tnLst>
-      <p:par>
-        <p:cTn id="1" dur="indefinite" restart="never" nodeType="tmRoot"/>
-      </p:par>
-    </p:tnLst>
-  </p:timing>
-</p:sld>
-</file>
-
-<file path=ppt/slides/slide11.xml><?xml version="1.0" encoding="utf-8"?>
-<p:sld xmlns:a="http://schemas.openxmlformats.org/drawingml/2006/main" xmlns:r="http://schemas.openxmlformats.org/officeDocument/2006/relationships" xmlns:p="http://schemas.openxmlformats.org/presentationml/2006/main">
-  <p:cSld>
-    <p:spTree>
-      <p:nvGrpSpPr>
-        <p:cNvPr id="1" name=""/>
-        <p:cNvGrpSpPr/>
-        <p:nvPr/>
-      </p:nvGrpSpPr>
-      <p:grpSpPr>
-        <a:xfrm>
-          <a:off x="0" y="0"/>
-          <a:ext cx="0" cy="0"/>
-          <a:chOff x="0" y="0"/>
-          <a:chExt cx="0" cy="0"/>
-        </a:xfrm>
-      </p:grpSpPr>
-      <p:sp>
-        <p:nvSpPr>
-          <p:cNvPr id="2" name="Заголовок 1"/>
-          <p:cNvSpPr>
-            <a:spLocks noGrp="1"/>
-          </p:cNvSpPr>
-          <p:nvPr>
-            <p:ph type="title"/>
-          </p:nvPr>
-        </p:nvSpPr>
-        <p:spPr/>
-        <p:txBody>
-          <a:bodyPr/>
-          <a:lstStyle/>
-          <a:p>
-            <a:r>
-              <a:rPr lang="ru-RU" dirty="0" smtClean="0">
-                <a:latin typeface="Times New Roman" panose="02020603050405020304" pitchFamily="18" charset="0"/>
-                <a:cs typeface="Times New Roman" panose="02020603050405020304" pitchFamily="18" charset="0"/>
-              </a:rPr>
-              <a:t>Демонстрация </a:t>
-            </a:r>
-            <a:r>
-              <a:rPr lang="en-US" dirty="0" smtClean="0">
-                <a:latin typeface="Times New Roman" panose="02020603050405020304" pitchFamily="18" charset="0"/>
-                <a:cs typeface="Times New Roman" panose="02020603050405020304" pitchFamily="18" charset="0"/>
-              </a:rPr>
-              <a:t>UI</a:t>
-            </a:r>
-            <a:endParaRPr lang="ru-RU" dirty="0">
-              <a:latin typeface="Times New Roman" panose="02020603050405020304" pitchFamily="18" charset="0"/>
-              <a:cs typeface="Times New Roman" panose="02020603050405020304" pitchFamily="18" charset="0"/>
-            </a:endParaRPr>
-          </a:p>
-        </p:txBody>
-      </p:sp>
-      <p:sp>
-        <p:nvSpPr>
-          <p:cNvPr id="5" name="TextBox 4"/>
-          <p:cNvSpPr txBox="1"/>
-          <p:nvPr/>
-        </p:nvSpPr>
-        <p:spPr>
-          <a:xfrm>
-            <a:off x="2103474" y="5879518"/>
-            <a:ext cx="7985051" cy="369332"/>
-          </a:xfrm>
-          <a:prstGeom prst="rect">
-            <a:avLst/>
-          </a:prstGeom>
-          <a:noFill/>
-        </p:spPr>
-        <p:txBody>
-          <a:bodyPr wrap="square" rtlCol="0">
-            <a:spAutoFit/>
-          </a:bodyPr>
-          <a:lstStyle/>
-          <a:p>
-            <a:pPr algn="ctr"/>
-            <a:r>
-              <a:rPr lang="ru-RU" dirty="0" smtClean="0">
-                <a:latin typeface="Times New Roman" panose="02020603050405020304" pitchFamily="18" charset="0"/>
-                <a:cs typeface="Times New Roman" panose="02020603050405020304" pitchFamily="18" charset="0"/>
-              </a:rPr>
-              <a:t>Административная панель управления</a:t>
-            </a:r>
-            <a:r>
-              <a:rPr lang="en-US" dirty="0" smtClean="0">
-                <a:latin typeface="Times New Roman" panose="02020603050405020304" pitchFamily="18" charset="0"/>
-                <a:cs typeface="Times New Roman" panose="02020603050405020304" pitchFamily="18" charset="0"/>
-              </a:rPr>
-              <a:t> </a:t>
-            </a:r>
-            <a:r>
-              <a:rPr lang="ru-RU" dirty="0" smtClean="0">
-                <a:latin typeface="Times New Roman" panose="02020603050405020304" pitchFamily="18" charset="0"/>
-                <a:cs typeface="Times New Roman" panose="02020603050405020304" pitchFamily="18" charset="0"/>
-              </a:rPr>
-              <a:t>корпусом нормативных правовых актов</a:t>
-            </a:r>
-          </a:p>
-        </p:txBody>
-      </p:sp>
-      <p:pic>
-        <p:nvPicPr>
-          <p:cNvPr id="6" name="Рисунок 5"/>
-          <p:cNvPicPr>
-            <a:picLocks noChangeAspect="1"/>
-          </p:cNvPicPr>
-          <p:nvPr/>
-        </p:nvPicPr>
-        <p:blipFill>
-          <a:blip r:embed="rId2" cstate="print">
-            <a:extLst>
-              <a:ext uri="{28A0092B-C50C-407E-A947-70E740481C1C}">
-                <a14:useLocalDpi xmlns:a14="http://schemas.microsoft.com/office/drawing/2010/main" val="0"/>
-              </a:ext>
-            </a:extLst>
-          </a:blip>
-          <a:stretch>
-            <a:fillRect/>
-          </a:stretch>
-        </p:blipFill>
-        <p:spPr>
-          <a:xfrm>
-            <a:off x="2229388" y="1690688"/>
-            <a:ext cx="7733224" cy="4188830"/>
-          </a:xfrm>
-          <a:prstGeom prst="rect">
-            <a:avLst/>
-          </a:prstGeom>
-        </p:spPr>
-      </p:pic>
-    </p:spTree>
-    <p:extLst>
-      <p:ext uri="{BB962C8B-B14F-4D97-AF65-F5344CB8AC3E}">
-        <p14:creationId xmlns:p14="http://schemas.microsoft.com/office/powerpoint/2010/main" val="826703114"/>
-      </p:ext>
-    </p:extLst>
-  </p:cSld>
-  <p:clrMapOvr>
-    <a:masterClrMapping/>
-  </p:clrMapOvr>
-  <p:timing>
-    <p:tnLst>
-      <p:par>
-        <p:cTn id="1" dur="indefinite" restart="never" nodeType="tmRoot"/>
-      </p:par>
-    </p:tnLst>
-  </p:timing>
-</p:sld>
-</file>
-
-<file path=ppt/slides/slide12.xml><?xml version="1.0" encoding="utf-8"?>
-<p:sld xmlns:a="http://schemas.openxmlformats.org/drawingml/2006/main" xmlns:r="http://schemas.openxmlformats.org/officeDocument/2006/relationships" xmlns:p="http://schemas.openxmlformats.org/presentationml/2006/main">
-  <p:cSld>
-    <p:spTree>
-      <p:nvGrpSpPr>
-        <p:cNvPr id="1" name=""/>
-        <p:cNvGrpSpPr/>
-        <p:nvPr/>
-      </p:nvGrpSpPr>
-      <p:grpSpPr>
-        <a:xfrm>
-          <a:off x="0" y="0"/>
-          <a:ext cx="0" cy="0"/>
-          <a:chOff x="0" y="0"/>
-          <a:chExt cx="0" cy="0"/>
-        </a:xfrm>
-      </p:grpSpPr>
-      <p:sp>
-        <p:nvSpPr>
-          <p:cNvPr id="2" name="Заголовок 1"/>
-          <p:cNvSpPr>
-            <a:spLocks noGrp="1"/>
-          </p:cNvSpPr>
-          <p:nvPr>
-            <p:ph type="title"/>
-          </p:nvPr>
-        </p:nvSpPr>
-        <p:spPr/>
-        <p:txBody>
-          <a:bodyPr/>
-          <a:lstStyle/>
-          <a:p>
-            <a:r>
-              <a:rPr lang="ru-RU" dirty="0" smtClean="0">
-                <a:latin typeface="Times New Roman" panose="02020603050405020304" pitchFamily="18" charset="0"/>
-                <a:cs typeface="Times New Roman" panose="02020603050405020304" pitchFamily="18" charset="0"/>
-              </a:rPr>
-              <a:t>Демонстрация </a:t>
-            </a:r>
-            <a:r>
-              <a:rPr lang="en-US" dirty="0" smtClean="0">
-                <a:latin typeface="Times New Roman" panose="02020603050405020304" pitchFamily="18" charset="0"/>
-                <a:cs typeface="Times New Roman" panose="02020603050405020304" pitchFamily="18" charset="0"/>
-              </a:rPr>
-              <a:t>UI</a:t>
-            </a:r>
-            <a:endParaRPr lang="ru-RU" dirty="0">
-              <a:latin typeface="Times New Roman" panose="02020603050405020304" pitchFamily="18" charset="0"/>
-              <a:cs typeface="Times New Roman" panose="02020603050405020304" pitchFamily="18" charset="0"/>
-            </a:endParaRPr>
-          </a:p>
-        </p:txBody>
-      </p:sp>
-      <p:sp>
-        <p:nvSpPr>
-          <p:cNvPr id="5" name="TextBox 4"/>
-          <p:cNvSpPr txBox="1"/>
-          <p:nvPr/>
-        </p:nvSpPr>
-        <p:spPr>
-          <a:xfrm>
-            <a:off x="2097732" y="5879518"/>
-            <a:ext cx="7985051" cy="369332"/>
-          </a:xfrm>
-          <a:prstGeom prst="rect">
-            <a:avLst/>
-          </a:prstGeom>
-          <a:noFill/>
-        </p:spPr>
-        <p:txBody>
-          <a:bodyPr wrap="square" rtlCol="0">
-            <a:spAutoFit/>
-          </a:bodyPr>
-          <a:lstStyle/>
-          <a:p>
-            <a:pPr algn="ctr"/>
-            <a:r>
-              <a:rPr lang="ru-RU" dirty="0" smtClean="0">
-                <a:latin typeface="Times New Roman" panose="02020603050405020304" pitchFamily="18" charset="0"/>
-                <a:cs typeface="Times New Roman" panose="02020603050405020304" pitchFamily="18" charset="0"/>
-              </a:rPr>
-              <a:t>Административная панель управления</a:t>
-            </a:r>
-            <a:r>
-              <a:rPr lang="en-US" dirty="0" smtClean="0">
-                <a:latin typeface="Times New Roman" panose="02020603050405020304" pitchFamily="18" charset="0"/>
-                <a:cs typeface="Times New Roman" panose="02020603050405020304" pitchFamily="18" charset="0"/>
-              </a:rPr>
-              <a:t> </a:t>
-            </a:r>
-            <a:r>
-              <a:rPr lang="ru-RU" dirty="0" smtClean="0">
-                <a:latin typeface="Times New Roman" panose="02020603050405020304" pitchFamily="18" charset="0"/>
-                <a:cs typeface="Times New Roman" panose="02020603050405020304" pitchFamily="18" charset="0"/>
-              </a:rPr>
-              <a:t>корпусом нормативных правовых актов</a:t>
-            </a:r>
-          </a:p>
-        </p:txBody>
-      </p:sp>
-      <p:pic>
-        <p:nvPicPr>
-          <p:cNvPr id="4" name="Рисунок 3"/>
-          <p:cNvPicPr>
-            <a:picLocks noChangeAspect="1"/>
-          </p:cNvPicPr>
-          <p:nvPr/>
-        </p:nvPicPr>
-        <p:blipFill>
-          <a:blip r:embed="rId2" cstate="print">
-            <a:extLst>
-              <a:ext uri="{28A0092B-C50C-407E-A947-70E740481C1C}">
-                <a14:useLocalDpi xmlns:a14="http://schemas.microsoft.com/office/drawing/2010/main" val="0"/>
-              </a:ext>
-            </a:extLst>
-          </a:blip>
-          <a:stretch>
-            <a:fillRect/>
-          </a:stretch>
-        </p:blipFill>
-        <p:spPr>
-          <a:xfrm>
-            <a:off x="2229388" y="1690688"/>
-            <a:ext cx="7733224" cy="4188830"/>
-          </a:xfrm>
-          <a:prstGeom prst="rect">
-            <a:avLst/>
-          </a:prstGeom>
-        </p:spPr>
-      </p:pic>
-    </p:spTree>
-    <p:extLst>
-      <p:ext uri="{BB962C8B-B14F-4D97-AF65-F5344CB8AC3E}">
-        <p14:creationId xmlns:p14="http://schemas.microsoft.com/office/powerpoint/2010/main" val="2897832750"/>
-      </p:ext>
-    </p:extLst>
-  </p:cSld>
-  <p:clrMapOvr>
-    <a:masterClrMapping/>
-  </p:clrMapOvr>
-  <p:timing>
-    <p:tnLst>
-      <p:par>
-        <p:cTn id="1" dur="indefinite" restart="never" nodeType="tmRoot"/>
-      </p:par>
-    </p:tnLst>
-  </p:timing>
-</p:sld>
-</file>
-
-<file path=ppt/slides/slide13.xml><?xml version="1.0" encoding="utf-8"?>
-<p:sld xmlns:a="http://schemas.openxmlformats.org/drawingml/2006/main" xmlns:r="http://schemas.openxmlformats.org/officeDocument/2006/relationships" xmlns:p="http://schemas.openxmlformats.org/presentationml/2006/main">
-  <p:cSld>
-    <p:spTree>
-      <p:nvGrpSpPr>
-        <p:cNvPr id="1" name=""/>
-        <p:cNvGrpSpPr/>
-        <p:nvPr/>
-      </p:nvGrpSpPr>
-      <p:grpSpPr>
-        <a:xfrm>
-          <a:off x="0" y="0"/>
-          <a:ext cx="0" cy="0"/>
-          <a:chOff x="0" y="0"/>
-          <a:chExt cx="0" cy="0"/>
-        </a:xfrm>
-      </p:grpSpPr>
-      <p:sp>
-        <p:nvSpPr>
-          <p:cNvPr id="2" name="Заголовок 1"/>
-          <p:cNvSpPr>
-            <a:spLocks noGrp="1"/>
-          </p:cNvSpPr>
-          <p:nvPr>
-            <p:ph type="title"/>
-          </p:nvPr>
-        </p:nvSpPr>
-        <p:spPr/>
-        <p:txBody>
-          <a:bodyPr>
-            <a:normAutofit/>
-          </a:bodyPr>
-          <a:lstStyle/>
-          <a:p>
-            <a:r>
-              <a:rPr lang="ru-RU" sz="4800" dirty="0" smtClean="0">
-                <a:latin typeface="Times New Roman" panose="02020603050405020304" pitchFamily="18" charset="0"/>
-                <a:cs typeface="Times New Roman" panose="02020603050405020304" pitchFamily="18" charset="0"/>
-              </a:rPr>
-              <a:t>Подбор параметров </a:t>
-            </a:r>
-            <a:r>
-              <a:rPr lang="en-US" sz="4800" dirty="0" smtClean="0">
-                <a:latin typeface="Times New Roman" panose="02020603050405020304" pitchFamily="18" charset="0"/>
-                <a:cs typeface="Times New Roman" panose="02020603050405020304" pitchFamily="18" charset="0"/>
-              </a:rPr>
-              <a:t>RAG</a:t>
-            </a:r>
-            <a:endParaRPr lang="ru-RU" sz="4800" dirty="0">
-              <a:latin typeface="Times New Roman" panose="02020603050405020304" pitchFamily="18" charset="0"/>
-              <a:cs typeface="Times New Roman" panose="02020603050405020304" pitchFamily="18" charset="0"/>
-            </a:endParaRPr>
-          </a:p>
-        </p:txBody>
-      </p:sp>
-      <p:sp>
-        <p:nvSpPr>
-          <p:cNvPr id="6" name="TextBox 5"/>
-          <p:cNvSpPr txBox="1"/>
-          <p:nvPr/>
-        </p:nvSpPr>
-        <p:spPr>
-          <a:xfrm>
-            <a:off x="928116" y="5529142"/>
-            <a:ext cx="6687312" cy="1200329"/>
-          </a:xfrm>
-          <a:prstGeom prst="rect">
-            <a:avLst/>
-          </a:prstGeom>
-          <a:noFill/>
-        </p:spPr>
-        <p:txBody>
-          <a:bodyPr wrap="square" rtlCol="0">
-            <a:spAutoFit/>
-          </a:bodyPr>
-          <a:lstStyle/>
-          <a:p>
-            <a:pPr algn="ctr"/>
-            <a:r>
-              <a:rPr lang="ru-RU" dirty="0" smtClean="0">
-                <a:latin typeface="Times New Roman" panose="02020603050405020304" pitchFamily="18" charset="0"/>
-                <a:cs typeface="Times New Roman" panose="02020603050405020304" pitchFamily="18" charset="0"/>
-              </a:rPr>
-              <a:t>Сравнительный анализ конфигураций двухступенчатого поиска </a:t>
-            </a:r>
-            <a:r>
-              <a:rPr lang="ru-RU" dirty="0">
-                <a:latin typeface="Times New Roman" panose="02020603050405020304" pitchFamily="18" charset="0"/>
-                <a:cs typeface="Times New Roman" panose="02020603050405020304" pitchFamily="18" charset="0"/>
-              </a:rPr>
-              <a:t>по времени отклика </a:t>
-            </a:r>
-            <a:r>
-              <a:rPr lang="ru-RU" dirty="0" smtClean="0">
-                <a:latin typeface="Times New Roman" panose="02020603050405020304" pitchFamily="18" charset="0"/>
-                <a:cs typeface="Times New Roman" panose="02020603050405020304" pitchFamily="18" charset="0"/>
-              </a:rPr>
-              <a:t>по </a:t>
-            </a:r>
-            <a:r>
-              <a:rPr lang="ru-RU" dirty="0" smtClean="0">
-                <a:latin typeface="Times New Roman" panose="02020603050405020304" pitchFamily="18" charset="0"/>
-                <a:cs typeface="Times New Roman" panose="02020603050405020304" pitchFamily="18" charset="0"/>
-              </a:rPr>
-              <a:t>метрикам качества </a:t>
-            </a:r>
-            <a:r>
-              <a:rPr lang="ru-RU" dirty="0" smtClean="0">
-                <a:latin typeface="Times New Roman" panose="02020603050405020304" pitchFamily="18" charset="0"/>
-                <a:cs typeface="Times New Roman" panose="02020603050405020304" pitchFamily="18" charset="0"/>
-              </a:rPr>
-              <a:t>ранжирования</a:t>
-            </a:r>
-            <a:r>
-              <a:rPr lang="ru-RU" dirty="0">
-                <a:latin typeface="Times New Roman" panose="02020603050405020304" pitchFamily="18" charset="0"/>
-                <a:cs typeface="Times New Roman" panose="02020603050405020304" pitchFamily="18" charset="0"/>
-              </a:rPr>
-              <a:t> </a:t>
-            </a:r>
-            <a:r>
-              <a:rPr lang="ru-RU" dirty="0" smtClean="0">
-                <a:latin typeface="Times New Roman" panose="02020603050405020304" pitchFamily="18" charset="0"/>
-                <a:cs typeface="Times New Roman" panose="02020603050405020304" pitchFamily="18" charset="0"/>
-              </a:rPr>
-              <a:t>и</a:t>
-            </a:r>
-            <a:r>
-              <a:rPr lang="ru-RU" dirty="0" smtClean="0">
-                <a:latin typeface="Times New Roman" panose="02020603050405020304" pitchFamily="18" charset="0"/>
-                <a:cs typeface="Times New Roman" panose="02020603050405020304" pitchFamily="18" charset="0"/>
-              </a:rPr>
-              <a:t> классификации типа договора</a:t>
-            </a:r>
-            <a:r>
-              <a:rPr lang="ru-RU" dirty="0">
-                <a:latin typeface="Times New Roman" panose="02020603050405020304" pitchFamily="18" charset="0"/>
-                <a:cs typeface="Times New Roman" panose="02020603050405020304" pitchFamily="18" charset="0"/>
-              </a:rPr>
-              <a:t> </a:t>
-            </a:r>
-            <a:r>
-              <a:rPr lang="ru-RU" dirty="0" smtClean="0">
-                <a:latin typeface="Times New Roman" panose="02020603050405020304" pitchFamily="18" charset="0"/>
-                <a:cs typeface="Times New Roman" panose="02020603050405020304" pitchFamily="18" charset="0"/>
-              </a:rPr>
-              <a:t>(значения метрик в </a:t>
-            </a:r>
-            <a:r>
-              <a:rPr lang="ru-RU" dirty="0">
-                <a:latin typeface="Times New Roman" panose="02020603050405020304" pitchFamily="18" charset="0"/>
-                <a:cs typeface="Times New Roman" panose="02020603050405020304" pitchFamily="18" charset="0"/>
-              </a:rPr>
-              <a:t>процентах</a:t>
-            </a:r>
-            <a:r>
-              <a:rPr lang="ru-RU" dirty="0" smtClean="0">
-                <a:latin typeface="Times New Roman" panose="02020603050405020304" pitchFamily="18" charset="0"/>
-                <a:cs typeface="Times New Roman" panose="02020603050405020304" pitchFamily="18" charset="0"/>
-              </a:rPr>
-              <a:t>; </a:t>
-            </a:r>
-            <a:r>
-              <a:rPr lang="ru-RU" dirty="0" err="1" smtClean="0">
-                <a:latin typeface="Times New Roman" panose="02020603050405020304" pitchFamily="18" charset="0"/>
-                <a:cs typeface="Times New Roman" panose="02020603050405020304" pitchFamily="18" charset="0"/>
-              </a:rPr>
-              <a:t>latency</a:t>
-            </a:r>
-            <a:r>
-              <a:rPr lang="ru-RU" dirty="0" smtClean="0">
-                <a:latin typeface="Times New Roman" panose="02020603050405020304" pitchFamily="18" charset="0"/>
-                <a:cs typeface="Times New Roman" panose="02020603050405020304" pitchFamily="18" charset="0"/>
-              </a:rPr>
-              <a:t> </a:t>
-            </a:r>
-            <a:r>
-              <a:rPr lang="ru-RU" dirty="0">
-                <a:latin typeface="Times New Roman" panose="02020603050405020304" pitchFamily="18" charset="0"/>
-                <a:cs typeface="Times New Roman" panose="02020603050405020304" pitchFamily="18" charset="0"/>
-              </a:rPr>
-              <a:t>— в миллисекундах)</a:t>
-            </a:r>
-            <a:endParaRPr lang="ru-RU" dirty="0">
-              <a:latin typeface="Times New Roman" panose="02020603050405020304" pitchFamily="18" charset="0"/>
-              <a:cs typeface="Times New Roman" panose="02020603050405020304" pitchFamily="18" charset="0"/>
-            </a:endParaRPr>
-          </a:p>
-        </p:txBody>
-      </p:sp>
-      <p:pic>
-        <p:nvPicPr>
-          <p:cNvPr id="5" name="Рисунок 4"/>
-          <p:cNvPicPr>
-            <a:picLocks noChangeAspect="1"/>
-          </p:cNvPicPr>
-          <p:nvPr/>
-        </p:nvPicPr>
-        <p:blipFill>
-          <a:blip r:embed="rId2"/>
-          <a:stretch>
-            <a:fillRect/>
-          </a:stretch>
-        </p:blipFill>
-        <p:spPr>
-          <a:xfrm>
-            <a:off x="838200" y="1371599"/>
-            <a:ext cx="6867144" cy="4157543"/>
-          </a:xfrm>
-          <a:prstGeom prst="rect">
-            <a:avLst/>
-          </a:prstGeom>
-        </p:spPr>
-      </p:pic>
-    </p:spTree>
-    <p:extLst>
-      <p:ext uri="{BB962C8B-B14F-4D97-AF65-F5344CB8AC3E}">
-        <p14:creationId xmlns:p14="http://schemas.microsoft.com/office/powerpoint/2010/main" val="1162437596"/>
-      </p:ext>
-    </p:extLst>
-  </p:cSld>
-  <p:clrMapOvr>
-    <a:masterClrMapping/>
-  </p:clrMapOvr>
-  <p:timing>
-    <p:tnLst>
-      <p:par>
-        <p:cTn id="1" dur="indefinite" restart="never" nodeType="tmRoot"/>
-      </p:par>
-    </p:tnLst>
-  </p:timing>
-</p:sld>
-</file>
-
-<file path=ppt/slides/slide14.xml><?xml version="1.0" encoding="utf-8"?>
-<p:sld xmlns:a="http://schemas.openxmlformats.org/drawingml/2006/main" xmlns:r="http://schemas.openxmlformats.org/officeDocument/2006/relationships" xmlns:p="http://schemas.openxmlformats.org/presentationml/2006/main">
-  <p:cSld>
-    <p:spTree>
-      <p:nvGrpSpPr>
-        <p:cNvPr id="1" name=""/>
-        <p:cNvGrpSpPr/>
-        <p:nvPr/>
-      </p:nvGrpSpPr>
-      <p:grpSpPr>
-        <a:xfrm>
-          <a:off x="0" y="0"/>
-          <a:ext cx="0" cy="0"/>
-          <a:chOff x="0" y="0"/>
-          <a:chExt cx="0" cy="0"/>
-        </a:xfrm>
-      </p:grpSpPr>
-      <p:sp>
-        <p:nvSpPr>
-          <p:cNvPr id="2" name="Заголовок 1"/>
-          <p:cNvSpPr>
-            <a:spLocks noGrp="1"/>
-          </p:cNvSpPr>
-          <p:nvPr>
-            <p:ph type="title"/>
-          </p:nvPr>
-        </p:nvSpPr>
-        <p:spPr/>
-        <p:txBody>
           <a:bodyPr>
             <a:normAutofit/>
           </a:bodyPr>
@@ -5019,6 +4962,29 @@
           </a:p>
         </p:txBody>
       </p:sp>
+      <p:sp>
+        <p:nvSpPr>
+          <p:cNvPr id="3" name="Номер слайда 2"/>
+          <p:cNvSpPr>
+            <a:spLocks noGrp="1"/>
+          </p:cNvSpPr>
+          <p:nvPr>
+            <p:ph type="sldNum" sz="quarter" idx="12"/>
+          </p:nvPr>
+        </p:nvSpPr>
+        <p:spPr/>
+        <p:txBody>
+          <a:bodyPr/>
+          <a:lstStyle/>
+          <a:p>
+            <a:fld id="{65A3789A-D406-449F-860F-117B58A45219}" type="slidenum">
+              <a:rPr lang="ru-RU" smtClean="0"/>
+              <a:t>10</a:t>
+            </a:fld>
+            <a:endParaRPr lang="ru-RU"/>
+          </a:p>
+        </p:txBody>
+      </p:sp>
     </p:spTree>
     <p:extLst>
       <p:ext uri="{BB962C8B-B14F-4D97-AF65-F5344CB8AC3E}">
@@ -5039,7 +5005,7 @@
 </p:sld>
 </file>
 
-<file path=ppt/slides/slide15.xml><?xml version="1.0" encoding="utf-8"?>
+<file path=ppt/slides/slide11.xml><?xml version="1.0" encoding="utf-8"?>
 <p:sld xmlns:a="http://schemas.openxmlformats.org/drawingml/2006/main" xmlns:r="http://schemas.openxmlformats.org/officeDocument/2006/relationships" xmlns:p="http://schemas.openxmlformats.org/presentationml/2006/main">
   <p:cSld>
     <p:spTree>
@@ -5068,114 +5034,143 @@
         </p:nvSpPr>
         <p:spPr/>
         <p:txBody>
-          <a:bodyPr/>
-          <a:lstStyle/>
-          <a:p>
-            <a:r>
-              <a:rPr lang="ru-RU" dirty="0" smtClean="0">
-                <a:latin typeface="Times New Roman" panose="02020603050405020304" pitchFamily="18" charset="0"/>
-                <a:cs typeface="Times New Roman" panose="02020603050405020304" pitchFamily="18" charset="0"/>
-              </a:rPr>
-              <a:t>Подбор параметров </a:t>
-            </a:r>
-            <a:r>
-              <a:rPr lang="en-US" dirty="0" smtClean="0">
-                <a:latin typeface="Times New Roman" panose="02020603050405020304" pitchFamily="18" charset="0"/>
-                <a:cs typeface="Times New Roman" panose="02020603050405020304" pitchFamily="18" charset="0"/>
-              </a:rPr>
-              <a:t>RAG</a:t>
-            </a:r>
-            <a:endParaRPr lang="ru-RU" dirty="0">
+          <a:bodyPr>
+            <a:normAutofit/>
+          </a:bodyPr>
+          <a:lstStyle/>
+          <a:p>
+            <a:r>
+              <a:rPr lang="ru-RU" sz="4800" dirty="0">
+                <a:latin typeface="Times New Roman" panose="02020603050405020304" pitchFamily="18" charset="0"/>
+                <a:cs typeface="Times New Roman" panose="02020603050405020304" pitchFamily="18" charset="0"/>
+              </a:rPr>
+              <a:t>Методология экспертной апробации</a:t>
+            </a:r>
+          </a:p>
+        </p:txBody>
+      </p:sp>
+      <p:sp>
+        <p:nvSpPr>
+          <p:cNvPr id="3" name="Содержимое"/>
+          <p:cNvSpPr>
+            <a:spLocks noGrp="1"/>
+          </p:cNvSpPr>
+          <p:nvPr>
+            <p:ph idx="1"/>
+          </p:nvPr>
+        </p:nvSpPr>
+        <p:spPr>
+          <a:xfrm>
+            <a:off x="500000" y="1500000"/>
+            <a:ext cx="11200000" cy="5100000"/>
+          </a:xfrm>
+        </p:spPr>
+        <p:txBody>
+          <a:bodyPr>
+            <a:normAutofit/>
+          </a:bodyPr>
+          <a:lstStyle/>
+          <a:p>
+            <a:pPr marL="0" indent="0" algn="just">
+              <a:buNone/>
+            </a:pPr>
+            <a:r>
+              <a:rPr lang="ru-RU" sz="2400" dirty="0">
+                <a:latin typeface="Times New Roman" panose="02020603050405020304" pitchFamily="18" charset="0"/>
+                <a:cs typeface="Times New Roman" panose="02020603050405020304" pitchFamily="18" charset="0"/>
+              </a:rPr>
+              <a:t>Проведена внешняя экспертная апробация готовых артефактов системы с привлечением трёх практикующих </a:t>
+            </a:r>
+            <a:r>
+              <a:rPr lang="ru-RU" sz="2400" dirty="0" smtClean="0">
+                <a:latin typeface="Times New Roman" panose="02020603050405020304" pitchFamily="18" charset="0"/>
+                <a:cs typeface="Times New Roman" panose="02020603050405020304" pitchFamily="18" charset="0"/>
+              </a:rPr>
+              <a:t>юристов.</a:t>
+            </a:r>
+            <a:endParaRPr lang="ru-RU" sz="2400" dirty="0">
               <a:latin typeface="Times New Roman" panose="02020603050405020304" pitchFamily="18" charset="0"/>
               <a:cs typeface="Times New Roman" panose="02020603050405020304" pitchFamily="18" charset="0"/>
             </a:endParaRPr>
           </a:p>
-        </p:txBody>
-      </p:sp>
-      <p:sp>
-        <p:nvSpPr>
-          <p:cNvPr id="6" name="TextBox 5"/>
-          <p:cNvSpPr txBox="1"/>
-          <p:nvPr/>
-        </p:nvSpPr>
-        <p:spPr>
-          <a:xfrm>
-            <a:off x="838200" y="1690688"/>
-            <a:ext cx="3849624" cy="2677656"/>
-          </a:xfrm>
-          <a:prstGeom prst="rect">
-            <a:avLst/>
-          </a:prstGeom>
-          <a:noFill/>
-        </p:spPr>
-        <p:txBody>
-          <a:bodyPr wrap="square" rtlCol="0">
-            <a:spAutoFit/>
-          </a:bodyPr>
-          <a:lstStyle/>
-          <a:p>
-            <a:pPr algn="just"/>
-            <a:r>
-              <a:rPr lang="ru-RU" sz="2800" dirty="0" smtClean="0">
-                <a:latin typeface="Times New Roman" panose="02020603050405020304" pitchFamily="18" charset="0"/>
-                <a:cs typeface="Times New Roman" panose="02020603050405020304" pitchFamily="18" charset="0"/>
-              </a:rPr>
-              <a:t>Распределение значений </a:t>
-            </a:r>
-            <a:r>
-              <a:rPr lang="ru-RU" sz="2800" dirty="0" err="1" smtClean="0">
-                <a:latin typeface="Times New Roman" panose="02020603050405020304" pitchFamily="18" charset="0"/>
-                <a:cs typeface="Times New Roman" panose="02020603050405020304" pitchFamily="18" charset="0"/>
-              </a:rPr>
-              <a:t>precision@k</a:t>
-            </a:r>
-            <a:r>
-              <a:rPr lang="ru-RU" sz="2800" dirty="0" smtClean="0">
-                <a:latin typeface="Times New Roman" panose="02020603050405020304" pitchFamily="18" charset="0"/>
-                <a:cs typeface="Times New Roman" panose="02020603050405020304" pitchFamily="18" charset="0"/>
-              </a:rPr>
-              <a:t> и точности классификации итоговой конфигурации поиска по типам сделок</a:t>
-            </a:r>
-            <a:endParaRPr lang="ru-RU" sz="2800" dirty="0">
+          <a:p>
+            <a:pPr marL="0" indent="0" algn="just">
+              <a:buNone/>
+            </a:pPr>
+            <a:r>
+              <a:rPr lang="ru-RU" sz="2400" dirty="0">
+                <a:latin typeface="Times New Roman" panose="02020603050405020304" pitchFamily="18" charset="0"/>
+                <a:cs typeface="Times New Roman" panose="02020603050405020304" pitchFamily="18" charset="0"/>
+              </a:rPr>
+              <a:t>Массив кейсов — 11 описаний сделок, по одному на каждый из ключевых поддерживаемых типов договоров. Сбор оценок осуществлялся через веб-форму опроса: на каждом кейсе эксперт получал описание сделки, юридические рекомендации и проект договора в формате DOCX</a:t>
+            </a:r>
+            <a:r>
+              <a:rPr lang="ru-RU" sz="2400" dirty="0" smtClean="0">
+                <a:latin typeface="Times New Roman" panose="02020603050405020304" pitchFamily="18" charset="0"/>
+                <a:cs typeface="Times New Roman" panose="02020603050405020304" pitchFamily="18" charset="0"/>
+              </a:rPr>
+              <a:t>.</a:t>
+            </a:r>
+            <a:endParaRPr lang="ru-RU" sz="2400" dirty="0">
               <a:latin typeface="Times New Roman" panose="02020603050405020304" pitchFamily="18" charset="0"/>
               <a:cs typeface="Times New Roman" panose="02020603050405020304" pitchFamily="18" charset="0"/>
             </a:endParaRPr>
           </a:p>
-        </p:txBody>
-      </p:sp>
-      <p:pic>
-        <p:nvPicPr>
-          <p:cNvPr id="5" name="Объект 4"/>
-          <p:cNvPicPr>
-            <a:picLocks noGrp="1" noChangeAspect="1"/>
-          </p:cNvPicPr>
-          <p:nvPr>
-            <p:ph idx="1"/>
-          </p:nvPr>
-        </p:nvPicPr>
-        <p:blipFill>
-          <a:blip r:embed="rId2">
-            <a:extLst>
-              <a:ext uri="{28A0092B-C50C-407E-A947-70E740481C1C}">
-                <a14:useLocalDpi xmlns:a14="http://schemas.microsoft.com/office/drawing/2010/main" val="0"/>
-              </a:ext>
-            </a:extLst>
-          </a:blip>
-          <a:stretch>
-            <a:fillRect/>
-          </a:stretch>
-        </p:blipFill>
-        <p:spPr>
-          <a:xfrm>
-            <a:off x="6440540" y="1422464"/>
-            <a:ext cx="4913260" cy="5203700"/>
-          </a:xfrm>
-        </p:spPr>
-      </p:pic>
+          <a:p>
+            <a:pPr marL="0" indent="0" algn="just">
+              <a:buNone/>
+            </a:pPr>
+            <a:r>
+              <a:rPr lang="ru-RU" sz="2400" dirty="0">
+                <a:latin typeface="Times New Roman" panose="02020603050405020304" pitchFamily="18" charset="0"/>
+                <a:cs typeface="Times New Roman" panose="02020603050405020304" pitchFamily="18" charset="0"/>
+              </a:rPr>
+              <a:t>Оценка проводилась по пятибалльной </a:t>
+            </a:r>
+            <a:r>
+              <a:rPr lang="ru-RU" sz="2400" dirty="0" smtClean="0">
+                <a:latin typeface="Times New Roman" panose="02020603050405020304" pitchFamily="18" charset="0"/>
+                <a:cs typeface="Times New Roman" panose="02020603050405020304" pitchFamily="18" charset="0"/>
+              </a:rPr>
+              <a:t>шкале </a:t>
+            </a:r>
+            <a:r>
+              <a:rPr lang="ru-RU" sz="2400" dirty="0">
+                <a:latin typeface="Times New Roman" panose="02020603050405020304" pitchFamily="18" charset="0"/>
+                <a:cs typeface="Times New Roman" panose="02020603050405020304" pitchFamily="18" charset="0"/>
+              </a:rPr>
+              <a:t>по двум показателям: качество проекта договора и качество юридических рекомендаций.</a:t>
+            </a:r>
+          </a:p>
+        </p:txBody>
+      </p:sp>
+      <p:sp>
+        <p:nvSpPr>
+          <p:cNvPr id="40" name="Номер слайда"/>
+          <p:cNvSpPr>
+            <a:spLocks noGrp="1"/>
+          </p:cNvSpPr>
+          <p:nvPr>
+            <p:ph type="sldNum" sz="quarter" idx="12"/>
+          </p:nvPr>
+        </p:nvSpPr>
+        <p:spPr/>
+        <p:txBody>
+          <a:bodyPr/>
+          <a:lstStyle/>
+          <a:p>
+            <a:fld id="{65A3789A-D406-449F-860F-117B58A45221}" type="slidenum">
+              <a:rPr lang="ru-RU" smtClean="0"/>
+              <a:t>11</a:t>
+            </a:fld>
+            <a:endParaRPr lang="ru-RU"/>
+          </a:p>
+        </p:txBody>
+      </p:sp>
     </p:spTree>
     <p:extLst>
       <p:ext uri="{BB962C8B-B14F-4D97-AF65-F5344CB8AC3E}">
-        <p14:creationId xmlns:p14="http://schemas.microsoft.com/office/powerpoint/2010/main" val="2185253317"/>
+        <p14:creationId xmlns:p14="http://schemas.microsoft.com/office/powerpoint/2010/main" val="3033955821"/>
       </p:ext>
     </p:extLst>
   </p:cSld>
@@ -5192,7 +5187,7 @@
 </p:sld>
 </file>
 
-<file path=ppt/slides/slide16.xml><?xml version="1.0" encoding="utf-8"?>
+<file path=ppt/slides/slide12.xml><?xml version="1.0" encoding="utf-8"?>
 <p:sld xmlns:a="http://schemas.openxmlformats.org/drawingml/2006/main" xmlns:r="http://schemas.openxmlformats.org/officeDocument/2006/relationships" xmlns:p="http://schemas.openxmlformats.org/presentationml/2006/main">
   <p:cSld>
     <p:spTree>
@@ -5369,10 +5364,744 @@
           </a:p>
         </p:txBody>
       </p:sp>
+      <p:sp>
+        <p:nvSpPr>
+          <p:cNvPr id="3" name="Номер слайда 2"/>
+          <p:cNvSpPr>
+            <a:spLocks noGrp="1"/>
+          </p:cNvSpPr>
+          <p:nvPr>
+            <p:ph type="sldNum" sz="quarter" idx="12"/>
+          </p:nvPr>
+        </p:nvSpPr>
+        <p:spPr/>
+        <p:txBody>
+          <a:bodyPr/>
+          <a:lstStyle/>
+          <a:p>
+            <a:fld id="{65A3789A-D406-449F-860F-117B58A45219}" type="slidenum">
+              <a:rPr lang="ru-RU" smtClean="0"/>
+              <a:t>12</a:t>
+            </a:fld>
+            <a:endParaRPr lang="ru-RU"/>
+          </a:p>
+        </p:txBody>
+      </p:sp>
     </p:spTree>
     <p:extLst>
       <p:ext uri="{BB962C8B-B14F-4D97-AF65-F5344CB8AC3E}">
         <p14:creationId xmlns:p14="http://schemas.microsoft.com/office/powerpoint/2010/main" val="578811203"/>
+      </p:ext>
+    </p:extLst>
+  </p:cSld>
+  <p:clrMapOvr>
+    <a:masterClrMapping/>
+  </p:clrMapOvr>
+  <p:timing>
+    <p:tnLst>
+      <p:par>
+        <p:cTn id="1" dur="indefinite" restart="never" nodeType="tmRoot"/>
+      </p:par>
+    </p:tnLst>
+  </p:timing>
+</p:sld>
+</file>
+
+<file path=ppt/slides/slide13.xml><?xml version="1.0" encoding="utf-8"?>
+<p:sld xmlns:a="http://schemas.openxmlformats.org/drawingml/2006/main" xmlns:r="http://schemas.openxmlformats.org/officeDocument/2006/relationships" xmlns:p="http://schemas.openxmlformats.org/presentationml/2006/main">
+  <p:cSld>
+    <p:spTree>
+      <p:nvGrpSpPr>
+        <p:cNvPr id="1" name=""/>
+        <p:cNvGrpSpPr/>
+        <p:nvPr/>
+      </p:nvGrpSpPr>
+      <p:grpSpPr>
+        <a:xfrm>
+          <a:off x="0" y="0"/>
+          <a:ext cx="0" cy="0"/>
+          <a:chOff x="0" y="0"/>
+          <a:chExt cx="0" cy="0"/>
+        </a:xfrm>
+      </p:grpSpPr>
+      <p:sp>
+        <p:nvSpPr>
+          <p:cNvPr id="2" name="Заголовок 1"/>
+          <p:cNvSpPr>
+            <a:spLocks noGrp="1"/>
+          </p:cNvSpPr>
+          <p:nvPr>
+            <p:ph type="title"/>
+          </p:nvPr>
+        </p:nvSpPr>
+        <p:spPr/>
+        <p:txBody>
+          <a:bodyPr/>
+          <a:lstStyle/>
+          <a:p>
+            <a:r>
+              <a:rPr lang="ru-RU" dirty="0" smtClean="0">
+                <a:latin typeface="Times New Roman" panose="02020603050405020304" pitchFamily="18" charset="0"/>
+                <a:cs typeface="Times New Roman" panose="02020603050405020304" pitchFamily="18" charset="0"/>
+              </a:rPr>
+              <a:t>Демонстрация </a:t>
+            </a:r>
+            <a:r>
+              <a:rPr lang="en-US" dirty="0" smtClean="0">
+                <a:latin typeface="Times New Roman" panose="02020603050405020304" pitchFamily="18" charset="0"/>
+                <a:cs typeface="Times New Roman" panose="02020603050405020304" pitchFamily="18" charset="0"/>
+              </a:rPr>
+              <a:t>UI</a:t>
+            </a:r>
+            <a:endParaRPr lang="ru-RU" dirty="0">
+              <a:latin typeface="Times New Roman" panose="02020603050405020304" pitchFamily="18" charset="0"/>
+              <a:cs typeface="Times New Roman" panose="02020603050405020304" pitchFamily="18" charset="0"/>
+            </a:endParaRPr>
+          </a:p>
+        </p:txBody>
+      </p:sp>
+      <p:pic>
+        <p:nvPicPr>
+          <p:cNvPr id="4" name="Объект 3"/>
+          <p:cNvPicPr>
+            <a:picLocks noGrp="1" noChangeAspect="1"/>
+          </p:cNvPicPr>
+          <p:nvPr>
+            <p:ph idx="1"/>
+          </p:nvPr>
+        </p:nvPicPr>
+        <p:blipFill>
+          <a:blip r:embed="rId2" cstate="print">
+            <a:extLst>
+              <a:ext uri="{28A0092B-C50C-407E-A947-70E740481C1C}">
+                <a14:useLocalDpi xmlns:a14="http://schemas.microsoft.com/office/drawing/2010/main" val="0"/>
+              </a:ext>
+            </a:extLst>
+          </a:blip>
+          <a:stretch>
+            <a:fillRect/>
+          </a:stretch>
+        </p:blipFill>
+        <p:spPr>
+          <a:xfrm>
+            <a:off x="2073348" y="1690688"/>
+            <a:ext cx="8045303" cy="4351338"/>
+          </a:xfrm>
+        </p:spPr>
+      </p:pic>
+      <p:sp>
+        <p:nvSpPr>
+          <p:cNvPr id="5" name="TextBox 4"/>
+          <p:cNvSpPr txBox="1"/>
+          <p:nvPr/>
+        </p:nvSpPr>
+        <p:spPr>
+          <a:xfrm>
+            <a:off x="2073348" y="6042026"/>
+            <a:ext cx="7985051" cy="646331"/>
+          </a:xfrm>
+          <a:prstGeom prst="rect">
+            <a:avLst/>
+          </a:prstGeom>
+          <a:noFill/>
+        </p:spPr>
+        <p:txBody>
+          <a:bodyPr wrap="square" rtlCol="0">
+            <a:spAutoFit/>
+          </a:bodyPr>
+          <a:lstStyle/>
+          <a:p>
+            <a:pPr algn="ctr"/>
+            <a:r>
+              <a:rPr lang="ru-RU" dirty="0" smtClean="0">
+                <a:latin typeface="Times New Roman" panose="02020603050405020304" pitchFamily="18" charset="0"/>
+                <a:cs typeface="Times New Roman" panose="02020603050405020304" pitchFamily="18" charset="0"/>
+              </a:rPr>
+              <a:t>Окно чата с диалогом: запрос</a:t>
+            </a:r>
+            <a:r>
+              <a:rPr lang="en-US" dirty="0" smtClean="0">
+                <a:latin typeface="Times New Roman" panose="02020603050405020304" pitchFamily="18" charset="0"/>
+                <a:cs typeface="Times New Roman" panose="02020603050405020304" pitchFamily="18" charset="0"/>
+              </a:rPr>
+              <a:t> </a:t>
+            </a:r>
+            <a:r>
+              <a:rPr lang="ru-RU" dirty="0" smtClean="0">
+                <a:latin typeface="Times New Roman" panose="02020603050405020304" pitchFamily="18" charset="0"/>
+                <a:cs typeface="Times New Roman" panose="02020603050405020304" pitchFamily="18" charset="0"/>
+              </a:rPr>
+              <a:t>пользователя, уточняющий вопрос агента и ответ пользователя</a:t>
+            </a:r>
+            <a:endParaRPr lang="ru-RU" dirty="0">
+              <a:latin typeface="Times New Roman" panose="02020603050405020304" pitchFamily="18" charset="0"/>
+              <a:cs typeface="Times New Roman" panose="02020603050405020304" pitchFamily="18" charset="0"/>
+            </a:endParaRPr>
+          </a:p>
+        </p:txBody>
+      </p:sp>
+      <p:sp>
+        <p:nvSpPr>
+          <p:cNvPr id="3" name="Номер слайда 2"/>
+          <p:cNvSpPr>
+            <a:spLocks noGrp="1"/>
+          </p:cNvSpPr>
+          <p:nvPr>
+            <p:ph type="sldNum" sz="quarter" idx="12"/>
+          </p:nvPr>
+        </p:nvSpPr>
+        <p:spPr/>
+        <p:txBody>
+          <a:bodyPr/>
+          <a:lstStyle/>
+          <a:p>
+            <a:fld id="{65A3789A-D406-449F-860F-117B58A45219}" type="slidenum">
+              <a:rPr lang="ru-RU" smtClean="0"/>
+              <a:t>13</a:t>
+            </a:fld>
+            <a:endParaRPr lang="ru-RU"/>
+          </a:p>
+        </p:txBody>
+      </p:sp>
+    </p:spTree>
+    <p:extLst>
+      <p:ext uri="{BB962C8B-B14F-4D97-AF65-F5344CB8AC3E}">
+        <p14:creationId xmlns:p14="http://schemas.microsoft.com/office/powerpoint/2010/main" val="2205547682"/>
+      </p:ext>
+    </p:extLst>
+  </p:cSld>
+  <p:clrMapOvr>
+    <a:masterClrMapping/>
+  </p:clrMapOvr>
+  <p:timing>
+    <p:tnLst>
+      <p:par>
+        <p:cTn id="1" dur="indefinite" restart="never" nodeType="tmRoot"/>
+      </p:par>
+    </p:tnLst>
+  </p:timing>
+</p:sld>
+</file>
+
+<file path=ppt/slides/slide14.xml><?xml version="1.0" encoding="utf-8"?>
+<p:sld xmlns:a="http://schemas.openxmlformats.org/drawingml/2006/main" xmlns:r="http://schemas.openxmlformats.org/officeDocument/2006/relationships" xmlns:p="http://schemas.openxmlformats.org/presentationml/2006/main">
+  <p:cSld>
+    <p:spTree>
+      <p:nvGrpSpPr>
+        <p:cNvPr id="1" name=""/>
+        <p:cNvGrpSpPr/>
+        <p:nvPr/>
+      </p:nvGrpSpPr>
+      <p:grpSpPr>
+        <a:xfrm>
+          <a:off x="0" y="0"/>
+          <a:ext cx="0" cy="0"/>
+          <a:chOff x="0" y="0"/>
+          <a:chExt cx="0" cy="0"/>
+        </a:xfrm>
+      </p:grpSpPr>
+      <p:sp>
+        <p:nvSpPr>
+          <p:cNvPr id="2" name="Заголовок 1"/>
+          <p:cNvSpPr>
+            <a:spLocks noGrp="1"/>
+          </p:cNvSpPr>
+          <p:nvPr>
+            <p:ph type="title"/>
+          </p:nvPr>
+        </p:nvSpPr>
+        <p:spPr/>
+        <p:txBody>
+          <a:bodyPr/>
+          <a:lstStyle/>
+          <a:p>
+            <a:r>
+              <a:rPr lang="ru-RU" dirty="0" smtClean="0">
+                <a:latin typeface="Times New Roman" panose="02020603050405020304" pitchFamily="18" charset="0"/>
+                <a:cs typeface="Times New Roman" panose="02020603050405020304" pitchFamily="18" charset="0"/>
+              </a:rPr>
+              <a:t>Демонстрация </a:t>
+            </a:r>
+            <a:r>
+              <a:rPr lang="en-US" dirty="0" smtClean="0">
+                <a:latin typeface="Times New Roman" panose="02020603050405020304" pitchFamily="18" charset="0"/>
+                <a:cs typeface="Times New Roman" panose="02020603050405020304" pitchFamily="18" charset="0"/>
+              </a:rPr>
+              <a:t>UI</a:t>
+            </a:r>
+            <a:endParaRPr lang="ru-RU" dirty="0">
+              <a:latin typeface="Times New Roman" panose="02020603050405020304" pitchFamily="18" charset="0"/>
+              <a:cs typeface="Times New Roman" panose="02020603050405020304" pitchFamily="18" charset="0"/>
+            </a:endParaRPr>
+          </a:p>
+        </p:txBody>
+      </p:sp>
+      <p:sp>
+        <p:nvSpPr>
+          <p:cNvPr id="5" name="TextBox 4"/>
+          <p:cNvSpPr txBox="1"/>
+          <p:nvPr/>
+        </p:nvSpPr>
+        <p:spPr>
+          <a:xfrm>
+            <a:off x="2103473" y="5876544"/>
+            <a:ext cx="7985051" cy="646331"/>
+          </a:xfrm>
+          <a:prstGeom prst="rect">
+            <a:avLst/>
+          </a:prstGeom>
+          <a:noFill/>
+        </p:spPr>
+        <p:txBody>
+          <a:bodyPr wrap="square" rtlCol="0">
+            <a:spAutoFit/>
+          </a:bodyPr>
+          <a:lstStyle/>
+          <a:p>
+            <a:pPr algn="ctr"/>
+            <a:r>
+              <a:rPr lang="ru-RU" dirty="0" smtClean="0">
+                <a:latin typeface="Times New Roman" panose="02020603050405020304" pitchFamily="18" charset="0"/>
+                <a:cs typeface="Times New Roman" panose="02020603050405020304" pitchFamily="18" charset="0"/>
+              </a:rPr>
+              <a:t>Окно чата с готовыми юридическими</a:t>
+            </a:r>
+            <a:r>
+              <a:rPr lang="en-US" dirty="0" smtClean="0">
+                <a:latin typeface="Times New Roman" panose="02020603050405020304" pitchFamily="18" charset="0"/>
+                <a:cs typeface="Times New Roman" panose="02020603050405020304" pitchFamily="18" charset="0"/>
+              </a:rPr>
+              <a:t> </a:t>
+            </a:r>
+            <a:r>
+              <a:rPr lang="ru-RU" dirty="0" smtClean="0">
+                <a:latin typeface="Times New Roman" panose="02020603050405020304" pitchFamily="18" charset="0"/>
+                <a:cs typeface="Times New Roman" panose="02020603050405020304" pitchFamily="18" charset="0"/>
+              </a:rPr>
+              <a:t>рекомендациями и ссылкой на скачивание сгенерированного</a:t>
+            </a:r>
+            <a:r>
+              <a:rPr lang="en-US" dirty="0" smtClean="0">
+                <a:latin typeface="Times New Roman" panose="02020603050405020304" pitchFamily="18" charset="0"/>
+                <a:cs typeface="Times New Roman" panose="02020603050405020304" pitchFamily="18" charset="0"/>
+              </a:rPr>
+              <a:t> </a:t>
+            </a:r>
+            <a:r>
+              <a:rPr lang="ru-RU" dirty="0" smtClean="0">
+                <a:latin typeface="Times New Roman" panose="02020603050405020304" pitchFamily="18" charset="0"/>
+                <a:cs typeface="Times New Roman" panose="02020603050405020304" pitchFamily="18" charset="0"/>
+              </a:rPr>
+              <a:t>проекта договора</a:t>
+            </a:r>
+          </a:p>
+        </p:txBody>
+      </p:sp>
+      <p:pic>
+        <p:nvPicPr>
+          <p:cNvPr id="6" name="Объект 5"/>
+          <p:cNvPicPr>
+            <a:picLocks noGrp="1" noChangeAspect="1"/>
+          </p:cNvPicPr>
+          <p:nvPr>
+            <p:ph idx="1"/>
+          </p:nvPr>
+        </p:nvPicPr>
+        <p:blipFill rotWithShape="1">
+          <a:blip r:embed="rId2" cstate="print">
+            <a:extLst>
+              <a:ext uri="{28A0092B-C50C-407E-A947-70E740481C1C}">
+                <a14:useLocalDpi xmlns:a14="http://schemas.microsoft.com/office/drawing/2010/main" val="0"/>
+              </a:ext>
+            </a:extLst>
+          </a:blip>
+          <a:srcRect b="3803"/>
+          <a:stretch/>
+        </p:blipFill>
+        <p:spPr>
+          <a:xfrm>
+            <a:off x="2229388" y="1690688"/>
+            <a:ext cx="7733223" cy="4185856"/>
+          </a:xfrm>
+        </p:spPr>
+      </p:pic>
+      <p:sp>
+        <p:nvSpPr>
+          <p:cNvPr id="3" name="Номер слайда 2"/>
+          <p:cNvSpPr>
+            <a:spLocks noGrp="1"/>
+          </p:cNvSpPr>
+          <p:nvPr>
+            <p:ph type="sldNum" sz="quarter" idx="12"/>
+          </p:nvPr>
+        </p:nvSpPr>
+        <p:spPr/>
+        <p:txBody>
+          <a:bodyPr/>
+          <a:lstStyle/>
+          <a:p>
+            <a:fld id="{65A3789A-D406-449F-860F-117B58A45219}" type="slidenum">
+              <a:rPr lang="ru-RU" smtClean="0"/>
+              <a:t>14</a:t>
+            </a:fld>
+            <a:endParaRPr lang="ru-RU"/>
+          </a:p>
+        </p:txBody>
+      </p:sp>
+    </p:spTree>
+    <p:extLst>
+      <p:ext uri="{BB962C8B-B14F-4D97-AF65-F5344CB8AC3E}">
+        <p14:creationId xmlns:p14="http://schemas.microsoft.com/office/powerpoint/2010/main" val="2364807525"/>
+      </p:ext>
+    </p:extLst>
+  </p:cSld>
+  <p:clrMapOvr>
+    <a:masterClrMapping/>
+  </p:clrMapOvr>
+  <p:timing>
+    <p:tnLst>
+      <p:par>
+        <p:cTn id="1" dur="indefinite" restart="never" nodeType="tmRoot"/>
+      </p:par>
+    </p:tnLst>
+  </p:timing>
+</p:sld>
+</file>
+
+<file path=ppt/slides/slide15.xml><?xml version="1.0" encoding="utf-8"?>
+<p:sld xmlns:a="http://schemas.openxmlformats.org/drawingml/2006/main" xmlns:r="http://schemas.openxmlformats.org/officeDocument/2006/relationships" xmlns:p="http://schemas.openxmlformats.org/presentationml/2006/main">
+  <p:cSld>
+    <p:spTree>
+      <p:nvGrpSpPr>
+        <p:cNvPr id="1" name=""/>
+        <p:cNvGrpSpPr/>
+        <p:nvPr/>
+      </p:nvGrpSpPr>
+      <p:grpSpPr>
+        <a:xfrm>
+          <a:off x="0" y="0"/>
+          <a:ext cx="0" cy="0"/>
+          <a:chOff x="0" y="0"/>
+          <a:chExt cx="0" cy="0"/>
+        </a:xfrm>
+      </p:grpSpPr>
+      <p:sp>
+        <p:nvSpPr>
+          <p:cNvPr id="2" name="Заголовок 1"/>
+          <p:cNvSpPr>
+            <a:spLocks noGrp="1"/>
+          </p:cNvSpPr>
+          <p:nvPr>
+            <p:ph type="title"/>
+          </p:nvPr>
+        </p:nvSpPr>
+        <p:spPr/>
+        <p:txBody>
+          <a:bodyPr/>
+          <a:lstStyle/>
+          <a:p>
+            <a:r>
+              <a:rPr lang="ru-RU" dirty="0" smtClean="0">
+                <a:latin typeface="Times New Roman" panose="02020603050405020304" pitchFamily="18" charset="0"/>
+                <a:cs typeface="Times New Roman" panose="02020603050405020304" pitchFamily="18" charset="0"/>
+              </a:rPr>
+              <a:t>Демонстрация </a:t>
+            </a:r>
+            <a:r>
+              <a:rPr lang="en-US" dirty="0" smtClean="0">
+                <a:latin typeface="Times New Roman" panose="02020603050405020304" pitchFamily="18" charset="0"/>
+                <a:cs typeface="Times New Roman" panose="02020603050405020304" pitchFamily="18" charset="0"/>
+              </a:rPr>
+              <a:t>UI</a:t>
+            </a:r>
+            <a:endParaRPr lang="ru-RU" dirty="0">
+              <a:latin typeface="Times New Roman" panose="02020603050405020304" pitchFamily="18" charset="0"/>
+              <a:cs typeface="Times New Roman" panose="02020603050405020304" pitchFamily="18" charset="0"/>
+            </a:endParaRPr>
+          </a:p>
+        </p:txBody>
+      </p:sp>
+      <p:sp>
+        <p:nvSpPr>
+          <p:cNvPr id="5" name="TextBox 4"/>
+          <p:cNvSpPr txBox="1"/>
+          <p:nvPr/>
+        </p:nvSpPr>
+        <p:spPr>
+          <a:xfrm>
+            <a:off x="838200" y="1690688"/>
+            <a:ext cx="5058972" cy="646331"/>
+          </a:xfrm>
+          <a:prstGeom prst="rect">
+            <a:avLst/>
+          </a:prstGeom>
+          <a:noFill/>
+        </p:spPr>
+        <p:txBody>
+          <a:bodyPr wrap="square" rtlCol="0">
+            <a:spAutoFit/>
+          </a:bodyPr>
+          <a:lstStyle/>
+          <a:p>
+            <a:pPr algn="just"/>
+            <a:r>
+              <a:rPr lang="ru-RU" dirty="0" smtClean="0">
+                <a:latin typeface="Times New Roman" panose="02020603050405020304" pitchFamily="18" charset="0"/>
+                <a:cs typeface="Times New Roman" panose="02020603050405020304" pitchFamily="18" charset="0"/>
+              </a:rPr>
+              <a:t>Содержательная страница сгенерированного</a:t>
+            </a:r>
+            <a:r>
+              <a:rPr lang="en-US" dirty="0" smtClean="0">
+                <a:latin typeface="Times New Roman" panose="02020603050405020304" pitchFamily="18" charset="0"/>
+                <a:cs typeface="Times New Roman" panose="02020603050405020304" pitchFamily="18" charset="0"/>
+              </a:rPr>
+              <a:t> </a:t>
+            </a:r>
+            <a:r>
+              <a:rPr lang="ru-RU" dirty="0" smtClean="0">
+                <a:latin typeface="Times New Roman" panose="02020603050405020304" pitchFamily="18" charset="0"/>
+                <a:cs typeface="Times New Roman" panose="02020603050405020304" pitchFamily="18" charset="0"/>
+              </a:rPr>
+              <a:t>проекта договора в формате DOCX</a:t>
+            </a:r>
+            <a:endParaRPr lang="ru-RU" dirty="0">
+              <a:latin typeface="Times New Roman" panose="02020603050405020304" pitchFamily="18" charset="0"/>
+              <a:cs typeface="Times New Roman" panose="02020603050405020304" pitchFamily="18" charset="0"/>
+            </a:endParaRPr>
+          </a:p>
+        </p:txBody>
+      </p:sp>
+      <p:pic>
+        <p:nvPicPr>
+          <p:cNvPr id="3" name="Рисунок 2"/>
+          <p:cNvPicPr>
+            <a:picLocks noChangeAspect="1"/>
+          </p:cNvPicPr>
+          <p:nvPr/>
+        </p:nvPicPr>
+        <p:blipFill>
+          <a:blip r:embed="rId2">
+            <a:extLst>
+              <a:ext uri="{28A0092B-C50C-407E-A947-70E740481C1C}">
+                <a14:useLocalDpi xmlns:a14="http://schemas.microsoft.com/office/drawing/2010/main" val="0"/>
+              </a:ext>
+            </a:extLst>
+          </a:blip>
+          <a:stretch>
+            <a:fillRect/>
+          </a:stretch>
+        </p:blipFill>
+        <p:spPr>
+          <a:xfrm>
+            <a:off x="6485174" y="291415"/>
+            <a:ext cx="4868626" cy="6300575"/>
+          </a:xfrm>
+          <a:prstGeom prst="rect">
+            <a:avLst/>
+          </a:prstGeom>
+        </p:spPr>
+      </p:pic>
+      <p:sp>
+        <p:nvSpPr>
+          <p:cNvPr id="4" name="Номер слайда 3"/>
+          <p:cNvSpPr>
+            <a:spLocks noGrp="1"/>
+          </p:cNvSpPr>
+          <p:nvPr>
+            <p:ph type="sldNum" sz="quarter" idx="12"/>
+          </p:nvPr>
+        </p:nvSpPr>
+        <p:spPr/>
+        <p:txBody>
+          <a:bodyPr/>
+          <a:lstStyle/>
+          <a:p>
+            <a:fld id="{65A3789A-D406-449F-860F-117B58A45219}" type="slidenum">
+              <a:rPr lang="ru-RU" smtClean="0"/>
+              <a:t>15</a:t>
+            </a:fld>
+            <a:endParaRPr lang="ru-RU"/>
+          </a:p>
+        </p:txBody>
+      </p:sp>
+    </p:spTree>
+    <p:extLst>
+      <p:ext uri="{BB962C8B-B14F-4D97-AF65-F5344CB8AC3E}">
+        <p14:creationId xmlns:p14="http://schemas.microsoft.com/office/powerpoint/2010/main" val="1125818833"/>
+      </p:ext>
+    </p:extLst>
+  </p:cSld>
+  <p:clrMapOvr>
+    <a:masterClrMapping/>
+  </p:clrMapOvr>
+  <p:timing>
+    <p:tnLst>
+      <p:par>
+        <p:cTn id="1" dur="indefinite" restart="never" nodeType="tmRoot"/>
+      </p:par>
+    </p:tnLst>
+  </p:timing>
+</p:sld>
+</file>
+
+<file path=ppt/slides/slide16.xml><?xml version="1.0" encoding="utf-8"?>
+<p:sld xmlns:a="http://schemas.openxmlformats.org/drawingml/2006/main" xmlns:r="http://schemas.openxmlformats.org/officeDocument/2006/relationships" xmlns:p="http://schemas.openxmlformats.org/presentationml/2006/main">
+  <p:cSld>
+    <p:spTree>
+      <p:nvGrpSpPr>
+        <p:cNvPr id="1" name=""/>
+        <p:cNvGrpSpPr/>
+        <p:nvPr/>
+      </p:nvGrpSpPr>
+      <p:grpSpPr>
+        <a:xfrm>
+          <a:off x="0" y="0"/>
+          <a:ext cx="0" cy="0"/>
+          <a:chOff x="0" y="0"/>
+          <a:chExt cx="0" cy="0"/>
+        </a:xfrm>
+      </p:grpSpPr>
+      <p:sp>
+        <p:nvSpPr>
+          <p:cNvPr id="2" name="Заголовок 1"/>
+          <p:cNvSpPr>
+            <a:spLocks noGrp="1"/>
+          </p:cNvSpPr>
+          <p:nvPr>
+            <p:ph type="title"/>
+          </p:nvPr>
+        </p:nvSpPr>
+        <p:spPr/>
+        <p:txBody>
+          <a:bodyPr/>
+          <a:lstStyle/>
+          <a:p>
+            <a:r>
+              <a:rPr lang="ru-RU" dirty="0" smtClean="0">
+                <a:latin typeface="Times New Roman" panose="02020603050405020304" pitchFamily="18" charset="0"/>
+                <a:cs typeface="Times New Roman" panose="02020603050405020304" pitchFamily="18" charset="0"/>
+              </a:rPr>
+              <a:t>Демонстрация </a:t>
+            </a:r>
+            <a:r>
+              <a:rPr lang="en-US" dirty="0" smtClean="0">
+                <a:latin typeface="Times New Roman" panose="02020603050405020304" pitchFamily="18" charset="0"/>
+                <a:cs typeface="Times New Roman" panose="02020603050405020304" pitchFamily="18" charset="0"/>
+              </a:rPr>
+              <a:t>UI</a:t>
+            </a:r>
+            <a:endParaRPr lang="ru-RU" dirty="0">
+              <a:latin typeface="Times New Roman" panose="02020603050405020304" pitchFamily="18" charset="0"/>
+              <a:cs typeface="Times New Roman" panose="02020603050405020304" pitchFamily="18" charset="0"/>
+            </a:endParaRPr>
+          </a:p>
+        </p:txBody>
+      </p:sp>
+      <p:sp>
+        <p:nvSpPr>
+          <p:cNvPr id="5" name="TextBox 4"/>
+          <p:cNvSpPr txBox="1"/>
+          <p:nvPr/>
+        </p:nvSpPr>
+        <p:spPr>
+          <a:xfrm>
+            <a:off x="2103474" y="5879518"/>
+            <a:ext cx="7985051" cy="369332"/>
+          </a:xfrm>
+          <a:prstGeom prst="rect">
+            <a:avLst/>
+          </a:prstGeom>
+          <a:noFill/>
+        </p:spPr>
+        <p:txBody>
+          <a:bodyPr wrap="square" rtlCol="0">
+            <a:spAutoFit/>
+          </a:bodyPr>
+          <a:lstStyle/>
+          <a:p>
+            <a:pPr algn="ctr"/>
+            <a:r>
+              <a:rPr lang="ru-RU" dirty="0" smtClean="0">
+                <a:latin typeface="Times New Roman" panose="02020603050405020304" pitchFamily="18" charset="0"/>
+                <a:cs typeface="Times New Roman" panose="02020603050405020304" pitchFamily="18" charset="0"/>
+              </a:rPr>
+              <a:t>Административная панель управления</a:t>
+            </a:r>
+            <a:r>
+              <a:rPr lang="en-US" dirty="0" smtClean="0">
+                <a:latin typeface="Times New Roman" panose="02020603050405020304" pitchFamily="18" charset="0"/>
+                <a:cs typeface="Times New Roman" panose="02020603050405020304" pitchFamily="18" charset="0"/>
+              </a:rPr>
+              <a:t> </a:t>
+            </a:r>
+            <a:r>
+              <a:rPr lang="ru-RU" dirty="0" smtClean="0">
+                <a:latin typeface="Times New Roman" panose="02020603050405020304" pitchFamily="18" charset="0"/>
+                <a:cs typeface="Times New Roman" panose="02020603050405020304" pitchFamily="18" charset="0"/>
+              </a:rPr>
+              <a:t>корпусом нормативных правовых актов</a:t>
+            </a:r>
+          </a:p>
+        </p:txBody>
+      </p:sp>
+      <p:pic>
+        <p:nvPicPr>
+          <p:cNvPr id="6" name="Рисунок 5"/>
+          <p:cNvPicPr>
+            <a:picLocks noChangeAspect="1"/>
+          </p:cNvPicPr>
+          <p:nvPr/>
+        </p:nvPicPr>
+        <p:blipFill>
+          <a:blip r:embed="rId2" cstate="print">
+            <a:extLst>
+              <a:ext uri="{28A0092B-C50C-407E-A947-70E740481C1C}">
+                <a14:useLocalDpi xmlns:a14="http://schemas.microsoft.com/office/drawing/2010/main" val="0"/>
+              </a:ext>
+            </a:extLst>
+          </a:blip>
+          <a:stretch>
+            <a:fillRect/>
+          </a:stretch>
+        </p:blipFill>
+        <p:spPr>
+          <a:xfrm>
+            <a:off x="2229388" y="1690688"/>
+            <a:ext cx="7733224" cy="4188830"/>
+          </a:xfrm>
+          <a:prstGeom prst="rect">
+            <a:avLst/>
+          </a:prstGeom>
+        </p:spPr>
+      </p:pic>
+      <p:sp>
+        <p:nvSpPr>
+          <p:cNvPr id="3" name="Номер слайда 2"/>
+          <p:cNvSpPr>
+            <a:spLocks noGrp="1"/>
+          </p:cNvSpPr>
+          <p:nvPr>
+            <p:ph type="sldNum" sz="quarter" idx="12"/>
+          </p:nvPr>
+        </p:nvSpPr>
+        <p:spPr/>
+        <p:txBody>
+          <a:bodyPr/>
+          <a:lstStyle/>
+          <a:p>
+            <a:fld id="{65A3789A-D406-449F-860F-117B58A45219}" type="slidenum">
+              <a:rPr lang="ru-RU" smtClean="0"/>
+              <a:t>16</a:t>
+            </a:fld>
+            <a:endParaRPr lang="ru-RU"/>
+          </a:p>
+        </p:txBody>
+      </p:sp>
+    </p:spTree>
+    <p:extLst>
+      <p:ext uri="{BB962C8B-B14F-4D97-AF65-F5344CB8AC3E}">
+        <p14:creationId xmlns:p14="http://schemas.microsoft.com/office/powerpoint/2010/main" val="826703114"/>
       </p:ext>
     </p:extLst>
   </p:cSld>
@@ -5416,26 +6145,26 @@
             <p:ph type="title"/>
           </p:nvPr>
         </p:nvSpPr>
-        <p:spPr>
-          <a:xfrm>
-            <a:off x="647700" y="258445"/>
-            <a:ext cx="10515600" cy="1094740"/>
-          </a:xfrm>
-        </p:spPr>
-        <p:txBody>
-          <a:bodyPr>
-            <a:noAutofit/>
-          </a:bodyPr>
-          <a:lstStyle/>
-          <a:p>
-            <a:r>
-              <a:rPr lang="ru-RU" altLang="en-US" sz="4800" dirty="0" smtClean="0">
-                <a:latin typeface="Times New Roman" panose="02020603050405020304" pitchFamily="18" charset="0"/>
-                <a:cs typeface="Times New Roman" panose="02020603050405020304" pitchFamily="18" charset="0"/>
-              </a:rPr>
-              <a:t>Результаты работы</a:t>
-            </a:r>
-            <a:endParaRPr lang="ru-RU" altLang="en-US" sz="4800" dirty="0">
+        <p:spPr/>
+        <p:txBody>
+          <a:bodyPr/>
+          <a:lstStyle/>
+          <a:p>
+            <a:r>
+              <a:rPr lang="ru-RU" dirty="0" smtClean="0">
+                <a:latin typeface="Times New Roman" panose="02020603050405020304" pitchFamily="18" charset="0"/>
+                <a:cs typeface="Times New Roman" panose="02020603050405020304" pitchFamily="18" charset="0"/>
+              </a:rPr>
+              <a:t>Демонстрация </a:t>
+            </a:r>
+            <a:r>
+              <a:rPr lang="en-US" dirty="0" smtClean="0">
+                <a:latin typeface="Times New Roman" panose="02020603050405020304" pitchFamily="18" charset="0"/>
+                <a:cs typeface="Times New Roman" panose="02020603050405020304" pitchFamily="18" charset="0"/>
+              </a:rPr>
+              <a:t>UI</a:t>
+            </a:r>
+            <a:endParaRPr lang="ru-RU" dirty="0">
               <a:latin typeface="Times New Roman" panose="02020603050405020304" pitchFamily="18" charset="0"/>
               <a:cs typeface="Times New Roman" panose="02020603050405020304" pitchFamily="18" charset="0"/>
             </a:endParaRPr>
@@ -5444,14 +6173,14 @@
       </p:sp>
       <p:sp>
         <p:nvSpPr>
-          <p:cNvPr id="5" name="Текстовое поле 4"/>
+          <p:cNvPr id="5" name="TextBox 4"/>
           <p:cNvSpPr txBox="1"/>
           <p:nvPr/>
         </p:nvSpPr>
         <p:spPr>
           <a:xfrm>
-            <a:off x="11734800" y="6489700"/>
-            <a:ext cx="457200" cy="400110"/>
+            <a:off x="2097732" y="5879518"/>
+            <a:ext cx="7985051" cy="369332"/>
           </a:xfrm>
           <a:prstGeom prst="rect">
             <a:avLst/>
@@ -5466,114 +6195,86 @@
           <a:p>
             <a:pPr algn="ctr"/>
             <a:r>
-              <a:rPr lang="ru-RU" altLang="en-US" sz="2000" dirty="0">
-                <a:solidFill>
-                  <a:schemeClr val="tx1"/>
-                </a:solidFill>
-                <a:latin typeface="Times New Roman" panose="02020603050405020304" pitchFamily="18" charset="0"/>
-                <a:cs typeface="Times New Roman" panose="02020603050405020304" pitchFamily="18" charset="0"/>
-              </a:rPr>
-              <a:t>15</a:t>
-            </a:r>
-          </a:p>
-        </p:txBody>
-      </p:sp>
-      <p:sp>
-        <p:nvSpPr>
-          <p:cNvPr id="6" name="TextBox 5">
+              <a:rPr lang="ru-RU" dirty="0" smtClean="0">
+                <a:latin typeface="Times New Roman" panose="02020603050405020304" pitchFamily="18" charset="0"/>
+                <a:cs typeface="Times New Roman" panose="02020603050405020304" pitchFamily="18" charset="0"/>
+              </a:rPr>
+              <a:t>Административная панель управления</a:t>
+            </a:r>
+            <a:r>
+              <a:rPr lang="en-US" dirty="0" smtClean="0">
+                <a:latin typeface="Times New Roman" panose="02020603050405020304" pitchFamily="18" charset="0"/>
+                <a:cs typeface="Times New Roman" panose="02020603050405020304" pitchFamily="18" charset="0"/>
+              </a:rPr>
+              <a:t> </a:t>
+            </a:r>
+            <a:r>
+              <a:rPr lang="ru-RU" dirty="0" smtClean="0">
+                <a:latin typeface="Times New Roman" panose="02020603050405020304" pitchFamily="18" charset="0"/>
+                <a:cs typeface="Times New Roman" panose="02020603050405020304" pitchFamily="18" charset="0"/>
+              </a:rPr>
+              <a:t>корпусом нормативных правовых актов</a:t>
+            </a:r>
+          </a:p>
+        </p:txBody>
+      </p:sp>
+      <p:pic>
+        <p:nvPicPr>
+          <p:cNvPr id="4" name="Рисунок 3"/>
+          <p:cNvPicPr>
+            <a:picLocks noChangeAspect="1"/>
+          </p:cNvPicPr>
+          <p:nvPr/>
+        </p:nvPicPr>
+        <p:blipFill>
+          <a:blip r:embed="rId2" cstate="print">
             <a:extLst>
-              <a:ext uri="{FF2B5EF4-FFF2-40B4-BE49-F238E27FC236}">
-                <a16:creationId xmlns="" xmlns:a16="http://schemas.microsoft.com/office/drawing/2014/main" id="{9C1EAA17-F0DF-4F15-9558-5B5F6A368814}"/>
+              <a:ext uri="{28A0092B-C50C-407E-A947-70E740481C1C}">
+                <a14:useLocalDpi xmlns:a14="http://schemas.microsoft.com/office/drawing/2010/main" val="0"/>
               </a:ext>
             </a:extLst>
-          </p:cNvPr>
-          <p:cNvSpPr txBox="1"/>
-          <p:nvPr/>
-        </p:nvSpPr>
+          </a:blip>
+          <a:stretch>
+            <a:fillRect/>
+          </a:stretch>
+        </p:blipFill>
         <p:spPr>
           <a:xfrm>
-            <a:off x="387991" y="1353185"/>
-            <a:ext cx="11416018" cy="4401205"/>
+            <a:off x="2229388" y="1690688"/>
+            <a:ext cx="7733224" cy="4188830"/>
           </a:xfrm>
           <a:prstGeom prst="rect">
             <a:avLst/>
           </a:prstGeom>
-          <a:noFill/>
         </p:spPr>
-        <p:txBody>
-          <a:bodyPr wrap="square">
-            <a:spAutoFit/>
-          </a:bodyPr>
-          <a:lstStyle/>
-          <a:p>
-            <a:pPr algn="just"/>
-            <a:r>
-              <a:rPr lang="ru-RU" sz="2800" dirty="0" smtClean="0">
-                <a:latin typeface="Times New Roman" panose="02020603050405020304" pitchFamily="18" charset="0"/>
-                <a:cs typeface="Times New Roman" panose="02020603050405020304" pitchFamily="18" charset="0"/>
-              </a:rPr>
-              <a:t>В ходе выполнения настоящей работы сформирован корпус нормативных правовых актов российского договорного права с реализованным поиском релевантных норм по словесному описанию сделки; спроектирован и реализован интеллектуальный агент, осуществляющий преобразование свободного описания сделки в проект договора и сопровождающие юридические рекомендации со ссылками на статьи нормативных правовых актов.</a:t>
-            </a:r>
-            <a:endParaRPr lang="en-US" sz="2800" dirty="0" smtClean="0">
-              <a:latin typeface="Times New Roman" panose="02020603050405020304" pitchFamily="18" charset="0"/>
-              <a:cs typeface="Times New Roman" panose="02020603050405020304" pitchFamily="18" charset="0"/>
-            </a:endParaRPr>
-          </a:p>
-          <a:p>
-            <a:pPr algn="just"/>
-            <a:r>
-              <a:rPr lang="en-US" sz="2800" dirty="0">
-                <a:latin typeface="Times New Roman" panose="02020603050405020304" pitchFamily="18" charset="0"/>
-                <a:cs typeface="Times New Roman" panose="02020603050405020304" pitchFamily="18" charset="0"/>
-              </a:rPr>
-              <a:t>	</a:t>
-            </a:r>
-            <a:r>
-              <a:rPr lang="ru-RU" sz="2800" dirty="0" smtClean="0">
-                <a:latin typeface="Times New Roman" panose="02020603050405020304" pitchFamily="18" charset="0"/>
-                <a:cs typeface="Times New Roman" panose="02020603050405020304" pitchFamily="18" charset="0"/>
-              </a:rPr>
-              <a:t>Проведённая </a:t>
-            </a:r>
-            <a:r>
-              <a:rPr lang="ru-RU" sz="2800" dirty="0" smtClean="0">
-                <a:latin typeface="Times New Roman" panose="02020603050405020304" pitchFamily="18" charset="0"/>
-                <a:cs typeface="Times New Roman" panose="02020603050405020304" pitchFamily="18" charset="0"/>
-              </a:rPr>
-              <a:t>внешняя экспертная </a:t>
-            </a:r>
-            <a:r>
-              <a:rPr lang="ru-RU" sz="2800" dirty="0" smtClean="0">
-                <a:latin typeface="Times New Roman" panose="02020603050405020304" pitchFamily="18" charset="0"/>
-                <a:cs typeface="Times New Roman" panose="02020603050405020304" pitchFamily="18" charset="0"/>
-              </a:rPr>
-              <a:t>апробация подготовленных системой артефактов с привлечением практикующих юристов </a:t>
-            </a:r>
-            <a:r>
-              <a:rPr lang="ru-RU" sz="2800" dirty="0" smtClean="0">
-                <a:latin typeface="Times New Roman" panose="02020603050405020304" pitchFamily="18" charset="0"/>
-                <a:cs typeface="Times New Roman" panose="02020603050405020304" pitchFamily="18" charset="0"/>
-              </a:rPr>
-              <a:t>подтвердила </a:t>
-            </a:r>
-            <a:r>
-              <a:rPr lang="ru-RU" sz="2800" dirty="0" smtClean="0">
-                <a:latin typeface="Times New Roman" panose="02020603050405020304" pitchFamily="18" charset="0"/>
-                <a:cs typeface="Times New Roman" panose="02020603050405020304" pitchFamily="18" charset="0"/>
-              </a:rPr>
-              <a:t>практическую применимость предложенного подхода.</a:t>
-            </a:r>
-            <a:endParaRPr lang="ru-RU" sz="2800" dirty="0">
-              <a:latin typeface="Times New Roman" panose="02020603050405020304" pitchFamily="18" charset="0"/>
-              <a:cs typeface="Times New Roman" panose="02020603050405020304" pitchFamily="18" charset="0"/>
-            </a:endParaRPr>
+      </p:pic>
+      <p:sp>
+        <p:nvSpPr>
+          <p:cNvPr id="3" name="Номер слайда 2"/>
+          <p:cNvSpPr>
+            <a:spLocks noGrp="1"/>
+          </p:cNvSpPr>
+          <p:nvPr>
+            <p:ph type="sldNum" sz="quarter" idx="12"/>
+          </p:nvPr>
+        </p:nvSpPr>
+        <p:spPr/>
+        <p:txBody>
+          <a:bodyPr/>
+          <a:lstStyle/>
+          <a:p>
+            <a:fld id="{65A3789A-D406-449F-860F-117B58A45219}" type="slidenum">
+              <a:rPr lang="ru-RU" smtClean="0"/>
+              <a:t>17</a:t>
+            </a:fld>
+            <a:endParaRPr lang="ru-RU"/>
           </a:p>
         </p:txBody>
       </p:sp>
     </p:spTree>
     <p:extLst>
       <p:ext uri="{BB962C8B-B14F-4D97-AF65-F5344CB8AC3E}">
-        <p14:creationId xmlns:p14="http://schemas.microsoft.com/office/powerpoint/2010/main" val="2645754192"/>
+        <p14:creationId xmlns:p14="http://schemas.microsoft.com/office/powerpoint/2010/main" val="2897832750"/>
       </p:ext>
     </p:extLst>
   </p:cSld>
@@ -5617,6 +6318,166 @@
             <p:ph type="title"/>
           </p:nvPr>
         </p:nvSpPr>
+        <p:spPr>
+          <a:xfrm>
+            <a:off x="647700" y="258445"/>
+            <a:ext cx="10515600" cy="1094740"/>
+          </a:xfrm>
+        </p:spPr>
+        <p:txBody>
+          <a:bodyPr>
+            <a:noAutofit/>
+          </a:bodyPr>
+          <a:lstStyle/>
+          <a:p>
+            <a:r>
+              <a:rPr lang="ru-RU" altLang="en-US" sz="4800" dirty="0" smtClean="0">
+                <a:latin typeface="Times New Roman" panose="02020603050405020304" pitchFamily="18" charset="0"/>
+                <a:cs typeface="Times New Roman" panose="02020603050405020304" pitchFamily="18" charset="0"/>
+              </a:rPr>
+              <a:t>Результаты работы</a:t>
+            </a:r>
+            <a:endParaRPr lang="ru-RU" altLang="en-US" sz="4800" dirty="0">
+              <a:latin typeface="Times New Roman" panose="02020603050405020304" pitchFamily="18" charset="0"/>
+              <a:cs typeface="Times New Roman" panose="02020603050405020304" pitchFamily="18" charset="0"/>
+            </a:endParaRPr>
+          </a:p>
+        </p:txBody>
+      </p:sp>
+      <p:sp>
+        <p:nvSpPr>
+          <p:cNvPr id="6" name="TextBox 5">
+            <a:extLst>
+              <a:ext uri="{FF2B5EF4-FFF2-40B4-BE49-F238E27FC236}">
+                <a16:creationId xmlns="" xmlns:a16="http://schemas.microsoft.com/office/drawing/2014/main" id="{9C1EAA17-F0DF-4F15-9558-5B5F6A368814}"/>
+              </a:ext>
+            </a:extLst>
+          </p:cNvPr>
+          <p:cNvSpPr txBox="1"/>
+          <p:nvPr/>
+        </p:nvSpPr>
+        <p:spPr>
+          <a:xfrm>
+            <a:off x="387991" y="1353185"/>
+            <a:ext cx="11416018" cy="5200000"/>
+          </a:xfrm>
+          <a:prstGeom prst="rect">
+            <a:avLst/>
+          </a:prstGeom>
+          <a:noFill/>
+        </p:spPr>
+        <p:txBody>
+          <a:bodyPr wrap="square">
+            <a:spAutoFit/>
+          </a:bodyPr>
+          <a:lstStyle/>
+          <a:p>
+            <a:pPr algn="just"/>
+            <a:r>
+              <a:rPr lang="ru-RU" sz="2800" dirty="0" smtClean="0">
+                <a:latin typeface="Times New Roman" panose="02020603050405020304" pitchFamily="18" charset="0"/>
+                <a:cs typeface="Times New Roman" panose="02020603050405020304" pitchFamily="18" charset="0"/>
+              </a:rPr>
+              <a:t>В ходе выполнения настоящей работы сформирован корпус нормативных правовых актов российского договорного права с реализованным поиском релевантных норм по словесному описанию сделки; спроектирован и реализован интеллектуальный агент, осуществляющий преобразование свободного описания сделки в проект договора и сопровождающие юридические рекомендации со ссылками на статьи нормативных правовых актов.</a:t>
+            </a:r>
+            <a:endParaRPr lang="en-US" sz="2800" dirty="0" smtClean="0">
+              <a:latin typeface="Times New Roman" panose="02020603050405020304" pitchFamily="18" charset="0"/>
+              <a:cs typeface="Times New Roman" panose="02020603050405020304" pitchFamily="18" charset="0"/>
+            </a:endParaRPr>
+          </a:p>
+          <a:p>
+            <a:pPr algn="just"/>
+            <a:r>
+              <a:rPr lang="en-US" sz="2800" dirty="0">
+                <a:latin typeface="Times New Roman" panose="02020603050405020304" pitchFamily="18" charset="0"/>
+                <a:cs typeface="Times New Roman" panose="02020603050405020304" pitchFamily="18" charset="0"/>
+              </a:rPr>
+              <a:t>	</a:t>
+            </a:r>
+            <a:r>
+              <a:rPr lang="ru-RU" sz="2800" dirty="0" smtClean="0">
+                <a:latin typeface="Times New Roman" panose="02020603050405020304" pitchFamily="18" charset="0"/>
+                <a:cs typeface="Times New Roman" panose="02020603050405020304" pitchFamily="18" charset="0"/>
+              </a:rPr>
+              <a:t>Проведена эмпирическая оценка качества поиска норм, по результатам которой обоснован выбор итоговой конфигурации подсистемы поиска; внешняя экспертная апробация подготовленных артефактов с привлечением практикующих юристов подтвердила практическую применимость предложенного подхода.</a:t>
+            </a:r>
+            <a:endParaRPr lang="ru-RU" sz="2800" dirty="0">
+              <a:latin typeface="Times New Roman" panose="02020603050405020304" pitchFamily="18" charset="0"/>
+              <a:cs typeface="Times New Roman" panose="02020603050405020304" pitchFamily="18" charset="0"/>
+            </a:endParaRPr>
+          </a:p>
+        </p:txBody>
+      </p:sp>
+      <p:sp>
+        <p:nvSpPr>
+          <p:cNvPr id="3" name="Номер слайда 2"/>
+          <p:cNvSpPr>
+            <a:spLocks noGrp="1"/>
+          </p:cNvSpPr>
+          <p:nvPr>
+            <p:ph type="sldNum" sz="quarter" idx="12"/>
+          </p:nvPr>
+        </p:nvSpPr>
+        <p:spPr/>
+        <p:txBody>
+          <a:bodyPr/>
+          <a:lstStyle/>
+          <a:p>
+            <a:fld id="{65A3789A-D406-449F-860F-117B58A45219}" type="slidenum">
+              <a:rPr lang="ru-RU" smtClean="0"/>
+              <a:t>18</a:t>
+            </a:fld>
+            <a:endParaRPr lang="ru-RU"/>
+          </a:p>
+        </p:txBody>
+      </p:sp>
+    </p:spTree>
+    <p:extLst>
+      <p:ext uri="{BB962C8B-B14F-4D97-AF65-F5344CB8AC3E}">
+        <p14:creationId xmlns:p14="http://schemas.microsoft.com/office/powerpoint/2010/main" val="2645754192"/>
+      </p:ext>
+    </p:extLst>
+  </p:cSld>
+  <p:clrMapOvr>
+    <a:masterClrMapping/>
+  </p:clrMapOvr>
+  <p:timing>
+    <p:tnLst>
+      <p:par>
+        <p:cTn id="1" dur="indefinite" restart="never" nodeType="tmRoot"/>
+      </p:par>
+    </p:tnLst>
+  </p:timing>
+</p:sld>
+</file>
+
+<file path=ppt/slides/slide19.xml><?xml version="1.0" encoding="utf-8"?>
+<p:sld xmlns:a="http://schemas.openxmlformats.org/drawingml/2006/main" xmlns:r="http://schemas.openxmlformats.org/officeDocument/2006/relationships" xmlns:p="http://schemas.openxmlformats.org/presentationml/2006/main">
+  <p:cSld>
+    <p:spTree>
+      <p:nvGrpSpPr>
+        <p:cNvPr id="1" name=""/>
+        <p:cNvGrpSpPr/>
+        <p:nvPr/>
+      </p:nvGrpSpPr>
+      <p:grpSpPr>
+        <a:xfrm>
+          <a:off x="0" y="0"/>
+          <a:ext cx="0" cy="0"/>
+          <a:chOff x="0" y="0"/>
+          <a:chExt cx="0" cy="0"/>
+        </a:xfrm>
+      </p:grpSpPr>
+      <p:sp>
+        <p:nvSpPr>
+          <p:cNvPr id="2" name="Заголовок 1"/>
+          <p:cNvSpPr>
+            <a:spLocks noGrp="1"/>
+          </p:cNvSpPr>
+          <p:nvPr>
+            <p:ph type="title"/>
+          </p:nvPr>
+        </p:nvSpPr>
         <p:spPr/>
         <p:txBody>
           <a:bodyPr>
@@ -5681,6 +6542,29 @@
           </a:xfrm>
         </p:spPr>
       </p:pic>
+      <p:sp>
+        <p:nvSpPr>
+          <p:cNvPr id="3" name="Номер слайда 2"/>
+          <p:cNvSpPr>
+            <a:spLocks noGrp="1"/>
+          </p:cNvSpPr>
+          <p:nvPr>
+            <p:ph type="sldNum" sz="quarter" idx="12"/>
+          </p:nvPr>
+        </p:nvSpPr>
+        <p:spPr/>
+        <p:txBody>
+          <a:bodyPr/>
+          <a:lstStyle/>
+          <a:p>
+            <a:fld id="{65A3789A-D406-449F-860F-117B58A45219}" type="slidenum">
+              <a:rPr lang="ru-RU" smtClean="0"/>
+              <a:t>19</a:t>
+            </a:fld>
+            <a:endParaRPr lang="ru-RU"/>
+          </a:p>
+        </p:txBody>
+      </p:sp>
     </p:spTree>
     <p:extLst>
       <p:ext uri="{BB962C8B-B14F-4D97-AF65-F5344CB8AC3E}">
@@ -5805,37 +6689,24 @@
       </p:sp>
       <p:sp>
         <p:nvSpPr>
-          <p:cNvPr id="5" name="Текстовое поле 4"/>
-          <p:cNvSpPr txBox="1"/>
-          <p:nvPr/>
-        </p:nvSpPr>
-        <p:spPr>
-          <a:xfrm>
-            <a:off x="11734800" y="6489700"/>
-            <a:ext cx="457200" cy="400110"/>
-          </a:xfrm>
-          <a:prstGeom prst="rect">
-            <a:avLst/>
-          </a:prstGeom>
-          <a:noFill/>
-        </p:spPr>
-        <p:txBody>
-          <a:bodyPr wrap="square" rtlCol="0">
-            <a:spAutoFit/>
-          </a:bodyPr>
-          <a:lstStyle/>
-          <a:p>
-            <a:pPr algn="ctr"/>
-            <a:r>
-              <a:rPr lang="en-US" altLang="ru-RU" sz="2000" dirty="0">
-                <a:solidFill>
-                  <a:schemeClr val="tx1"/>
-                </a:solidFill>
-                <a:latin typeface="Times New Roman" panose="02020603050405020304" pitchFamily="18" charset="0"/>
-                <a:cs typeface="Times New Roman" panose="02020603050405020304" pitchFamily="18" charset="0"/>
-              </a:rPr>
+          <p:cNvPr id="4" name="Номер слайда 3"/>
+          <p:cNvSpPr>
+            <a:spLocks noGrp="1"/>
+          </p:cNvSpPr>
+          <p:nvPr>
+            <p:ph type="sldNum" sz="quarter" idx="12"/>
+          </p:nvPr>
+        </p:nvSpPr>
+        <p:spPr/>
+        <p:txBody>
+          <a:bodyPr/>
+          <a:lstStyle/>
+          <a:p>
+            <a:fld id="{65A3789A-D406-449F-860F-117B58A45219}" type="slidenum">
+              <a:rPr lang="ru-RU" smtClean="0"/>
               <a:t>2</a:t>
-            </a:r>
+            </a:fld>
+            <a:endParaRPr lang="ru-RU" dirty="0"/>
           </a:p>
         </p:txBody>
       </p:sp>
@@ -6028,44 +6899,24 @@
       </p:sp>
       <p:sp>
         <p:nvSpPr>
-          <p:cNvPr id="5" name="Текстовое поле 4"/>
-          <p:cNvSpPr txBox="1"/>
-          <p:nvPr/>
-        </p:nvSpPr>
-        <p:spPr>
-          <a:xfrm>
-            <a:off x="11734800" y="6489700"/>
-            <a:ext cx="457200" cy="400110"/>
-          </a:xfrm>
-          <a:prstGeom prst="rect">
-            <a:avLst/>
-          </a:prstGeom>
-          <a:noFill/>
-        </p:spPr>
-        <p:txBody>
-          <a:bodyPr wrap="square" rtlCol="0">
-            <a:spAutoFit/>
-          </a:bodyPr>
-          <a:lstStyle/>
-          <a:p>
-            <a:pPr algn="ctr"/>
-            <a:r>
-              <a:rPr lang="en-US" altLang="ru-RU" sz="2000" dirty="0">
-                <a:solidFill>
-                  <a:schemeClr val="tx1"/>
-                </a:solidFill>
-                <a:latin typeface="Times New Roman" panose="02020603050405020304" pitchFamily="18" charset="0"/>
-                <a:cs typeface="Times New Roman" panose="02020603050405020304" pitchFamily="18" charset="0"/>
-              </a:rPr>
+          <p:cNvPr id="4" name="Номер слайда 3"/>
+          <p:cNvSpPr>
+            <a:spLocks noGrp="1"/>
+          </p:cNvSpPr>
+          <p:nvPr>
+            <p:ph type="sldNum" sz="quarter" idx="12"/>
+          </p:nvPr>
+        </p:nvSpPr>
+        <p:spPr/>
+        <p:txBody>
+          <a:bodyPr/>
+          <a:lstStyle/>
+          <a:p>
+            <a:fld id="{65A3789A-D406-449F-860F-117B58A45219}" type="slidenum">
+              <a:rPr lang="ru-RU" smtClean="0"/>
               <a:t>3</a:t>
-            </a:r>
-            <a:endParaRPr lang="en-US" altLang="ru-RU" dirty="0">
-              <a:solidFill>
-                <a:schemeClr val="tx1"/>
-              </a:solidFill>
-              <a:latin typeface="Times New Roman" panose="02020603050405020304" pitchFamily="18" charset="0"/>
-              <a:cs typeface="Times New Roman" panose="02020603050405020304" pitchFamily="18" charset="0"/>
-            </a:endParaRPr>
+            </a:fld>
+            <a:endParaRPr lang="ru-RU"/>
           </a:p>
         </p:txBody>
       </p:sp>
@@ -6118,7 +6969,9 @@
         </p:nvSpPr>
         <p:spPr/>
         <p:txBody>
-          <a:bodyPr/>
+          <a:bodyPr>
+            <a:normAutofit/>
+          </a:bodyPr>
           <a:lstStyle/>
           <a:p>
             <a:r>
@@ -6126,16 +6979,16 @@
                 <a:latin typeface="Times New Roman" panose="02020603050405020304" pitchFamily="18" charset="0"/>
                 <a:cs typeface="Times New Roman" panose="02020603050405020304" pitchFamily="18" charset="0"/>
               </a:rPr>
-              <a:t>Модели</a:t>
-            </a:r>
-            <a:r>
-              <a:rPr lang="ru-RU" dirty="0" smtClean="0">
-                <a:latin typeface="Times New Roman" panose="02020603050405020304" pitchFamily="18" charset="0"/>
-                <a:cs typeface="Times New Roman" panose="02020603050405020304" pitchFamily="18" charset="0"/>
-              </a:rPr>
-              <a:t>, используемые в разработке</a:t>
-            </a:r>
-            <a:endParaRPr lang="ru-RU" dirty="0">
+              <a:t>Модели и </a:t>
+            </a:r>
+            <a:r>
+              <a:rPr lang="ru-RU" sz="4800" dirty="0" err="1" smtClean="0">
+                <a:latin typeface="Times New Roman" panose="02020603050405020304" pitchFamily="18" charset="0"/>
+                <a:cs typeface="Times New Roman" panose="02020603050405020304" pitchFamily="18" charset="0"/>
+              </a:rPr>
+              <a:t>датасеты</a:t>
+            </a:r>
+            <a:endParaRPr lang="ru-RU" sz="4800" dirty="0">
               <a:latin typeface="Times New Roman" panose="02020603050405020304" pitchFamily="18" charset="0"/>
               <a:cs typeface="Times New Roman" panose="02020603050405020304" pitchFamily="18" charset="0"/>
             </a:endParaRPr>
@@ -6144,144 +6997,253 @@
       </p:sp>
       <p:sp>
         <p:nvSpPr>
-          <p:cNvPr id="3" name="Объект 2"/>
-          <p:cNvSpPr>
-            <a:spLocks noGrp="1"/>
-          </p:cNvSpPr>
-          <p:nvPr>
-            <p:ph idx="1"/>
-          </p:nvPr>
+          <p:cNvPr id="10" name="TextBox 10"/>
+          <p:cNvSpPr txBox="1"/>
+          <p:nvPr/>
         </p:nvSpPr>
         <p:spPr>
           <a:xfrm>
-            <a:off x="838200" y="1813433"/>
-            <a:ext cx="10515600" cy="4351338"/>
+            <a:off x="500000" y="1500000"/>
+            <a:ext cx="5400000" cy="5000000"/>
           </a:xfrm>
+          <a:prstGeom prst="rect">
+            <a:avLst/>
+          </a:prstGeom>
+          <a:noFill/>
         </p:spPr>
         <p:txBody>
-          <a:bodyPr/>
-          <a:lstStyle/>
-          <a:p>
-            <a:pPr marL="514350" indent="-514350">
+          <a:bodyPr wrap="square" rtlCol="0">
+            <a:normAutofit/>
+          </a:bodyPr>
+          <a:lstStyle/>
+          <a:p>
+            <a:pPr marL="0" indent="0">
+              <a:buNone/>
+            </a:pPr>
+            <a:r>
+              <a:rPr lang="ru-RU" sz="3200" b="1" dirty="0">
+                <a:latin typeface="Times New Roman" panose="02020603050405020304" pitchFamily="18" charset="0"/>
+                <a:cs typeface="Times New Roman" panose="02020603050405020304" pitchFamily="18" charset="0"/>
+              </a:rPr>
+              <a:t>Используемые модели</a:t>
+            </a:r>
+          </a:p>
+          <a:p>
+            <a:pPr marL="457200" indent="-457200">
               <a:buFont typeface="+mj-lt"/>
               <a:buAutoNum type="arabicPeriod"/>
             </a:pPr>
             <a:r>
-              <a:rPr lang="ru-RU" dirty="0" err="1" smtClean="0">
-                <a:latin typeface="Times New Roman" panose="02020603050405020304" pitchFamily="18" charset="0"/>
-                <a:cs typeface="Times New Roman" panose="02020603050405020304" pitchFamily="18" charset="0"/>
-              </a:rPr>
-              <a:t>Инференс</a:t>
-            </a:r>
-            <a:r>
-              <a:rPr lang="ru-RU" dirty="0" smtClean="0">
+              <a:rPr lang="ru-RU" sz="2400" dirty="0">
+                <a:latin typeface="Times New Roman" panose="02020603050405020304" pitchFamily="18" charset="0"/>
+                <a:cs typeface="Times New Roman" panose="02020603050405020304" pitchFamily="18" charset="0"/>
+              </a:rPr>
+              <a:t>Инференс LLM: Gemma 4: 31b</a:t>
+            </a:r>
+          </a:p>
+          <a:p>
+            <a:pPr marL="457200" indent="-457200">
+              <a:buFont typeface="+mj-lt"/>
+              <a:buAutoNum type="arabicPeriod"/>
+            </a:pPr>
+            <a:r>
+              <a:rPr lang="ru-RU" sz="2400" dirty="0">
+                <a:latin typeface="Times New Roman" panose="02020603050405020304" pitchFamily="18" charset="0"/>
+                <a:cs typeface="Times New Roman" panose="02020603050405020304" pitchFamily="18" charset="0"/>
+              </a:rPr>
+              <a:t>Эмбеддер: ai-sage/Giga-Embeddings-instruct</a:t>
+            </a:r>
+          </a:p>
+          <a:p>
+            <a:pPr marL="457200" indent="-457200">
+              <a:buFont typeface="+mj-lt"/>
+              <a:buAutoNum type="arabicPeriod"/>
+            </a:pPr>
+            <a:r>
+              <a:rPr lang="ru-RU" sz="2400" dirty="0">
+                <a:latin typeface="Times New Roman" panose="02020603050405020304" pitchFamily="18" charset="0"/>
+                <a:cs typeface="Times New Roman" panose="02020603050405020304" pitchFamily="18" charset="0"/>
+              </a:rPr>
+              <a:t>Реранкер: Qwen/Qwen3-Reranker-0.6B</a:t>
+            </a:r>
+          </a:p>
+        </p:txBody>
+      </p:sp>
+      <p:sp>
+        <p:nvSpPr>
+          <p:cNvPr id="11" name="TextBox 11"/>
+          <p:cNvSpPr txBox="1"/>
+          <p:nvPr/>
+        </p:nvSpPr>
+        <p:spPr>
+          <a:xfrm>
+            <a:off x="6200000" y="1500000"/>
+            <a:ext cx="5500000" cy="5000000"/>
+          </a:xfrm>
+          <a:prstGeom prst="rect">
+            <a:avLst/>
+          </a:prstGeom>
+          <a:noFill/>
+        </p:spPr>
+        <p:txBody>
+          <a:bodyPr wrap="square" rtlCol="0">
+            <a:normAutofit/>
+          </a:bodyPr>
+          <a:lstStyle/>
+          <a:p>
+            <a:pPr marL="0" indent="0">
+              <a:buNone/>
+            </a:pPr>
+            <a:r>
+              <a:rPr lang="ru-RU" sz="3200" b="1" dirty="0">
+                <a:latin typeface="Times New Roman" panose="02020603050405020304" pitchFamily="18" charset="0"/>
+                <a:cs typeface="Times New Roman" panose="02020603050405020304" pitchFamily="18" charset="0"/>
+              </a:rPr>
+              <a:t>Корпус нормативных актов</a:t>
+            </a:r>
+          </a:p>
+          <a:p>
+            <a:r>
+              <a:rPr lang="ru-RU" sz="2400" dirty="0">
+                <a:latin typeface="Times New Roman" panose="02020603050405020304" pitchFamily="18" charset="0"/>
+                <a:cs typeface="Times New Roman" panose="02020603050405020304" pitchFamily="18" charset="0"/>
+              </a:rPr>
+              <a:t>В ходе работы были использованы следующие тексты</a:t>
+            </a:r>
+            <a:r>
+              <a:rPr lang="en-US" sz="2400" dirty="0">
                 <a:latin typeface="Times New Roman" panose="02020603050405020304" pitchFamily="18" charset="0"/>
                 <a:cs typeface="Times New Roman" panose="02020603050405020304" pitchFamily="18" charset="0"/>
               </a:rPr>
               <a:t> </a:t>
             </a:r>
             <a:r>
-              <a:rPr lang="en-US" dirty="0" smtClean="0">
-                <a:latin typeface="Times New Roman" panose="02020603050405020304" pitchFamily="18" charset="0"/>
-                <a:cs typeface="Times New Roman" panose="02020603050405020304" pitchFamily="18" charset="0"/>
-              </a:rPr>
-              <a:t>LLM Gemma 4: 31b</a:t>
-            </a:r>
-            <a:endParaRPr lang="ru-RU" dirty="0" smtClean="0">
+              <a:rPr lang="ru-RU" sz="2400" dirty="0">
+                <a:latin typeface="Times New Roman" panose="02020603050405020304" pitchFamily="18" charset="0"/>
+                <a:cs typeface="Times New Roman" panose="02020603050405020304" pitchFamily="18" charset="0"/>
+              </a:rPr>
+              <a:t>нормативно-правовых актов, загруженные </a:t>
+            </a:r>
+            <a:r>
+              <a:rPr lang="en-US" sz="2400" dirty="0">
+                <a:latin typeface="Times New Roman" panose="02020603050405020304" pitchFamily="18" charset="0"/>
+                <a:cs typeface="Times New Roman" panose="02020603050405020304" pitchFamily="18" charset="0"/>
+              </a:rPr>
+              <a:t>c </a:t>
+            </a:r>
+            <a:r>
+              <a:rPr lang="ru-RU" sz="2400" dirty="0">
+                <a:latin typeface="Times New Roman" panose="02020603050405020304" pitchFamily="18" charset="0"/>
+                <a:cs typeface="Times New Roman" panose="02020603050405020304" pitchFamily="18" charset="0"/>
+              </a:rPr>
+              <a:t>официального интернет-портала правовой информации </a:t>
+            </a:r>
+            <a:r>
+              <a:rPr lang="en-US" sz="2400" dirty="0">
+                <a:latin typeface="Times New Roman" panose="02020603050405020304" pitchFamily="18" charset="0"/>
+                <a:cs typeface="Times New Roman" panose="02020603050405020304" pitchFamily="18" charset="0"/>
+              </a:rPr>
+              <a:t>pravo.gov.ru:</a:t>
+            </a:r>
+            <a:endParaRPr lang="ru-RU" sz="2400" dirty="0">
               <a:latin typeface="Times New Roman" panose="02020603050405020304" pitchFamily="18" charset="0"/>
               <a:cs typeface="Times New Roman" panose="02020603050405020304" pitchFamily="18" charset="0"/>
             </a:endParaRPr>
           </a:p>
           <a:p>
-            <a:pPr marL="514350" indent="-514350">
+            <a:pPr marL="457200" indent="-457200">
               <a:buFont typeface="+mj-lt"/>
               <a:buAutoNum type="arabicPeriod"/>
             </a:pPr>
             <a:r>
-              <a:rPr lang="ru-RU" dirty="0" err="1" smtClean="0">
-                <a:latin typeface="Times New Roman" panose="02020603050405020304" pitchFamily="18" charset="0"/>
-                <a:cs typeface="Times New Roman" panose="02020603050405020304" pitchFamily="18" charset="0"/>
-              </a:rPr>
-              <a:t>Эмбеддер</a:t>
-            </a:r>
-            <a:r>
-              <a:rPr lang="ru-RU" dirty="0" smtClean="0">
-                <a:latin typeface="Times New Roman" panose="02020603050405020304" pitchFamily="18" charset="0"/>
-                <a:cs typeface="Times New Roman" panose="02020603050405020304" pitchFamily="18" charset="0"/>
-              </a:rPr>
-              <a:t> </a:t>
-            </a:r>
-            <a:r>
-              <a:rPr lang="en-US" dirty="0" err="1">
-                <a:latin typeface="Times New Roman" panose="02020603050405020304" pitchFamily="18" charset="0"/>
-                <a:cs typeface="Times New Roman" panose="02020603050405020304" pitchFamily="18" charset="0"/>
-              </a:rPr>
-              <a:t>ai</a:t>
-            </a:r>
-            <a:r>
-              <a:rPr lang="en-US" dirty="0">
-                <a:latin typeface="Times New Roman" panose="02020603050405020304" pitchFamily="18" charset="0"/>
-                <a:cs typeface="Times New Roman" panose="02020603050405020304" pitchFamily="18" charset="0"/>
-              </a:rPr>
-              <a:t>-sage/Giga-</a:t>
-            </a:r>
-            <a:r>
-              <a:rPr lang="en-US" dirty="0" err="1">
-                <a:latin typeface="Times New Roman" panose="02020603050405020304" pitchFamily="18" charset="0"/>
-                <a:cs typeface="Times New Roman" panose="02020603050405020304" pitchFamily="18" charset="0"/>
-              </a:rPr>
-              <a:t>Embeddings</a:t>
-            </a:r>
-            <a:r>
-              <a:rPr lang="en-US" dirty="0">
-                <a:latin typeface="Times New Roman" panose="02020603050405020304" pitchFamily="18" charset="0"/>
-                <a:cs typeface="Times New Roman" panose="02020603050405020304" pitchFamily="18" charset="0"/>
-              </a:rPr>
-              <a:t>-instruct</a:t>
-            </a:r>
-          </a:p>
-          <a:p>
-            <a:pPr marL="514350" indent="-514350">
+              <a:rPr lang="ru-RU" sz="2400" dirty="0" smtClean="0">
+                <a:latin typeface="Times New Roman" panose="02020603050405020304" pitchFamily="18" charset="0"/>
+                <a:cs typeface="Times New Roman" panose="02020603050405020304" pitchFamily="18" charset="0"/>
+              </a:rPr>
+              <a:t>ГК </a:t>
+            </a:r>
+            <a:r>
+              <a:rPr lang="ru-RU" sz="2400" dirty="0">
+                <a:latin typeface="Times New Roman" panose="02020603050405020304" pitchFamily="18" charset="0"/>
+                <a:cs typeface="Times New Roman" panose="02020603050405020304" pitchFamily="18" charset="0"/>
+              </a:rPr>
+              <a:t>РФ, часть 1 и 2</a:t>
+            </a:r>
+          </a:p>
+          <a:p>
+            <a:pPr marL="457200" indent="-457200">
               <a:buFont typeface="+mj-lt"/>
               <a:buAutoNum type="arabicPeriod"/>
             </a:pPr>
             <a:r>
-              <a:rPr lang="ru-RU" dirty="0" err="1" smtClean="0">
-                <a:latin typeface="Times New Roman" panose="02020603050405020304" pitchFamily="18" charset="0"/>
-                <a:cs typeface="Times New Roman" panose="02020603050405020304" pitchFamily="18" charset="0"/>
-              </a:rPr>
-              <a:t>Реранкер</a:t>
-            </a:r>
-            <a:r>
-              <a:rPr lang="ru-RU" dirty="0" smtClean="0">
-                <a:latin typeface="Times New Roman" panose="02020603050405020304" pitchFamily="18" charset="0"/>
-                <a:cs typeface="Times New Roman" panose="02020603050405020304" pitchFamily="18" charset="0"/>
-              </a:rPr>
-              <a:t> </a:t>
-            </a:r>
-            <a:r>
-              <a:rPr lang="en-US" dirty="0" err="1">
-                <a:latin typeface="Times New Roman" panose="02020603050405020304" pitchFamily="18" charset="0"/>
-                <a:cs typeface="Times New Roman" panose="02020603050405020304" pitchFamily="18" charset="0"/>
-              </a:rPr>
-              <a:t>Qwen</a:t>
-            </a:r>
-            <a:r>
-              <a:rPr lang="en-US" dirty="0">
-                <a:latin typeface="Times New Roman" panose="02020603050405020304" pitchFamily="18" charset="0"/>
-                <a:cs typeface="Times New Roman" panose="02020603050405020304" pitchFamily="18" charset="0"/>
-              </a:rPr>
-              <a:t>/Qwen3-Reranker-0.6B</a:t>
-            </a:r>
-          </a:p>
-          <a:p>
-            <a:pPr marL="0" indent="0">
-              <a:buNone/>
+              <a:rPr lang="ru-RU" sz="2400" dirty="0">
+                <a:latin typeface="Times New Roman" panose="02020603050405020304" pitchFamily="18" charset="0"/>
+                <a:cs typeface="Times New Roman" panose="02020603050405020304" pitchFamily="18" charset="0"/>
+              </a:rPr>
+              <a:t>ЖК РФ</a:t>
+            </a:r>
+          </a:p>
+          <a:p>
+            <a:pPr marL="457200" indent="-457200">
+              <a:buFont typeface="+mj-lt"/>
+              <a:buAutoNum type="arabicPeriod"/>
             </a:pPr>
-            <a:endParaRPr lang="en-US" dirty="0">
-              <a:latin typeface="Times New Roman" panose="02020603050405020304" pitchFamily="18" charset="0"/>
-              <a:cs typeface="Times New Roman" panose="02020603050405020304" pitchFamily="18" charset="0"/>
-            </a:endParaRPr>
+            <a:r>
+              <a:rPr lang="ru-RU" sz="2400" dirty="0">
+                <a:latin typeface="Times New Roman" panose="02020603050405020304" pitchFamily="18" charset="0"/>
+                <a:cs typeface="Times New Roman" panose="02020603050405020304" pitchFamily="18" charset="0"/>
+              </a:rPr>
+              <a:t>ФЗ «О защите прав потребителей»</a:t>
+            </a:r>
+          </a:p>
+          <a:p>
+            <a:pPr marL="457200" indent="-457200">
+              <a:buFont typeface="+mj-lt"/>
+              <a:buAutoNum type="arabicPeriod"/>
+            </a:pPr>
+            <a:r>
+              <a:rPr lang="ru-RU" sz="2400" dirty="0">
+                <a:latin typeface="Times New Roman" panose="02020603050405020304" pitchFamily="18" charset="0"/>
+                <a:cs typeface="Times New Roman" panose="02020603050405020304" pitchFamily="18" charset="0"/>
+              </a:rPr>
+              <a:t>ФЗ «О государственной регистрации недвижимости»</a:t>
+            </a:r>
+          </a:p>
+          <a:p>
+            <a:pPr marL="457200" indent="-457200">
+              <a:buFont typeface="+mj-lt"/>
+              <a:buAutoNum type="arabicPeriod"/>
+            </a:pPr>
+            <a:r>
+              <a:rPr lang="ru-RU" sz="2400" dirty="0">
+                <a:latin typeface="Times New Roman" panose="02020603050405020304" pitchFamily="18" charset="0"/>
+                <a:cs typeface="Times New Roman" panose="02020603050405020304" pitchFamily="18" charset="0"/>
+              </a:rPr>
+              <a:t>ФЗ о потребительском кредите (займе)</a:t>
+            </a:r>
+          </a:p>
+        </p:txBody>
+      </p:sp>
+      <p:sp>
+        <p:nvSpPr>
+          <p:cNvPr id="4" name="Номер слайда 3"/>
+          <p:cNvSpPr>
+            <a:spLocks noGrp="1"/>
+          </p:cNvSpPr>
+          <p:nvPr>
+            <p:ph type="sldNum" sz="quarter" idx="12"/>
+          </p:nvPr>
+        </p:nvSpPr>
+        <p:spPr/>
+        <p:txBody>
+          <a:bodyPr/>
+          <a:lstStyle/>
+          <a:p>
+            <a:fld id="{65A3789A-D406-449F-860F-117B58A45219}" type="slidenum">
+              <a:rPr lang="ru-RU" smtClean="0"/>
+              <a:t>4</a:t>
+            </a:fld>
+            <a:endParaRPr lang="ru-RU"/>
           </a:p>
         </p:txBody>
       </p:sp>
@@ -6306,252 +7268,6 @@
 </file>
 
 <file path=ppt/slides/slide5.xml><?xml version="1.0" encoding="utf-8"?>
-<p:sld xmlns:a="http://schemas.openxmlformats.org/drawingml/2006/main" xmlns:r="http://schemas.openxmlformats.org/officeDocument/2006/relationships" xmlns:p="http://schemas.openxmlformats.org/presentationml/2006/main">
-  <p:cSld>
-    <p:spTree>
-      <p:nvGrpSpPr>
-        <p:cNvPr id="1" name=""/>
-        <p:cNvGrpSpPr/>
-        <p:nvPr/>
-      </p:nvGrpSpPr>
-      <p:grpSpPr>
-        <a:xfrm>
-          <a:off x="0" y="0"/>
-          <a:ext cx="0" cy="0"/>
-          <a:chOff x="0" y="0"/>
-          <a:chExt cx="0" cy="0"/>
-        </a:xfrm>
-      </p:grpSpPr>
-      <p:sp>
-        <p:nvSpPr>
-          <p:cNvPr id="2" name="Заголовок 1"/>
-          <p:cNvSpPr>
-            <a:spLocks noGrp="1"/>
-          </p:cNvSpPr>
-          <p:nvPr>
-            <p:ph type="title"/>
-          </p:nvPr>
-        </p:nvSpPr>
-        <p:spPr/>
-        <p:txBody>
-          <a:bodyPr/>
-          <a:lstStyle/>
-          <a:p>
-            <a:r>
-              <a:rPr lang="ru-RU" dirty="0" err="1" smtClean="0">
-                <a:latin typeface="Times New Roman" panose="02020603050405020304" pitchFamily="18" charset="0"/>
-                <a:cs typeface="Times New Roman" panose="02020603050405020304" pitchFamily="18" charset="0"/>
-              </a:rPr>
-              <a:t>Датасеты</a:t>
-            </a:r>
-            <a:r>
-              <a:rPr lang="ru-RU" dirty="0" smtClean="0">
-                <a:latin typeface="Times New Roman" panose="02020603050405020304" pitchFamily="18" charset="0"/>
-                <a:cs typeface="Times New Roman" panose="02020603050405020304" pitchFamily="18" charset="0"/>
-              </a:rPr>
-              <a:t>, используемые в разработке</a:t>
-            </a:r>
-            <a:endParaRPr lang="ru-RU" dirty="0">
-              <a:latin typeface="Times New Roman" panose="02020603050405020304" pitchFamily="18" charset="0"/>
-              <a:cs typeface="Times New Roman" panose="02020603050405020304" pitchFamily="18" charset="0"/>
-            </a:endParaRPr>
-          </a:p>
-        </p:txBody>
-      </p:sp>
-      <p:sp>
-        <p:nvSpPr>
-          <p:cNvPr id="3" name="Объект 2"/>
-          <p:cNvSpPr>
-            <a:spLocks noGrp="1"/>
-          </p:cNvSpPr>
-          <p:nvPr>
-            <p:ph idx="1"/>
-          </p:nvPr>
-        </p:nvSpPr>
-        <p:spPr/>
-        <p:txBody>
-          <a:bodyPr/>
-          <a:lstStyle/>
-          <a:p>
-            <a:pPr marL="0" indent="0">
-              <a:buNone/>
-            </a:pPr>
-            <a:r>
-              <a:rPr lang="ru-RU" dirty="0" smtClean="0">
-                <a:latin typeface="Times New Roman" panose="02020603050405020304" pitchFamily="18" charset="0"/>
-                <a:cs typeface="Times New Roman" panose="02020603050405020304" pitchFamily="18" charset="0"/>
-              </a:rPr>
-              <a:t>В ходе работы были использованы следующие тексты</a:t>
-            </a:r>
-            <a:r>
-              <a:rPr lang="en-US" dirty="0" smtClean="0">
-                <a:latin typeface="Times New Roman" panose="02020603050405020304" pitchFamily="18" charset="0"/>
-                <a:cs typeface="Times New Roman" panose="02020603050405020304" pitchFamily="18" charset="0"/>
-              </a:rPr>
-              <a:t> </a:t>
-            </a:r>
-            <a:r>
-              <a:rPr lang="ru-RU" dirty="0" smtClean="0">
-                <a:latin typeface="Times New Roman" panose="02020603050405020304" pitchFamily="18" charset="0"/>
-                <a:cs typeface="Times New Roman" panose="02020603050405020304" pitchFamily="18" charset="0"/>
-              </a:rPr>
-              <a:t>нормативно-правовых актов, загруженные </a:t>
-            </a:r>
-            <a:r>
-              <a:rPr lang="en-US" dirty="0" smtClean="0">
-                <a:latin typeface="Times New Roman" panose="02020603050405020304" pitchFamily="18" charset="0"/>
-                <a:cs typeface="Times New Roman" panose="02020603050405020304" pitchFamily="18" charset="0"/>
-              </a:rPr>
-              <a:t>c </a:t>
-            </a:r>
-            <a:r>
-              <a:rPr lang="ru-RU" dirty="0" smtClean="0">
-                <a:latin typeface="Times New Roman" panose="02020603050405020304" pitchFamily="18" charset="0"/>
-                <a:cs typeface="Times New Roman" panose="02020603050405020304" pitchFamily="18" charset="0"/>
-              </a:rPr>
-              <a:t>официального интернет-портала правовой информации </a:t>
-            </a:r>
-            <a:r>
-              <a:rPr lang="en-US" dirty="0" smtClean="0">
-                <a:latin typeface="Times New Roman" panose="02020603050405020304" pitchFamily="18" charset="0"/>
-                <a:cs typeface="Times New Roman" panose="02020603050405020304" pitchFamily="18" charset="0"/>
-              </a:rPr>
-              <a:t>pravo.gov.ru:</a:t>
-            </a:r>
-            <a:endParaRPr lang="ru-RU" dirty="0">
-              <a:latin typeface="Times New Roman" panose="02020603050405020304" pitchFamily="18" charset="0"/>
-              <a:cs typeface="Times New Roman" panose="02020603050405020304" pitchFamily="18" charset="0"/>
-            </a:endParaRPr>
-          </a:p>
-          <a:p>
-            <a:pPr marL="514350" indent="-514350">
-              <a:buFont typeface="+mj-lt"/>
-              <a:buAutoNum type="arabicPeriod"/>
-            </a:pPr>
-            <a:r>
-              <a:rPr lang="ru-RU" dirty="0" smtClean="0">
-                <a:latin typeface="Times New Roman" panose="02020603050405020304" pitchFamily="18" charset="0"/>
-                <a:cs typeface="Times New Roman" panose="02020603050405020304" pitchFamily="18" charset="0"/>
-              </a:rPr>
-              <a:t>ГК РФ 1 и 2 часть</a:t>
-            </a:r>
-            <a:r>
-              <a:rPr lang="en-US" dirty="0" smtClean="0">
-                <a:latin typeface="Times New Roman" panose="02020603050405020304" pitchFamily="18" charset="0"/>
-                <a:cs typeface="Times New Roman" panose="02020603050405020304" pitchFamily="18" charset="0"/>
-              </a:rPr>
-              <a:t>;</a:t>
-            </a:r>
-          </a:p>
-          <a:p>
-            <a:pPr marL="514350" indent="-514350">
-              <a:buFont typeface="+mj-lt"/>
-              <a:buAutoNum type="arabicPeriod"/>
-            </a:pPr>
-            <a:r>
-              <a:rPr lang="ru-RU" dirty="0" smtClean="0">
-                <a:latin typeface="Times New Roman" panose="02020603050405020304" pitchFamily="18" charset="0"/>
-                <a:cs typeface="Times New Roman" panose="02020603050405020304" pitchFamily="18" charset="0"/>
-              </a:rPr>
-              <a:t>ЖК РФ</a:t>
-            </a:r>
-            <a:r>
-              <a:rPr lang="en-US" dirty="0" smtClean="0">
-                <a:latin typeface="Times New Roman" panose="02020603050405020304" pitchFamily="18" charset="0"/>
-                <a:cs typeface="Times New Roman" panose="02020603050405020304" pitchFamily="18" charset="0"/>
-              </a:rPr>
-              <a:t>;</a:t>
-            </a:r>
-          </a:p>
-          <a:p>
-            <a:pPr marL="514350" indent="-514350">
-              <a:buFont typeface="+mj-lt"/>
-              <a:buAutoNum type="arabicPeriod"/>
-            </a:pPr>
-            <a:r>
-              <a:rPr lang="ru-RU" dirty="0" smtClean="0">
-                <a:latin typeface="Times New Roman" panose="02020603050405020304" pitchFamily="18" charset="0"/>
-                <a:cs typeface="Times New Roman" panose="02020603050405020304" pitchFamily="18" charset="0"/>
-              </a:rPr>
-              <a:t>ФЗ "О защите прав потребителей"</a:t>
-            </a:r>
-            <a:r>
-              <a:rPr lang="en-US" dirty="0" smtClean="0">
-                <a:latin typeface="Times New Roman" panose="02020603050405020304" pitchFamily="18" charset="0"/>
-                <a:cs typeface="Times New Roman" panose="02020603050405020304" pitchFamily="18" charset="0"/>
-              </a:rPr>
-              <a:t>;</a:t>
-            </a:r>
-          </a:p>
-          <a:p>
-            <a:pPr marL="514350" indent="-514350">
-              <a:buFont typeface="+mj-lt"/>
-              <a:buAutoNum type="arabicPeriod"/>
-            </a:pPr>
-            <a:r>
-              <a:rPr lang="ru-RU" dirty="0" smtClean="0">
-                <a:latin typeface="Times New Roman" panose="02020603050405020304" pitchFamily="18" charset="0"/>
-                <a:cs typeface="Times New Roman" panose="02020603050405020304" pitchFamily="18" charset="0"/>
-              </a:rPr>
-              <a:t>ФЗ "О государственной регистрации недвижимости"</a:t>
-            </a:r>
-            <a:r>
-              <a:rPr lang="en-US" dirty="0" smtClean="0">
-                <a:latin typeface="Times New Roman" panose="02020603050405020304" pitchFamily="18" charset="0"/>
-                <a:cs typeface="Times New Roman" panose="02020603050405020304" pitchFamily="18" charset="0"/>
-              </a:rPr>
-              <a:t>;</a:t>
-            </a:r>
-          </a:p>
-          <a:p>
-            <a:pPr marL="514350" indent="-514350">
-              <a:buFont typeface="+mj-lt"/>
-              <a:buAutoNum type="arabicPeriod"/>
-            </a:pPr>
-            <a:r>
-              <a:rPr lang="ru-RU" dirty="0" smtClean="0">
-                <a:latin typeface="Times New Roman" panose="02020603050405020304" pitchFamily="18" charset="0"/>
-                <a:cs typeface="Times New Roman" panose="02020603050405020304" pitchFamily="18" charset="0"/>
-              </a:rPr>
-              <a:t>ФЗ о потребительском кредите (займе).</a:t>
-            </a:r>
-            <a:endParaRPr lang="en-US" dirty="0" smtClean="0">
-              <a:latin typeface="Times New Roman" panose="02020603050405020304" pitchFamily="18" charset="0"/>
-              <a:cs typeface="Times New Roman" panose="02020603050405020304" pitchFamily="18" charset="0"/>
-            </a:endParaRPr>
-          </a:p>
-          <a:p>
-            <a:pPr marL="0" indent="0">
-              <a:buNone/>
-            </a:pPr>
-            <a:endParaRPr lang="ru-RU" dirty="0" smtClean="0">
-              <a:latin typeface="Times New Roman" panose="02020603050405020304" pitchFamily="18" charset="0"/>
-              <a:cs typeface="Times New Roman" panose="02020603050405020304" pitchFamily="18" charset="0"/>
-            </a:endParaRPr>
-          </a:p>
-        </p:txBody>
-      </p:sp>
-    </p:spTree>
-    <p:extLst>
-      <p:ext uri="{BB962C8B-B14F-4D97-AF65-F5344CB8AC3E}">
-        <p14:creationId xmlns:p14="http://schemas.microsoft.com/office/powerpoint/2010/main" val="2038529407"/>
-      </p:ext>
-    </p:extLst>
-  </p:cSld>
-  <p:clrMapOvr>
-    <a:masterClrMapping/>
-  </p:clrMapOvr>
-  <p:timing>
-    <p:tnLst>
-      <p:par>
-        <p:cTn id="1" dur="indefinite" restart="never" nodeType="tmRoot"/>
-      </p:par>
-    </p:tnLst>
-  </p:timing>
-</p:sld>
-</file>
-
-<file path=ppt/slides/slide6.xml><?xml version="1.0" encoding="utf-8"?>
 <p:sld xmlns:a="http://schemas.openxmlformats.org/drawingml/2006/main" xmlns:r="http://schemas.openxmlformats.org/officeDocument/2006/relationships" xmlns:p="http://schemas.openxmlformats.org/presentationml/2006/main">
   <p:cSld>
     <p:spTree>
@@ -6931,10 +7647,148 @@
           </a:prstGeom>
         </p:spPr>
       </p:pic>
+      <p:sp>
+        <p:nvSpPr>
+          <p:cNvPr id="6" name="Номер слайда 5"/>
+          <p:cNvSpPr>
+            <a:spLocks noGrp="1"/>
+          </p:cNvSpPr>
+          <p:nvPr>
+            <p:ph type="sldNum" sz="quarter" idx="12"/>
+          </p:nvPr>
+        </p:nvSpPr>
+        <p:spPr/>
+        <p:txBody>
+          <a:bodyPr/>
+          <a:lstStyle/>
+          <a:p>
+            <a:fld id="{65A3789A-D406-449F-860F-117B58A45219}" type="slidenum">
+              <a:rPr lang="ru-RU" smtClean="0"/>
+              <a:t>5</a:t>
+            </a:fld>
+            <a:endParaRPr lang="ru-RU"/>
+          </a:p>
+        </p:txBody>
+      </p:sp>
     </p:spTree>
     <p:extLst>
       <p:ext uri="{BB962C8B-B14F-4D97-AF65-F5344CB8AC3E}">
         <p14:creationId xmlns:p14="http://schemas.microsoft.com/office/powerpoint/2010/main" val="1350862777"/>
+      </p:ext>
+    </p:extLst>
+  </p:cSld>
+  <p:clrMapOvr>
+    <a:masterClrMapping/>
+  </p:clrMapOvr>
+  <p:timing>
+    <p:tnLst>
+      <p:par>
+        <p:cTn id="1" dur="indefinite" restart="never" nodeType="tmRoot"/>
+      </p:par>
+    </p:tnLst>
+  </p:timing>
+</p:sld>
+</file>
+
+<file path=ppt/slides/slide6.xml><?xml version="1.0" encoding="utf-8"?>
+<p:sld xmlns:a="http://schemas.openxmlformats.org/drawingml/2006/main" xmlns:r="http://schemas.openxmlformats.org/officeDocument/2006/relationships" xmlns:p="http://schemas.openxmlformats.org/presentationml/2006/main">
+  <p:cSld>
+    <p:spTree>
+      <p:nvGrpSpPr>
+        <p:cNvPr id="1" name=""/>
+        <p:cNvGrpSpPr/>
+        <p:nvPr/>
+      </p:nvGrpSpPr>
+      <p:grpSpPr>
+        <a:xfrm>
+          <a:off x="0" y="0"/>
+          <a:ext cx="0" cy="0"/>
+          <a:chOff x="0" y="0"/>
+          <a:chExt cx="0" cy="0"/>
+        </a:xfrm>
+      </p:grpSpPr>
+      <p:sp>
+        <p:nvSpPr>
+          <p:cNvPr id="2" name="Заголовок 1"/>
+          <p:cNvSpPr>
+            <a:spLocks noGrp="1"/>
+          </p:cNvSpPr>
+          <p:nvPr>
+            <p:ph type="title"/>
+          </p:nvPr>
+        </p:nvSpPr>
+        <p:spPr/>
+        <p:txBody>
+          <a:bodyPr/>
+          <a:lstStyle/>
+          <a:p>
+            <a:r>
+              <a:rPr lang="ru-RU" dirty="0" smtClean="0">
+                <a:latin typeface="Times New Roman" panose="02020603050405020304" pitchFamily="18" charset="0"/>
+                <a:cs typeface="Times New Roman" panose="02020603050405020304" pitchFamily="18" charset="0"/>
+              </a:rPr>
+              <a:t>Архитектура решения</a:t>
+            </a:r>
+            <a:endParaRPr lang="ru-RU" dirty="0">
+              <a:latin typeface="Times New Roman" panose="02020603050405020304" pitchFamily="18" charset="0"/>
+              <a:cs typeface="Times New Roman" panose="02020603050405020304" pitchFamily="18" charset="0"/>
+            </a:endParaRPr>
+          </a:p>
+        </p:txBody>
+      </p:sp>
+      <p:pic>
+        <p:nvPicPr>
+          <p:cNvPr id="4" name="Объект 3"/>
+          <p:cNvPicPr>
+            <a:picLocks noGrp="1" noChangeAspect="1"/>
+          </p:cNvPicPr>
+          <p:nvPr>
+            <p:ph idx="1"/>
+          </p:nvPr>
+        </p:nvPicPr>
+        <p:blipFill>
+          <a:blip r:embed="rId3"/>
+          <a:stretch>
+            <a:fillRect/>
+          </a:stretch>
+        </p:blipFill>
+        <p:spPr>
+          <a:xfrm>
+            <a:off x="3027579" y="1856105"/>
+            <a:ext cx="6136841" cy="4351338"/>
+          </a:xfrm>
+          <a:prstGeom prst="rect">
+            <a:avLst/>
+          </a:prstGeom>
+        </p:spPr>
+      </p:pic>
+      <p:sp>
+        <p:nvSpPr>
+          <p:cNvPr id="3" name="Номер слайда 2"/>
+          <p:cNvSpPr>
+            <a:spLocks noGrp="1"/>
+          </p:cNvSpPr>
+          <p:nvPr>
+            <p:ph type="sldNum" sz="quarter" idx="12"/>
+          </p:nvPr>
+        </p:nvSpPr>
+        <p:spPr/>
+        <p:txBody>
+          <a:bodyPr/>
+          <a:lstStyle/>
+          <a:p>
+            <a:fld id="{65A3789A-D406-449F-860F-117B58A45219}" type="slidenum">
+              <a:rPr lang="ru-RU" smtClean="0"/>
+              <a:t>6</a:t>
+            </a:fld>
+            <a:endParaRPr lang="ru-RU"/>
+          </a:p>
+        </p:txBody>
+      </p:sp>
+    </p:spTree>
+    <p:extLst>
+      <p:ext uri="{BB962C8B-B14F-4D97-AF65-F5344CB8AC3E}">
+        <p14:creationId xmlns:p14="http://schemas.microsoft.com/office/powerpoint/2010/main" val="3921630975"/>
       </p:ext>
     </p:extLst>
   </p:cSld>
@@ -6988,7 +7842,7 @@
                 <a:latin typeface="Times New Roman" panose="02020603050405020304" pitchFamily="18" charset="0"/>
                 <a:cs typeface="Times New Roman" panose="02020603050405020304" pitchFamily="18" charset="0"/>
               </a:rPr>
-              <a:t>Архитектура решения</a:t>
+              <a:t>Граф состояний агента</a:t>
             </a:r>
             <a:endParaRPr lang="ru-RU" dirty="0">
               <a:latin typeface="Times New Roman" panose="02020603050405020304" pitchFamily="18" charset="0"/>
@@ -7015,18 +7869,41 @@
         </p:blipFill>
         <p:spPr>
           <a:xfrm>
-            <a:off x="3027579" y="1856105"/>
-            <a:ext cx="6136841" cy="4351338"/>
+            <a:off x="1031000" y="1370000"/>
+            <a:ext cx="10130000" cy="5470000"/>
           </a:xfrm>
           <a:prstGeom prst="rect">
             <a:avLst/>
           </a:prstGeom>
         </p:spPr>
       </p:pic>
+      <p:sp>
+        <p:nvSpPr>
+          <p:cNvPr id="3" name="Номер слайда 2"/>
+          <p:cNvSpPr>
+            <a:spLocks noGrp="1"/>
+          </p:cNvSpPr>
+          <p:nvPr>
+            <p:ph type="sldNum" sz="quarter" idx="12"/>
+          </p:nvPr>
+        </p:nvSpPr>
+        <p:spPr/>
+        <p:txBody>
+          <a:bodyPr/>
+          <a:lstStyle/>
+          <a:p>
+            <a:fld id="{65A3789A-D406-449F-860F-117B58A45219}" type="slidenum">
+              <a:rPr lang="ru-RU" smtClean="0"/>
+              <a:t>7</a:t>
+            </a:fld>
+            <a:endParaRPr lang="ru-RU"/>
+          </a:p>
+        </p:txBody>
+      </p:sp>
     </p:spTree>
     <p:extLst>
       <p:ext uri="{BB962C8B-B14F-4D97-AF65-F5344CB8AC3E}">
-        <p14:creationId xmlns:p14="http://schemas.microsoft.com/office/powerpoint/2010/main" val="3921630975"/>
+        <p14:creationId xmlns:p14="http://schemas.microsoft.com/office/powerpoint/2010/main" val="3921630976"/>
       </p:ext>
     </p:extLst>
   </p:cSld>
@@ -7076,65 +7953,381 @@
           <a:lstStyle/>
           <a:p>
             <a:r>
-              <a:rPr lang="ru-RU" dirty="0" smtClean="0">
-                <a:latin typeface="Times New Roman" panose="02020603050405020304" pitchFamily="18" charset="0"/>
-                <a:cs typeface="Times New Roman" panose="02020603050405020304" pitchFamily="18" charset="0"/>
-              </a:rPr>
-              <a:t>Демонстрация </a:t>
-            </a:r>
-            <a:r>
-              <a:rPr lang="en-US" dirty="0" smtClean="0">
-                <a:latin typeface="Times New Roman" panose="02020603050405020304" pitchFamily="18" charset="0"/>
-                <a:cs typeface="Times New Roman" panose="02020603050405020304" pitchFamily="18" charset="0"/>
-              </a:rPr>
-              <a:t>UI</a:t>
-            </a:r>
-            <a:endParaRPr lang="ru-RU" dirty="0">
+              <a:rPr lang="ru-RU" dirty="0">
+                <a:latin typeface="Times New Roman" panose="02020603050405020304" pitchFamily="18" charset="0"/>
+                <a:cs typeface="Times New Roman" panose="02020603050405020304" pitchFamily="18" charset="0"/>
+              </a:rPr>
+              <a:t>Подсистема RAG: двухступенчатый поиск</a:t>
+            </a:r>
+          </a:p>
+        </p:txBody>
+      </p:sp>
+      <p:sp>
+        <p:nvSpPr>
+          <p:cNvPr id="20" name="Block1"/>
+          <p:cNvSpPr/>
+          <p:nvPr/>
+        </p:nvSpPr>
+        <p:spPr>
+          <a:xfrm>
+            <a:off x="400000" y="1800000"/>
+            <a:ext cx="2400000" cy="1500000"/>
+          </a:xfrm>
+          <a:prstGeom prst="roundRect">
+            <a:avLst/>
+          </a:prstGeom>
+          <a:solidFill>
+            <a:srgbClr val="DEEBF7"/>
+          </a:solidFill>
+          <a:ln w="12700">
+            <a:solidFill>
+              <a:srgbClr val="2E75B6"/>
+            </a:solidFill>
+          </a:ln>
+        </p:spPr>
+        <p:txBody>
+          <a:bodyPr wrap="square" rtlCol="0" anchor="ctr"/>
+          <a:lstStyle/>
+          <a:p>
+            <a:pPr algn="ctr"/>
+            <a:r>
+              <a:rPr lang="ru-RU" sz="2000" b="1" dirty="0">
+                <a:latin typeface="Times New Roman" panose="02020603050405020304" pitchFamily="18" charset="0"/>
+                <a:cs typeface="Times New Roman" panose="02020603050405020304" pitchFamily="18" charset="0"/>
+              </a:rPr>
+              <a:t>1. </a:t>
+            </a:r>
+            <a:r>
+              <a:rPr lang="ru-RU" sz="2000" b="1" dirty="0" err="1" smtClean="0">
+                <a:latin typeface="Times New Roman" panose="02020603050405020304" pitchFamily="18" charset="0"/>
+                <a:cs typeface="Times New Roman" panose="02020603050405020304" pitchFamily="18" charset="0"/>
+              </a:rPr>
+              <a:t>Эмбеддер</a:t>
+            </a:r>
+            <a:endParaRPr lang="ru-RU" sz="2000" b="1" dirty="0">
               <a:latin typeface="Times New Roman" panose="02020603050405020304" pitchFamily="18" charset="0"/>
               <a:cs typeface="Times New Roman" panose="02020603050405020304" pitchFamily="18" charset="0"/>
             </a:endParaRPr>
           </a:p>
-        </p:txBody>
-      </p:sp>
-      <p:pic>
-        <p:nvPicPr>
-          <p:cNvPr id="4" name="Объект 3"/>
-          <p:cNvPicPr>
-            <a:picLocks noGrp="1" noChangeAspect="1"/>
-          </p:cNvPicPr>
-          <p:nvPr>
-            <p:ph idx="1"/>
-          </p:nvPr>
-        </p:nvPicPr>
-        <p:blipFill>
-          <a:blip r:embed="rId2" cstate="print">
-            <a:extLst>
-              <a:ext uri="{28A0092B-C50C-407E-A947-70E740481C1C}">
-                <a14:useLocalDpi xmlns:a14="http://schemas.microsoft.com/office/drawing/2010/main" val="0"/>
-              </a:ext>
-            </a:extLst>
-          </a:blip>
-          <a:stretch>
-            <a:fillRect/>
-          </a:stretch>
-        </p:blipFill>
+          <a:p>
+            <a:pPr algn="ctr"/>
+            <a:r>
+              <a:rPr lang="ru-RU" sz="1600" dirty="0">
+                <a:latin typeface="Times New Roman" panose="02020603050405020304" pitchFamily="18" charset="0"/>
+                <a:cs typeface="Times New Roman" panose="02020603050405020304" pitchFamily="18" charset="0"/>
+              </a:rPr>
+              <a:t>Giga-Embeddings</a:t>
+            </a:r>
+          </a:p>
+          <a:p>
+            <a:pPr algn="ctr"/>
+            <a:r>
+              <a:rPr lang="en-US" sz="1600" dirty="0">
+                <a:latin typeface="Times New Roman" panose="02020603050405020304" pitchFamily="18" charset="0"/>
+                <a:cs typeface="Times New Roman" panose="02020603050405020304" pitchFamily="18" charset="0"/>
+              </a:rPr>
+              <a:t>top-80</a:t>
+            </a:r>
+            <a:r>
+              <a:rPr lang="ru-RU" sz="1600" dirty="0" smtClean="0">
+                <a:latin typeface="Times New Roman" panose="02020603050405020304" pitchFamily="18" charset="0"/>
+                <a:cs typeface="Times New Roman" panose="02020603050405020304" pitchFamily="18" charset="0"/>
+              </a:rPr>
+              <a:t> </a:t>
+            </a:r>
+            <a:r>
+              <a:rPr lang="ru-RU" sz="1600" dirty="0">
+                <a:latin typeface="Times New Roman" panose="02020603050405020304" pitchFamily="18" charset="0"/>
+                <a:cs typeface="Times New Roman" panose="02020603050405020304" pitchFamily="18" charset="0"/>
+              </a:rPr>
+              <a:t>кандидатов</a:t>
+            </a:r>
+          </a:p>
+        </p:txBody>
+      </p:sp>
+      <p:sp>
+        <p:nvSpPr>
+          <p:cNvPr id="21" name="Arrow1"/>
+          <p:cNvSpPr/>
+          <p:nvPr/>
+        </p:nvSpPr>
         <p:spPr>
           <a:xfrm>
-            <a:off x="2073348" y="1690688"/>
-            <a:ext cx="8045303" cy="4351338"/>
+            <a:off x="2850000" y="2400000"/>
+            <a:ext cx="600000" cy="300000"/>
           </a:xfrm>
+          <a:prstGeom prst="rightArrow">
+            <a:avLst/>
+          </a:prstGeom>
+          <a:solidFill>
+            <a:srgbClr val="808080"/>
+          </a:solidFill>
+          <a:ln>
+            <a:noFill/>
+          </a:ln>
         </p:spPr>
-      </p:pic>
-      <p:sp>
-        <p:nvSpPr>
-          <p:cNvPr id="5" name="TextBox 4"/>
+        <p:txBody>
+          <a:bodyPr/>
+          <a:lstStyle/>
+          <a:p>
+            <a:endParaRPr/>
+          </a:p>
+        </p:txBody>
+      </p:sp>
+      <p:sp>
+        <p:nvSpPr>
+          <p:cNvPr id="22" name="Block2"/>
+          <p:cNvSpPr/>
+          <p:nvPr/>
+        </p:nvSpPr>
+        <p:spPr>
+          <a:xfrm>
+            <a:off x="3500000" y="1800000"/>
+            <a:ext cx="2400000" cy="1500000"/>
+          </a:xfrm>
+          <a:prstGeom prst="roundRect">
+            <a:avLst/>
+          </a:prstGeom>
+          <a:solidFill>
+            <a:srgbClr val="FFF2CC"/>
+          </a:solidFill>
+          <a:ln w="12700">
+            <a:solidFill>
+              <a:srgbClr val="BF8F00"/>
+            </a:solidFill>
+          </a:ln>
+        </p:spPr>
+        <p:txBody>
+          <a:bodyPr wrap="square" rtlCol="0" anchor="ctr"/>
+          <a:lstStyle/>
+          <a:p>
+            <a:pPr algn="ctr"/>
+            <a:r>
+              <a:rPr lang="ru-RU" sz="2000" b="1" dirty="0">
+                <a:latin typeface="Times New Roman" panose="02020603050405020304" pitchFamily="18" charset="0"/>
+                <a:cs typeface="Times New Roman" panose="02020603050405020304" pitchFamily="18" charset="0"/>
+              </a:rPr>
+              <a:t>2. Реранкер</a:t>
+            </a:r>
+          </a:p>
+          <a:p>
+            <a:pPr algn="ctr"/>
+            <a:r>
+              <a:rPr lang="ru-RU" sz="1600" dirty="0">
+                <a:latin typeface="Times New Roman" panose="02020603050405020304" pitchFamily="18" charset="0"/>
+                <a:cs typeface="Times New Roman" panose="02020603050405020304" pitchFamily="18" charset="0"/>
+              </a:rPr>
+              <a:t>Qwen3-Reranker-0.6B</a:t>
+            </a:r>
+          </a:p>
+          <a:p>
+            <a:pPr algn="ctr"/>
+            <a:r>
+              <a:rPr lang="en-US" sz="1600" dirty="0" err="1" smtClean="0">
+                <a:latin typeface="Times New Roman" panose="02020603050405020304" pitchFamily="18" charset="0"/>
+                <a:cs typeface="Times New Roman" panose="02020603050405020304" pitchFamily="18" charset="0"/>
+              </a:rPr>
+              <a:t>reranking</a:t>
+            </a:r>
+            <a:r>
+              <a:rPr lang="ru-RU" sz="1600" dirty="0" smtClean="0">
+                <a:latin typeface="Times New Roman" panose="02020603050405020304" pitchFamily="18" charset="0"/>
+                <a:cs typeface="Times New Roman" panose="02020603050405020304" pitchFamily="18" charset="0"/>
+              </a:rPr>
+              <a:t> top-30</a:t>
+            </a:r>
+            <a:endParaRPr lang="ru-RU" sz="1600" dirty="0">
+              <a:latin typeface="Times New Roman" panose="02020603050405020304" pitchFamily="18" charset="0"/>
+              <a:cs typeface="Times New Roman" panose="02020603050405020304" pitchFamily="18" charset="0"/>
+            </a:endParaRPr>
+          </a:p>
+        </p:txBody>
+      </p:sp>
+      <p:sp>
+        <p:nvSpPr>
+          <p:cNvPr id="23" name="Arrow2"/>
+          <p:cNvSpPr/>
+          <p:nvPr/>
+        </p:nvSpPr>
+        <p:spPr>
+          <a:xfrm>
+            <a:off x="5950000" y="2400000"/>
+            <a:ext cx="600000" cy="300000"/>
+          </a:xfrm>
+          <a:prstGeom prst="rightArrow">
+            <a:avLst/>
+          </a:prstGeom>
+          <a:solidFill>
+            <a:srgbClr val="808080"/>
+          </a:solidFill>
+          <a:ln>
+            <a:noFill/>
+          </a:ln>
+        </p:spPr>
+        <p:txBody>
+          <a:bodyPr/>
+          <a:lstStyle/>
+          <a:p>
+            <a:endParaRPr/>
+          </a:p>
+        </p:txBody>
+      </p:sp>
+      <p:sp>
+        <p:nvSpPr>
+          <p:cNvPr id="24" name="Block3"/>
+          <p:cNvSpPr/>
+          <p:nvPr/>
+        </p:nvSpPr>
+        <p:spPr>
+          <a:xfrm>
+            <a:off x="6600000" y="1800000"/>
+            <a:ext cx="2400000" cy="1500000"/>
+          </a:xfrm>
+          <a:prstGeom prst="roundRect">
+            <a:avLst/>
+          </a:prstGeom>
+          <a:solidFill>
+            <a:srgbClr val="E2EFDA"/>
+          </a:solidFill>
+          <a:ln w="12700">
+            <a:solidFill>
+              <a:srgbClr val="548235"/>
+            </a:solidFill>
+          </a:ln>
+        </p:spPr>
+        <p:txBody>
+          <a:bodyPr wrap="square" rtlCol="0" anchor="ctr"/>
+          <a:lstStyle/>
+          <a:p>
+            <a:pPr algn="ctr"/>
+            <a:r>
+              <a:rPr lang="ru-RU" sz="2000" b="1" dirty="0">
+                <a:latin typeface="Times New Roman" panose="02020603050405020304" pitchFamily="18" charset="0"/>
+                <a:cs typeface="Times New Roman" panose="02020603050405020304" pitchFamily="18" charset="0"/>
+              </a:rPr>
+              <a:t>3. LLM-фильтр</a:t>
+            </a:r>
+          </a:p>
+          <a:p>
+            <a:pPr algn="ctr"/>
+            <a:r>
+              <a:rPr lang="ru-RU" sz="1600" dirty="0">
+                <a:latin typeface="Times New Roman" panose="02020603050405020304" pitchFamily="18" charset="0"/>
+                <a:cs typeface="Times New Roman" panose="02020603050405020304" pitchFamily="18" charset="0"/>
+              </a:rPr>
+              <a:t>отсев </a:t>
+            </a:r>
+            <a:r>
+              <a:rPr lang="ru-RU" sz="1600" dirty="0" smtClean="0">
+                <a:latin typeface="Times New Roman" panose="02020603050405020304" pitchFamily="18" charset="0"/>
+                <a:cs typeface="Times New Roman" panose="02020603050405020304" pitchFamily="18" charset="0"/>
+              </a:rPr>
+              <a:t>нерелевантных выбросов</a:t>
+            </a:r>
+            <a:endParaRPr lang="ru-RU" sz="1600" dirty="0">
+              <a:latin typeface="Times New Roman" panose="02020603050405020304" pitchFamily="18" charset="0"/>
+              <a:cs typeface="Times New Roman" panose="02020603050405020304" pitchFamily="18" charset="0"/>
+            </a:endParaRPr>
+          </a:p>
+        </p:txBody>
+      </p:sp>
+      <p:sp>
+        <p:nvSpPr>
+          <p:cNvPr id="25" name="Arrow3"/>
+          <p:cNvSpPr/>
+          <p:nvPr/>
+        </p:nvSpPr>
+        <p:spPr>
+          <a:xfrm>
+            <a:off x="9050000" y="2400000"/>
+            <a:ext cx="600000" cy="300000"/>
+          </a:xfrm>
+          <a:prstGeom prst="rightArrow">
+            <a:avLst/>
+          </a:prstGeom>
+          <a:solidFill>
+            <a:srgbClr val="808080"/>
+          </a:solidFill>
+          <a:ln>
+            <a:noFill/>
+          </a:ln>
+        </p:spPr>
+        <p:txBody>
+          <a:bodyPr/>
+          <a:lstStyle/>
+          <a:p>
+            <a:endParaRPr/>
+          </a:p>
+        </p:txBody>
+      </p:sp>
+      <p:sp>
+        <p:nvSpPr>
+          <p:cNvPr id="26" name="Block4"/>
+          <p:cNvSpPr/>
+          <p:nvPr/>
+        </p:nvSpPr>
+        <p:spPr>
+          <a:xfrm>
+            <a:off x="9700000" y="1800000"/>
+            <a:ext cx="2200000" cy="1500000"/>
+          </a:xfrm>
+          <a:prstGeom prst="roundRect">
+            <a:avLst/>
+          </a:prstGeom>
+          <a:solidFill>
+            <a:srgbClr val="FCE4D6"/>
+          </a:solidFill>
+          <a:ln w="12700">
+            <a:solidFill>
+              <a:srgbClr val="C55A11"/>
+            </a:solidFill>
+          </a:ln>
+        </p:spPr>
+        <p:txBody>
+          <a:bodyPr wrap="square" rtlCol="0" anchor="ctr"/>
+          <a:lstStyle/>
+          <a:p>
+            <a:pPr algn="ctr"/>
+            <a:r>
+              <a:rPr lang="ru-RU" sz="2000" b="1" dirty="0">
+                <a:latin typeface="Times New Roman" panose="02020603050405020304" pitchFamily="18" charset="0"/>
+                <a:cs typeface="Times New Roman" panose="02020603050405020304" pitchFamily="18" charset="0"/>
+              </a:rPr>
+              <a:t>Итоговая выдача</a:t>
+            </a:r>
+          </a:p>
+          <a:p>
+            <a:pPr algn="ctr"/>
+            <a:r>
+              <a:rPr lang="ru-RU" sz="1600" dirty="0">
+                <a:latin typeface="Times New Roman" panose="02020603050405020304" pitchFamily="18" charset="0"/>
+                <a:cs typeface="Times New Roman" panose="02020603050405020304" pitchFamily="18" charset="0"/>
+              </a:rPr>
+              <a:t>релевантные нормы</a:t>
+            </a:r>
+          </a:p>
+          <a:p>
+            <a:pPr algn="ctr"/>
+            <a:r>
+              <a:rPr lang="ru-RU" sz="1600" dirty="0">
+                <a:latin typeface="Times New Roman" panose="02020603050405020304" pitchFamily="18" charset="0"/>
+                <a:cs typeface="Times New Roman" panose="02020603050405020304" pitchFamily="18" charset="0"/>
+              </a:rPr>
+              <a:t>для генерации</a:t>
+            </a:r>
+          </a:p>
+        </p:txBody>
+      </p:sp>
+      <p:sp>
+        <p:nvSpPr>
+          <p:cNvPr id="30" name="ParamsBox"/>
           <p:cNvSpPr txBox="1"/>
           <p:nvPr/>
         </p:nvSpPr>
         <p:spPr>
           <a:xfrm>
-            <a:off x="2073348" y="6042026"/>
-            <a:ext cx="7985051" cy="646331"/>
+            <a:off x="500000" y="3700000"/>
+            <a:ext cx="11200000" cy="2800000"/>
           </a:xfrm>
           <a:prstGeom prst="rect">
             <a:avLst/>
@@ -7143,43 +8336,209 @@
         </p:spPr>
         <p:txBody>
           <a:bodyPr wrap="square" rtlCol="0">
-            <a:spAutoFit/>
+            <a:normAutofit/>
           </a:bodyPr>
           <a:lstStyle/>
           <a:p>
-            <a:pPr algn="ctr"/>
-            <a:r>
-              <a:rPr lang="ru-RU" dirty="0" smtClean="0">
-                <a:latin typeface="Times New Roman" panose="02020603050405020304" pitchFamily="18" charset="0"/>
-                <a:cs typeface="Times New Roman" panose="02020603050405020304" pitchFamily="18" charset="0"/>
-              </a:rPr>
-              <a:t>Окно чата с диалогом: запрос</a:t>
-            </a:r>
-            <a:r>
-              <a:rPr lang="en-US" dirty="0" smtClean="0">
-                <a:latin typeface="Times New Roman" panose="02020603050405020304" pitchFamily="18" charset="0"/>
-                <a:cs typeface="Times New Roman" panose="02020603050405020304" pitchFamily="18" charset="0"/>
-              </a:rPr>
-              <a:t> </a:t>
-            </a:r>
-            <a:r>
-              <a:rPr lang="ru-RU" dirty="0" smtClean="0">
-                <a:latin typeface="Times New Roman" panose="02020603050405020304" pitchFamily="18" charset="0"/>
-                <a:cs typeface="Times New Roman" panose="02020603050405020304" pitchFamily="18" charset="0"/>
-              </a:rPr>
-              <a:t>пользователя, уточняющий вопрос агента и ответ пользователя</a:t>
-            </a:r>
-            <a:endParaRPr lang="ru-RU" dirty="0">
+            <a:pPr marL="0" indent="0">
+              <a:buNone/>
+            </a:pPr>
+            <a:r>
+              <a:rPr lang="ru-RU" sz="2400" b="1" dirty="0">
+                <a:latin typeface="Times New Roman" panose="02020603050405020304" pitchFamily="18" charset="0"/>
+                <a:cs typeface="Times New Roman" panose="02020603050405020304" pitchFamily="18" charset="0"/>
+              </a:rPr>
+              <a:t>Параметры </a:t>
+            </a:r>
+            <a:r>
+              <a:rPr lang="ru-RU" sz="2400" b="1" dirty="0" smtClean="0">
+                <a:latin typeface="Times New Roman" panose="02020603050405020304" pitchFamily="18" charset="0"/>
+                <a:cs typeface="Times New Roman" panose="02020603050405020304" pitchFamily="18" charset="0"/>
+              </a:rPr>
+              <a:t>подсистемы</a:t>
+            </a:r>
+            <a:endParaRPr lang="ru-RU" sz="2400" b="1" dirty="0">
               <a:latin typeface="Times New Roman" panose="02020603050405020304" pitchFamily="18" charset="0"/>
               <a:cs typeface="Times New Roman" panose="02020603050405020304" pitchFamily="18" charset="0"/>
             </a:endParaRPr>
           </a:p>
+          <a:p>
+            <a:pPr marL="457200" indent="-457200">
+              <a:buFont typeface="+mj-lt"/>
+              <a:buAutoNum type="arabicPeriod"/>
+            </a:pPr>
+            <a:r>
+              <a:rPr lang="ru-RU" sz="2000" dirty="0" smtClean="0">
+                <a:latin typeface="Times New Roman" panose="02020603050405020304" pitchFamily="18" charset="0"/>
+                <a:cs typeface="Times New Roman" panose="02020603050405020304" pitchFamily="18" charset="0"/>
+              </a:rPr>
+              <a:t>Размерность </a:t>
+            </a:r>
+            <a:r>
+              <a:rPr lang="ru-RU" sz="2000" dirty="0">
+                <a:latin typeface="Times New Roman" panose="02020603050405020304" pitchFamily="18" charset="0"/>
+                <a:cs typeface="Times New Roman" panose="02020603050405020304" pitchFamily="18" charset="0"/>
+              </a:rPr>
+              <a:t>векторов эмбеддера — 2048; режим инференса bfloat16; мера близости — косинусная</a:t>
+            </a:r>
+          </a:p>
+          <a:p>
+            <a:pPr marL="457200" indent="-457200">
+              <a:buFont typeface="+mj-lt"/>
+              <a:buAutoNum type="arabicPeriod"/>
+            </a:pPr>
+            <a:r>
+              <a:rPr lang="ru-RU" sz="2000" dirty="0" smtClean="0">
+                <a:latin typeface="Times New Roman" panose="02020603050405020304" pitchFamily="18" charset="0"/>
+                <a:cs typeface="Times New Roman" panose="02020603050405020304" pitchFamily="18" charset="0"/>
+              </a:rPr>
+              <a:t>Корпус </a:t>
+            </a:r>
+            <a:r>
+              <a:rPr lang="ru-RU" sz="2000" dirty="0">
+                <a:latin typeface="Times New Roman" panose="02020603050405020304" pitchFamily="18" charset="0"/>
+                <a:cs typeface="Times New Roman" panose="02020603050405020304" pitchFamily="18" charset="0"/>
+              </a:rPr>
+              <a:t>разделён на </a:t>
+            </a:r>
+            <a:r>
+              <a:rPr lang="ru-RU" sz="2000" dirty="0" smtClean="0">
+                <a:latin typeface="Times New Roman" panose="02020603050405020304" pitchFamily="18" charset="0"/>
+                <a:cs typeface="Times New Roman" panose="02020603050405020304" pitchFamily="18" charset="0"/>
+              </a:rPr>
+              <a:t>3 </a:t>
+            </a:r>
+            <a:r>
+              <a:rPr lang="ru-RU" sz="2000" dirty="0">
+                <a:latin typeface="Times New Roman" panose="02020603050405020304" pitchFamily="18" charset="0"/>
+                <a:cs typeface="Times New Roman" panose="02020603050405020304" pitchFamily="18" charset="0"/>
+              </a:rPr>
+              <a:t>коллекции Qdrant: </a:t>
+            </a:r>
+            <a:r>
+              <a:rPr lang="en-US" sz="2000" dirty="0" smtClean="0">
+                <a:latin typeface="Times New Roman" panose="02020603050405020304" pitchFamily="18" charset="0"/>
+                <a:cs typeface="Times New Roman" panose="02020603050405020304" pitchFamily="18" charset="0"/>
+              </a:rPr>
+              <a:t>general, primal, secondary;</a:t>
+            </a:r>
+            <a:endParaRPr lang="ru-RU" sz="2000" dirty="0">
+              <a:latin typeface="Times New Roman" panose="02020603050405020304" pitchFamily="18" charset="0"/>
+              <a:cs typeface="Times New Roman" panose="02020603050405020304" pitchFamily="18" charset="0"/>
+            </a:endParaRPr>
+          </a:p>
+          <a:p>
+            <a:pPr marL="457200" indent="-457200">
+              <a:buFont typeface="+mj-lt"/>
+              <a:buAutoNum type="arabicPeriod"/>
+            </a:pPr>
+            <a:r>
+              <a:rPr lang="ru-RU" sz="2000" dirty="0" smtClean="0">
+                <a:latin typeface="Times New Roman" panose="02020603050405020304" pitchFamily="18" charset="0"/>
+                <a:cs typeface="Times New Roman" panose="02020603050405020304" pitchFamily="18" charset="0"/>
+              </a:rPr>
+              <a:t>Запрос формулируется </a:t>
+            </a:r>
+            <a:r>
+              <a:rPr lang="ru-RU" sz="2000" dirty="0">
+                <a:latin typeface="Times New Roman" panose="02020603050405020304" pitchFamily="18" charset="0"/>
+                <a:cs typeface="Times New Roman" panose="02020603050405020304" pitchFamily="18" charset="0"/>
+              </a:rPr>
+              <a:t>LLM, для эмбеддера обёртывается в инструкцию-промпт (instruction-tuned режим </a:t>
+            </a:r>
+            <a:r>
+              <a:rPr lang="ru-RU" sz="2000" dirty="0" err="1">
+                <a:latin typeface="Times New Roman" panose="02020603050405020304" pitchFamily="18" charset="0"/>
+                <a:cs typeface="Times New Roman" panose="02020603050405020304" pitchFamily="18" charset="0"/>
+              </a:rPr>
+              <a:t>Giga-Embeddings</a:t>
+            </a:r>
+            <a:r>
+              <a:rPr lang="ru-RU" sz="2000" dirty="0" smtClean="0">
+                <a:latin typeface="Times New Roman" panose="02020603050405020304" pitchFamily="18" charset="0"/>
+                <a:cs typeface="Times New Roman" panose="02020603050405020304" pitchFamily="18" charset="0"/>
+              </a:rPr>
+              <a:t>)</a:t>
+            </a:r>
+            <a:r>
+              <a:rPr lang="en-US" sz="2000" dirty="0" smtClean="0">
+                <a:latin typeface="Times New Roman" panose="02020603050405020304" pitchFamily="18" charset="0"/>
+                <a:cs typeface="Times New Roman" panose="02020603050405020304" pitchFamily="18" charset="0"/>
+              </a:rPr>
+              <a:t>;</a:t>
+            </a:r>
+            <a:endParaRPr lang="ru-RU" sz="2000" dirty="0">
+              <a:latin typeface="Times New Roman" panose="02020603050405020304" pitchFamily="18" charset="0"/>
+              <a:cs typeface="Times New Roman" panose="02020603050405020304" pitchFamily="18" charset="0"/>
+            </a:endParaRPr>
+          </a:p>
+          <a:p>
+            <a:pPr marL="457200" indent="-457200">
+              <a:buFont typeface="+mj-lt"/>
+              <a:buAutoNum type="arabicPeriod"/>
+            </a:pPr>
+            <a:r>
+              <a:rPr lang="ru-RU" sz="2000" dirty="0" err="1" smtClean="0">
+                <a:latin typeface="Times New Roman" panose="02020603050405020304" pitchFamily="18" charset="0"/>
+                <a:cs typeface="Times New Roman" panose="02020603050405020304" pitchFamily="18" charset="0"/>
+              </a:rPr>
+              <a:t>Гиперпараметры</a:t>
+            </a:r>
+            <a:r>
+              <a:rPr lang="ru-RU" sz="2000" dirty="0" smtClean="0">
+                <a:latin typeface="Times New Roman" panose="02020603050405020304" pitchFamily="18" charset="0"/>
+                <a:cs typeface="Times New Roman" panose="02020603050405020304" pitchFamily="18" charset="0"/>
+              </a:rPr>
+              <a:t> </a:t>
+            </a:r>
+            <a:r>
+              <a:rPr lang="ru-RU" sz="2000" dirty="0">
+                <a:latin typeface="Times New Roman" panose="02020603050405020304" pitchFamily="18" charset="0"/>
+                <a:cs typeface="Times New Roman" panose="02020603050405020304" pitchFamily="18" charset="0"/>
+              </a:rPr>
+              <a:t>подсистемы (наличие реранкера, наличие LLM-фильтра, глубина выдачи k) подобраны </a:t>
+            </a:r>
+            <a:r>
+              <a:rPr lang="ru-RU" sz="2000" dirty="0" smtClean="0">
+                <a:latin typeface="Times New Roman" panose="02020603050405020304" pitchFamily="18" charset="0"/>
+                <a:cs typeface="Times New Roman" panose="02020603050405020304" pitchFamily="18" charset="0"/>
+              </a:rPr>
+              <a:t>эмпирически</a:t>
+            </a:r>
+            <a:endParaRPr lang="ru-RU" sz="2000" dirty="0">
+              <a:latin typeface="Times New Roman" panose="02020603050405020304" pitchFamily="18" charset="0"/>
+              <a:cs typeface="Times New Roman" panose="02020603050405020304" pitchFamily="18" charset="0"/>
+            </a:endParaRPr>
+          </a:p>
+        </p:txBody>
+      </p:sp>
+      <p:sp>
+        <p:nvSpPr>
+          <p:cNvPr id="40" name="Номер слайда"/>
+          <p:cNvSpPr>
+            <a:spLocks noGrp="1"/>
+          </p:cNvSpPr>
+          <p:nvPr>
+            <p:ph type="sldNum" sz="quarter" idx="12"/>
+          </p:nvPr>
+        </p:nvSpPr>
+        <p:spPr/>
+        <p:txBody>
+          <a:bodyPr/>
+          <a:lstStyle/>
+          <a:p>
+            <a:fld id="{65A3789A-D406-449F-860F-117B58A45220}" type="slidenum">
+              <a:rPr lang="ru-RU" smtClean="0"/>
+              <a:t>8</a:t>
+            </a:fld>
+            <a:endParaRPr lang="ru-RU"/>
+          </a:p>
         </p:txBody>
       </p:sp>
     </p:spTree>
     <p:extLst>
       <p:ext uri="{BB962C8B-B14F-4D97-AF65-F5344CB8AC3E}">
-        <p14:creationId xmlns:p14="http://schemas.microsoft.com/office/powerpoint/2010/main" val="2205547682"/>
+        <p14:creationId xmlns:p14="http://schemas.microsoft.com/office/powerpoint/2010/main" val="3033955820"/>
       </p:ext>
     </p:extLst>
   </p:cSld>
@@ -7225,24 +8584,26 @@
         </p:nvSpPr>
         <p:spPr/>
         <p:txBody>
-          <a:bodyPr/>
-          <a:lstStyle/>
-          <a:p>
-            <a:r>
-              <a:rPr lang="ru-RU" dirty="0" smtClean="0">
-                <a:latin typeface="Times New Roman" panose="02020603050405020304" pitchFamily="18" charset="0"/>
-                <a:cs typeface="Times New Roman" panose="02020603050405020304" pitchFamily="18" charset="0"/>
-              </a:rPr>
-              <a:t>Демонстрация </a:t>
-            </a:r>
-            <a:r>
-              <a:rPr lang="en-US" dirty="0" smtClean="0">
-                <a:latin typeface="Times New Roman" panose="02020603050405020304" pitchFamily="18" charset="0"/>
-                <a:cs typeface="Times New Roman" panose="02020603050405020304" pitchFamily="18" charset="0"/>
-              </a:rPr>
-              <a:t>UI</a:t>
-            </a:r>
-            <a:endParaRPr lang="ru-RU" dirty="0">
+          <a:bodyPr>
+            <a:normAutofit/>
+          </a:bodyPr>
+          <a:lstStyle/>
+          <a:p>
+            <a:r>
+              <a:rPr lang="ru-RU" sz="4800" dirty="0" smtClean="0">
+                <a:latin typeface="Times New Roman" panose="02020603050405020304" pitchFamily="18" charset="0"/>
+                <a:cs typeface="Times New Roman" panose="02020603050405020304" pitchFamily="18" charset="0"/>
+              </a:rPr>
+              <a:t>Подбор параметров </a:t>
+            </a:r>
+            <a:r>
+              <a:rPr lang="en-US" sz="4800" dirty="0" smtClean="0">
+                <a:latin typeface="Times New Roman" panose="02020603050405020304" pitchFamily="18" charset="0"/>
+                <a:cs typeface="Times New Roman" panose="02020603050405020304" pitchFamily="18" charset="0"/>
+              </a:rPr>
+              <a:t>RAG</a:t>
+            </a:r>
+            <a:endParaRPr lang="ru-RU" sz="4800" dirty="0">
               <a:latin typeface="Times New Roman" panose="02020603050405020304" pitchFamily="18" charset="0"/>
               <a:cs typeface="Times New Roman" panose="02020603050405020304" pitchFamily="18" charset="0"/>
             </a:endParaRPr>
@@ -7251,14 +8612,14 @@
       </p:sp>
       <p:sp>
         <p:nvSpPr>
-          <p:cNvPr id="5" name="TextBox 4"/>
+          <p:cNvPr id="6" name="TextBox 5"/>
           <p:cNvSpPr txBox="1"/>
           <p:nvPr/>
         </p:nvSpPr>
         <p:spPr>
           <a:xfrm>
-            <a:off x="2103473" y="5876544"/>
-            <a:ext cx="7985051" cy="646331"/>
+            <a:off x="928116" y="5529142"/>
+            <a:ext cx="6687312" cy="1200329"/>
           </a:xfrm>
           <a:prstGeom prst="rect">
             <a:avLst/>
@@ -7277,10 +8638,24 @@
                 <a:latin typeface="Times New Roman" panose="02020603050405020304" pitchFamily="18" charset="0"/>
                 <a:cs typeface="Times New Roman" panose="02020603050405020304" pitchFamily="18" charset="0"/>
               </a:rPr>
-              <a:t>Окно чата с готовыми юридическими</a:t>
-            </a:r>
-            <a:r>
-              <a:rPr lang="en-US" dirty="0" smtClean="0">
+              <a:t>Сравнительный анализ конфигураций двухступенчатого поиска </a:t>
+            </a:r>
+            <a:r>
+              <a:rPr lang="ru-RU" dirty="0">
+                <a:latin typeface="Times New Roman" panose="02020603050405020304" pitchFamily="18" charset="0"/>
+                <a:cs typeface="Times New Roman" panose="02020603050405020304" pitchFamily="18" charset="0"/>
+              </a:rPr>
+              <a:t>по времени отклика </a:t>
+            </a:r>
+            <a:r>
+              <a:rPr lang="ru-RU" dirty="0" smtClean="0">
+                <a:latin typeface="Times New Roman" panose="02020603050405020304" pitchFamily="18" charset="0"/>
+                <a:cs typeface="Times New Roman" panose="02020603050405020304" pitchFamily="18" charset="0"/>
+              </a:rPr>
+              <a:t>по метрикам качества ранжирования</a:t>
+            </a:r>
+            <a:r>
+              <a:rPr lang="ru-RU" dirty="0">
                 <a:latin typeface="Times New Roman" panose="02020603050405020304" pitchFamily="18" charset="0"/>
                 <a:cs typeface="Times New Roman" panose="02020603050405020304" pitchFamily="18" charset="0"/>
               </a:rPr>
@@ -7291,10 +8666,10 @@
                 <a:latin typeface="Times New Roman" panose="02020603050405020304" pitchFamily="18" charset="0"/>
                 <a:cs typeface="Times New Roman" panose="02020603050405020304" pitchFamily="18" charset="0"/>
               </a:rPr>
-              <a:t>рекомендациями и ссылкой на скачивание сгенерированного</a:t>
-            </a:r>
-            <a:r>
-              <a:rPr lang="en-US" dirty="0" smtClean="0">
+              <a:t>и классификации типа договора</a:t>
+            </a:r>
+            <a:r>
+              <a:rPr lang="ru-RU" dirty="0">
                 <a:latin typeface="Times New Roman" panose="02020603050405020304" pitchFamily="18" charset="0"/>
                 <a:cs typeface="Times New Roman" panose="02020603050405020304" pitchFamily="18" charset="0"/>
               </a:rPr>
@@ -7305,43 +8680,374 @@
                 <a:latin typeface="Times New Roman" panose="02020603050405020304" pitchFamily="18" charset="0"/>
                 <a:cs typeface="Times New Roman" panose="02020603050405020304" pitchFamily="18" charset="0"/>
               </a:rPr>
-              <a:t>проекта договора</a:t>
+              <a:t>(значения метрик в </a:t>
+            </a:r>
+            <a:r>
+              <a:rPr lang="ru-RU" dirty="0">
+                <a:latin typeface="Times New Roman" panose="02020603050405020304" pitchFamily="18" charset="0"/>
+                <a:cs typeface="Times New Roman" panose="02020603050405020304" pitchFamily="18" charset="0"/>
+              </a:rPr>
+              <a:t>процентах</a:t>
+            </a:r>
+            <a:r>
+              <a:rPr lang="ru-RU" dirty="0" smtClean="0">
+                <a:latin typeface="Times New Roman" panose="02020603050405020304" pitchFamily="18" charset="0"/>
+                <a:cs typeface="Times New Roman" panose="02020603050405020304" pitchFamily="18" charset="0"/>
+              </a:rPr>
+              <a:t>; </a:t>
+            </a:r>
+            <a:r>
+              <a:rPr lang="ru-RU" dirty="0" err="1" smtClean="0">
+                <a:latin typeface="Times New Roman" panose="02020603050405020304" pitchFamily="18" charset="0"/>
+                <a:cs typeface="Times New Roman" panose="02020603050405020304" pitchFamily="18" charset="0"/>
+              </a:rPr>
+              <a:t>latency</a:t>
+            </a:r>
+            <a:r>
+              <a:rPr lang="ru-RU" dirty="0" smtClean="0">
+                <a:latin typeface="Times New Roman" panose="02020603050405020304" pitchFamily="18" charset="0"/>
+                <a:cs typeface="Times New Roman" panose="02020603050405020304" pitchFamily="18" charset="0"/>
+              </a:rPr>
+              <a:t> </a:t>
+            </a:r>
+            <a:r>
+              <a:rPr lang="ru-RU" dirty="0">
+                <a:latin typeface="Times New Roman" panose="02020603050405020304" pitchFamily="18" charset="0"/>
+                <a:cs typeface="Times New Roman" panose="02020603050405020304" pitchFamily="18" charset="0"/>
+              </a:rPr>
+              <a:t>— в миллисекундах)</a:t>
             </a:r>
           </a:p>
         </p:txBody>
       </p:sp>
       <p:pic>
         <p:nvPicPr>
-          <p:cNvPr id="6" name="Объект 5"/>
+          <p:cNvPr id="5" name="Рисунок 4"/>
           <p:cNvPicPr>
-            <a:picLocks noGrp="1" noChangeAspect="1"/>
+            <a:picLocks noChangeAspect="1"/>
           </p:cNvPicPr>
-          <p:nvPr>
-            <p:ph idx="1"/>
-          </p:nvPr>
+          <p:nvPr/>
         </p:nvPicPr>
-        <p:blipFill rotWithShape="1">
-          <a:blip r:embed="rId2" cstate="print">
-            <a:extLst>
-              <a:ext uri="{28A0092B-C50C-407E-A947-70E740481C1C}">
-                <a14:useLocalDpi xmlns:a14="http://schemas.microsoft.com/office/drawing/2010/main" val="0"/>
-              </a:ext>
-            </a:extLst>
-          </a:blip>
-          <a:srcRect b="3803"/>
-          <a:stretch/>
+        <p:blipFill>
+          <a:blip r:embed="rId2"/>
+          <a:stretch>
+            <a:fillRect/>
+          </a:stretch>
         </p:blipFill>
         <p:spPr>
           <a:xfrm>
-            <a:off x="2229388" y="1690688"/>
-            <a:ext cx="7733223" cy="4185856"/>
+            <a:off x="838200" y="1371599"/>
+            <a:ext cx="6867144" cy="4157543"/>
           </a:xfrm>
+          <a:prstGeom prst="rect">
+            <a:avLst/>
+          </a:prstGeom>
         </p:spPr>
       </p:pic>
+      <p:sp>
+        <p:nvSpPr>
+          <p:cNvPr id="7" name="TextBox 6"/>
+          <p:cNvSpPr txBox="1"/>
+          <p:nvPr/>
+        </p:nvSpPr>
+        <p:spPr>
+          <a:xfrm>
+            <a:off x="7795260" y="1371599"/>
+            <a:ext cx="4125468" cy="4801314"/>
+          </a:xfrm>
+          <a:prstGeom prst="rect">
+            <a:avLst/>
+          </a:prstGeom>
+          <a:noFill/>
+        </p:spPr>
+        <p:txBody>
+          <a:bodyPr wrap="square" rtlCol="0">
+            <a:spAutoFit/>
+          </a:bodyPr>
+          <a:lstStyle/>
+          <a:p>
+            <a:pPr marL="342900" indent="-342900">
+              <a:buFont typeface="+mj-lt"/>
+              <a:buAutoNum type="arabicParenR"/>
+            </a:pPr>
+            <a:r>
+              <a:rPr lang="ru-RU" dirty="0" smtClean="0"/>
+              <a:t>Конфигурация </a:t>
+            </a:r>
+            <a:r>
+              <a:rPr lang="ru-RU" dirty="0"/>
+              <a:t>#1 — </a:t>
+            </a:r>
+            <a:r>
+              <a:rPr lang="ru-RU" dirty="0" err="1"/>
+              <a:t>бикодер</a:t>
+            </a:r>
+            <a:r>
+              <a:rPr lang="ru-RU" dirty="0"/>
+              <a:t> </a:t>
+            </a:r>
+            <a:r>
+              <a:rPr lang="en-US" dirty="0"/>
+              <a:t>Giga-</a:t>
+            </a:r>
+            <a:r>
+              <a:rPr lang="en-US" dirty="0" err="1"/>
+              <a:t>Embeddings</a:t>
+            </a:r>
+            <a:r>
+              <a:rPr lang="en-US" dirty="0"/>
+              <a:t>-instruct </a:t>
+            </a:r>
+            <a:r>
+              <a:rPr lang="ru-RU" dirty="0"/>
+              <a:t>без </a:t>
+            </a:r>
+            <a:r>
+              <a:rPr lang="ru-RU" dirty="0" err="1"/>
+              <a:t>реранкера</a:t>
+            </a:r>
+            <a:r>
+              <a:rPr lang="ru-RU" dirty="0"/>
+              <a:t> и без </a:t>
+            </a:r>
+            <a:r>
+              <a:rPr lang="en-US" dirty="0"/>
+              <a:t>LLM-</a:t>
+            </a:r>
+            <a:r>
+              <a:rPr lang="ru-RU" dirty="0"/>
+              <a:t>фильтра.</a:t>
+            </a:r>
+          </a:p>
+          <a:p>
+            <a:pPr marL="342900" indent="-342900">
+              <a:buFont typeface="+mj-lt"/>
+              <a:buAutoNum type="arabicParenR"/>
+            </a:pPr>
+            <a:r>
+              <a:rPr lang="ru-RU" dirty="0" smtClean="0"/>
+              <a:t>Конфигурация </a:t>
+            </a:r>
+            <a:r>
+              <a:rPr lang="ru-RU" dirty="0"/>
+              <a:t>#2 — </a:t>
+            </a:r>
+            <a:r>
+              <a:rPr lang="ru-RU" dirty="0" err="1"/>
+              <a:t>бикодер</a:t>
+            </a:r>
+            <a:r>
+              <a:rPr lang="ru-RU" dirty="0"/>
+              <a:t> </a:t>
+            </a:r>
+            <a:r>
+              <a:rPr lang="en-US" dirty="0"/>
+              <a:t>Giga-</a:t>
+            </a:r>
+            <a:r>
+              <a:rPr lang="en-US" dirty="0" err="1"/>
+              <a:t>Embeddings</a:t>
+            </a:r>
+            <a:r>
+              <a:rPr lang="en-US" dirty="0"/>
+              <a:t>-instruct + </a:t>
+            </a:r>
+            <a:r>
+              <a:rPr lang="ru-RU" dirty="0" err="1"/>
+              <a:t>реранкер</a:t>
+            </a:r>
+            <a:r>
+              <a:rPr lang="ru-RU" dirty="0"/>
+              <a:t> </a:t>
+            </a:r>
+            <a:r>
+              <a:rPr lang="en-US" dirty="0"/>
+              <a:t>BAAI/bge-reranker-v2-m3.</a:t>
+            </a:r>
+          </a:p>
+          <a:p>
+            <a:pPr marL="342900" indent="-342900">
+              <a:buFont typeface="+mj-lt"/>
+              <a:buAutoNum type="arabicParenR"/>
+            </a:pPr>
+            <a:r>
+              <a:rPr lang="ru-RU" dirty="0" smtClean="0"/>
+              <a:t>Конфигурация </a:t>
+            </a:r>
+            <a:r>
+              <a:rPr lang="ru-RU" dirty="0"/>
+              <a:t>#3 — </a:t>
+            </a:r>
+            <a:r>
+              <a:rPr lang="ru-RU" dirty="0" err="1"/>
+              <a:t>бикодер</a:t>
+            </a:r>
+            <a:r>
+              <a:rPr lang="ru-RU" dirty="0"/>
+              <a:t> </a:t>
+            </a:r>
+            <a:r>
+              <a:rPr lang="en-US" dirty="0"/>
+              <a:t>Giga-</a:t>
+            </a:r>
+            <a:r>
+              <a:rPr lang="en-US" dirty="0" err="1"/>
+              <a:t>Embeddings</a:t>
+            </a:r>
+            <a:r>
+              <a:rPr lang="en-US" dirty="0"/>
+              <a:t>-instruct + </a:t>
+            </a:r>
+            <a:r>
+              <a:rPr lang="ru-RU" dirty="0" err="1"/>
+              <a:t>реранкер</a:t>
+            </a:r>
+            <a:r>
+              <a:rPr lang="ru-RU" dirty="0"/>
+              <a:t> </a:t>
+            </a:r>
+            <a:r>
+              <a:rPr lang="en-US" dirty="0"/>
+              <a:t>BAAI/bge-reranker-v2-m3 + LLM-</a:t>
+            </a:r>
+            <a:r>
+              <a:rPr lang="ru-RU" dirty="0" smtClean="0"/>
+              <a:t>фильтр.</a:t>
+            </a:r>
+          </a:p>
+          <a:p>
+            <a:pPr marL="342900" indent="-342900">
+              <a:buFont typeface="+mj-lt"/>
+              <a:buAutoNum type="arabicParenR"/>
+            </a:pPr>
+            <a:r>
+              <a:rPr lang="ru-RU" dirty="0" smtClean="0"/>
+              <a:t>Конфигурация </a:t>
+            </a:r>
+            <a:r>
+              <a:rPr lang="ru-RU" dirty="0"/>
+              <a:t>#4 — </a:t>
+            </a:r>
+            <a:r>
+              <a:rPr lang="ru-RU" dirty="0" err="1"/>
+              <a:t>бикодер</a:t>
+            </a:r>
+            <a:r>
+              <a:rPr lang="ru-RU" dirty="0"/>
+              <a:t> </a:t>
+            </a:r>
+            <a:r>
+              <a:rPr lang="en-US" dirty="0"/>
+              <a:t>Giga-</a:t>
+            </a:r>
+            <a:r>
+              <a:rPr lang="en-US" dirty="0" err="1"/>
+              <a:t>Embeddings</a:t>
+            </a:r>
+            <a:r>
+              <a:rPr lang="en-US" dirty="0"/>
+              <a:t>-instruct + </a:t>
+            </a:r>
+            <a:r>
+              <a:rPr lang="ru-RU" dirty="0" err="1"/>
+              <a:t>реранкер</a:t>
+            </a:r>
+            <a:r>
+              <a:rPr lang="ru-RU" dirty="0"/>
+              <a:t> </a:t>
+            </a:r>
+            <a:r>
+              <a:rPr lang="en-US" dirty="0" err="1"/>
+              <a:t>Qwen</a:t>
+            </a:r>
+            <a:r>
+              <a:rPr lang="en-US" dirty="0"/>
+              <a:t>/Qwen3-Reranker-0.6B.</a:t>
+            </a:r>
+          </a:p>
+          <a:p>
+            <a:pPr marL="342900" indent="-342900">
+              <a:buFont typeface="+mj-lt"/>
+              <a:buAutoNum type="arabicParenR"/>
+            </a:pPr>
+            <a:r>
+              <a:rPr lang="ru-RU" dirty="0" smtClean="0"/>
+              <a:t>Конфигурация </a:t>
+            </a:r>
+            <a:r>
+              <a:rPr lang="ru-RU" dirty="0"/>
+              <a:t>#5 — </a:t>
+            </a:r>
+            <a:r>
+              <a:rPr lang="ru-RU" dirty="0" err="1"/>
+              <a:t>бикодер</a:t>
+            </a:r>
+            <a:r>
+              <a:rPr lang="ru-RU" dirty="0"/>
+              <a:t> </a:t>
+            </a:r>
+            <a:r>
+              <a:rPr lang="en-US" dirty="0"/>
+              <a:t>Giga-</a:t>
+            </a:r>
+            <a:r>
+              <a:rPr lang="en-US" dirty="0" err="1"/>
+              <a:t>Embeddings</a:t>
+            </a:r>
+            <a:r>
+              <a:rPr lang="en-US" dirty="0"/>
+              <a:t>-instruct + </a:t>
+            </a:r>
+            <a:r>
+              <a:rPr lang="ru-RU" dirty="0" err="1"/>
+              <a:t>реранкер</a:t>
+            </a:r>
+            <a:r>
+              <a:rPr lang="ru-RU" dirty="0"/>
+              <a:t> </a:t>
+            </a:r>
+            <a:r>
+              <a:rPr lang="en-US" dirty="0" err="1"/>
+              <a:t>Qwen</a:t>
+            </a:r>
+            <a:r>
+              <a:rPr lang="en-US" dirty="0"/>
+              <a:t>/Qwen3-Reranker-0.6B + LLM-</a:t>
+            </a:r>
+            <a:r>
+              <a:rPr lang="ru-RU" dirty="0"/>
+              <a:t>фильтр.</a:t>
+            </a:r>
+          </a:p>
+        </p:txBody>
+      </p:sp>
+      <p:sp>
+        <p:nvSpPr>
+          <p:cNvPr id="4" name="Номер слайда 3"/>
+          <p:cNvSpPr>
+            <a:spLocks noGrp="1"/>
+          </p:cNvSpPr>
+          <p:nvPr>
+            <p:ph type="sldNum" sz="quarter" idx="12"/>
+          </p:nvPr>
+        </p:nvSpPr>
+        <p:spPr/>
+        <p:txBody>
+          <a:bodyPr/>
+          <a:lstStyle/>
+          <a:p>
+            <a:fld id="{65A3789A-D406-449F-860F-117B58A45219}" type="slidenum">
+              <a:rPr lang="ru-RU" smtClean="0"/>
+              <a:t>9</a:t>
+            </a:fld>
+            <a:endParaRPr lang="ru-RU"/>
+          </a:p>
+        </p:txBody>
+      </p:sp>
     </p:spTree>
     <p:extLst>
       <p:ext uri="{BB962C8B-B14F-4D97-AF65-F5344CB8AC3E}">
-        <p14:creationId xmlns:p14="http://schemas.microsoft.com/office/powerpoint/2010/main" val="2364807525"/>
+        <p14:creationId xmlns:p14="http://schemas.microsoft.com/office/powerpoint/2010/main" val="1162437596"/>
       </p:ext>
     </p:extLst>
   </p:cSld>
@@ -7617,4 +9323,265 @@
     </a:ext>
   </a:extLst>
 </a:theme>
+</file>
+
+<file path=ppt/theme/theme2.xml><?xml version="1.0" encoding="utf-8"?>
+<a:theme xmlns:a="http://schemas.openxmlformats.org/drawingml/2006/main" name="Тема Office">
+  <a:themeElements>
+    <a:clrScheme name="Стандартная">
+      <a:dk1>
+        <a:sysClr val="windowText" lastClr="000000"/>
+      </a:dk1>
+      <a:lt1>
+        <a:sysClr val="window" lastClr="FFFFFF"/>
+      </a:lt1>
+      <a:dk2>
+        <a:srgbClr val="44546A"/>
+      </a:dk2>
+      <a:lt2>
+        <a:srgbClr val="E7E6E6"/>
+      </a:lt2>
+      <a:accent1>
+        <a:srgbClr val="5B9BD5"/>
+      </a:accent1>
+      <a:accent2>
+        <a:srgbClr val="ED7D31"/>
+      </a:accent2>
+      <a:accent3>
+        <a:srgbClr val="A5A5A5"/>
+      </a:accent3>
+      <a:accent4>
+        <a:srgbClr val="FFC000"/>
+      </a:accent4>
+      <a:accent5>
+        <a:srgbClr val="4472C4"/>
+      </a:accent5>
+      <a:accent6>
+        <a:srgbClr val="70AD47"/>
+      </a:accent6>
+      <a:hlink>
+        <a:srgbClr val="0563C1"/>
+      </a:hlink>
+      <a:folHlink>
+        <a:srgbClr val="954F72"/>
+      </a:folHlink>
+    </a:clrScheme>
+    <a:fontScheme name="Стандартная">
+      <a:majorFont>
+        <a:latin typeface="Calibri Light" panose="020F0302020204030204"/>
+        <a:ea typeface=""/>
+        <a:cs typeface=""/>
+        <a:font script="Jpan" typeface="ＭＳ Ｐゴシック"/>
+        <a:font script="Hang" typeface="맑은 고딕"/>
+        <a:font script="Hans" typeface="宋体"/>
+        <a:font script="Hant" typeface="新細明體"/>
+        <a:font script="Arab" typeface="Times New Roman"/>
+        <a:font script="Hebr" typeface="Times New Roman"/>
+        <a:font script="Thai" typeface="Angsana New"/>
+        <a:font script="Ethi" typeface="Nyala"/>
+        <a:font script="Beng" typeface="Vrinda"/>
+        <a:font script="Gujr" typeface="Shruti"/>
+        <a:font script="Khmr" typeface="MoolBoran"/>
+        <a:font script="Knda" typeface="Tunga"/>
+        <a:font script="Guru" typeface="Raavi"/>
+        <a:font script="Cans" typeface="Euphemia"/>
+        <a:font script="Cher" typeface="Plantagenet Cherokee"/>
+        <a:font script="Yiii" typeface="Microsoft Yi Baiti"/>
+        <a:font script="Tibt" typeface="Microsoft Himalaya"/>
+        <a:font script="Thaa" typeface="MV Boli"/>
+        <a:font script="Deva" typeface="Mangal"/>
+        <a:font script="Telu" typeface="Gautami"/>
+        <a:font script="Taml" typeface="Latha"/>
+        <a:font script="Syrc" typeface="Estrangelo Edessa"/>
+        <a:font script="Orya" typeface="Kalinga"/>
+        <a:font script="Mlym" typeface="Kartika"/>
+        <a:font script="Laoo" typeface="DokChampa"/>
+        <a:font script="Sinh" typeface="Iskoola Pota"/>
+        <a:font script="Mong" typeface="Mongolian Baiti"/>
+        <a:font script="Viet" typeface="Times New Roman"/>
+        <a:font script="Uigh" typeface="Microsoft Uighur"/>
+        <a:font script="Geor" typeface="Sylfaen"/>
+      </a:majorFont>
+      <a:minorFont>
+        <a:latin typeface="Calibri" panose="020F0502020204030204"/>
+        <a:ea typeface=""/>
+        <a:cs typeface=""/>
+        <a:font script="Jpan" typeface="ＭＳ Ｐゴシック"/>
+        <a:font script="Hang" typeface="맑은 고딕"/>
+        <a:font script="Hans" typeface="宋体"/>
+        <a:font script="Hant" typeface="新細明體"/>
+        <a:font script="Arab" typeface="Arial"/>
+        <a:font script="Hebr" typeface="Arial"/>
+        <a:font script="Thai" typeface="Cordia New"/>
+        <a:font script="Ethi" typeface="Nyala"/>
+        <a:font script="Beng" typeface="Vrinda"/>
+        <a:font script="Gujr" typeface="Shruti"/>
+        <a:font script="Khmr" typeface="DaunPenh"/>
+        <a:font script="Knda" typeface="Tunga"/>
+        <a:font script="Guru" typeface="Raavi"/>
+        <a:font script="Cans" typeface="Euphemia"/>
+        <a:font script="Cher" typeface="Plantagenet Cherokee"/>
+        <a:font script="Yiii" typeface="Microsoft Yi Baiti"/>
+        <a:font script="Tibt" typeface="Microsoft Himalaya"/>
+        <a:font script="Thaa" typeface="MV Boli"/>
+        <a:font script="Deva" typeface="Mangal"/>
+        <a:font script="Telu" typeface="Gautami"/>
+        <a:font script="Taml" typeface="Latha"/>
+        <a:font script="Syrc" typeface="Estrangelo Edessa"/>
+        <a:font script="Orya" typeface="Kalinga"/>
+        <a:font script="Mlym" typeface="Kartika"/>
+        <a:font script="Laoo" typeface="DokChampa"/>
+        <a:font script="Sinh" typeface="Iskoola Pota"/>
+        <a:font script="Mong" typeface="Mongolian Baiti"/>
+        <a:font script="Viet" typeface="Arial"/>
+        <a:font script="Uigh" typeface="Microsoft Uighur"/>
+        <a:font script="Geor" typeface="Sylfaen"/>
+      </a:minorFont>
+    </a:fontScheme>
+    <a:fmtScheme name="Стандартная">
+      <a:fillStyleLst>
+        <a:solidFill>
+          <a:schemeClr val="phClr"/>
+        </a:solidFill>
+        <a:gradFill rotWithShape="1">
+          <a:gsLst>
+            <a:gs pos="0">
+              <a:schemeClr val="phClr">
+                <a:lumMod val="110000"/>
+                <a:satMod val="105000"/>
+                <a:tint val="67000"/>
+              </a:schemeClr>
+            </a:gs>
+            <a:gs pos="50000">
+              <a:schemeClr val="phClr">
+                <a:lumMod val="105000"/>
+                <a:satMod val="103000"/>
+                <a:tint val="73000"/>
+              </a:schemeClr>
+            </a:gs>
+            <a:gs pos="100000">
+              <a:schemeClr val="phClr">
+                <a:lumMod val="105000"/>
+                <a:satMod val="109000"/>
+                <a:tint val="81000"/>
+              </a:schemeClr>
+            </a:gs>
+          </a:gsLst>
+          <a:lin ang="5400000" scaled="0"/>
+        </a:gradFill>
+        <a:gradFill rotWithShape="1">
+          <a:gsLst>
+            <a:gs pos="0">
+              <a:schemeClr val="phClr">
+                <a:satMod val="103000"/>
+                <a:lumMod val="102000"/>
+                <a:tint val="94000"/>
+              </a:schemeClr>
+            </a:gs>
+            <a:gs pos="50000">
+              <a:schemeClr val="phClr">
+                <a:satMod val="110000"/>
+                <a:lumMod val="100000"/>
+                <a:shade val="100000"/>
+              </a:schemeClr>
+            </a:gs>
+            <a:gs pos="100000">
+              <a:schemeClr val="phClr">
+                <a:lumMod val="99000"/>
+                <a:satMod val="120000"/>
+                <a:shade val="78000"/>
+              </a:schemeClr>
+            </a:gs>
+          </a:gsLst>
+          <a:lin ang="5400000" scaled="0"/>
+        </a:gradFill>
+      </a:fillStyleLst>
+      <a:lnStyleLst>
+        <a:ln w="6350" cap="flat" cmpd="sng" algn="ctr">
+          <a:solidFill>
+            <a:schemeClr val="phClr"/>
+          </a:solidFill>
+          <a:prstDash val="solid"/>
+          <a:miter lim="800000"/>
+        </a:ln>
+        <a:ln w="12700" cap="flat" cmpd="sng" algn="ctr">
+          <a:solidFill>
+            <a:schemeClr val="phClr"/>
+          </a:solidFill>
+          <a:prstDash val="solid"/>
+          <a:miter lim="800000"/>
+        </a:ln>
+        <a:ln w="19050" cap="flat" cmpd="sng" algn="ctr">
+          <a:solidFill>
+            <a:schemeClr val="phClr"/>
+          </a:solidFill>
+          <a:prstDash val="solid"/>
+          <a:miter lim="800000"/>
+        </a:ln>
+      </a:lnStyleLst>
+      <a:effectStyleLst>
+        <a:effectStyle>
+          <a:effectLst/>
+        </a:effectStyle>
+        <a:effectStyle>
+          <a:effectLst/>
+        </a:effectStyle>
+        <a:effectStyle>
+          <a:effectLst>
+            <a:outerShdw blurRad="57150" dist="19050" dir="5400000" algn="ctr" rotWithShape="0">
+              <a:srgbClr val="000000">
+                <a:alpha val="63000"/>
+              </a:srgbClr>
+            </a:outerShdw>
+          </a:effectLst>
+        </a:effectStyle>
+      </a:effectStyleLst>
+      <a:bgFillStyleLst>
+        <a:solidFill>
+          <a:schemeClr val="phClr"/>
+        </a:solidFill>
+        <a:solidFill>
+          <a:schemeClr val="phClr">
+            <a:tint val="95000"/>
+            <a:satMod val="170000"/>
+          </a:schemeClr>
+        </a:solidFill>
+        <a:gradFill rotWithShape="1">
+          <a:gsLst>
+            <a:gs pos="0">
+              <a:schemeClr val="phClr">
+                <a:tint val="93000"/>
+                <a:satMod val="150000"/>
+                <a:shade val="98000"/>
+                <a:lumMod val="102000"/>
+              </a:schemeClr>
+            </a:gs>
+            <a:gs pos="50000">
+              <a:schemeClr val="phClr">
+                <a:tint val="98000"/>
+                <a:satMod val="130000"/>
+                <a:shade val="90000"/>
+                <a:lumMod val="103000"/>
+              </a:schemeClr>
+            </a:gs>
+            <a:gs pos="100000">
+              <a:schemeClr val="phClr">
+                <a:shade val="63000"/>
+                <a:satMod val="120000"/>
+              </a:schemeClr>
+            </a:gs>
+          </a:gsLst>
+          <a:lin ang="5400000" scaled="0"/>
+        </a:gradFill>
+      </a:bgFillStyleLst>
+    </a:fmtScheme>
+  </a:themeElements>
+  <a:objectDefaults/>
+  <a:extraClrSchemeLst/>
+  <a:extLst>
+    <a:ext uri="{05A4C25C-085E-4340-85A3-A5531E510DB2}">
+      <thm15:themeFamily xmlns:thm15="http://schemas.microsoft.com/office/thememl/2012/main" name="Office Theme" id="{62F939B6-93AF-4DB8-9C6B-D6C7DFDC589F}" vid="{4A3C46E8-61CC-4603-A589-7422A47A8E4A}"/>
+    </a:ext>
+  </a:extLst>
+</a:theme>
 </file>
--- a/Презентация_к_ВКР_ЦирулевНВ_М8О-408Б-22.pptx
+++ b/Презентация_к_ВКР_ЦирулевНВ_М8О-408Б-22.pptx
@@ -5,7 +5,7 @@
     <p:sldMasterId id="2147483648" r:id="rId1"/>
   </p:sldMasterIdLst>
   <p:notesMasterIdLst>
-    <p:notesMasterId r:id="rId21"/>
+    <p:notesMasterId r:id="rId22"/>
   </p:notesMasterIdLst>
   <p:sldIdLst>
     <p:sldId id="257" r:id="rId2"/>
@@ -18,15 +18,16 @@
     <p:sldId id="277" r:id="rId9"/>
     <p:sldId id="265" r:id="rId10"/>
     <p:sldId id="266" r:id="rId11"/>
-    <p:sldId id="278" r:id="rId12"/>
-    <p:sldId id="268" r:id="rId13"/>
-    <p:sldId id="269" r:id="rId14"/>
-    <p:sldId id="270" r:id="rId15"/>
-    <p:sldId id="271" r:id="rId16"/>
-    <p:sldId id="272" r:id="rId17"/>
-    <p:sldId id="275" r:id="rId18"/>
-    <p:sldId id="260" r:id="rId19"/>
-    <p:sldId id="274" r:id="rId20"/>
+    <p:sldId id="267" r:id="rId12"/>
+    <p:sldId id="278" r:id="rId13"/>
+    <p:sldId id="268" r:id="rId14"/>
+    <p:sldId id="269" r:id="rId15"/>
+    <p:sldId id="270" r:id="rId16"/>
+    <p:sldId id="271" r:id="rId17"/>
+    <p:sldId id="272" r:id="rId18"/>
+    <p:sldId id="275" r:id="rId19"/>
+    <p:sldId id="260" r:id="rId20"/>
+    <p:sldId id="274" r:id="rId21"/>
   </p:sldIdLst>
   <p:sldSz cx="12192000" cy="6858000"/>
   <p:notesSz cx="6858000" cy="9144000"/>
@@ -4724,14 +4725,21 @@
                 <a:latin typeface="Times New Roman" panose="02020603050405020304" pitchFamily="18" charset="0"/>
                 <a:cs typeface="Times New Roman" panose="02020603050405020304" pitchFamily="18" charset="0"/>
               </a:rPr>
-              <a:t>Подбор параметров </a:t>
-            </a:r>
-            <a:r>
-              <a:rPr lang="en-US" sz="4800" dirty="0" smtClean="0">
-                <a:latin typeface="Times New Roman" panose="02020603050405020304" pitchFamily="18" charset="0"/>
-                <a:cs typeface="Times New Roman" panose="02020603050405020304" pitchFamily="18" charset="0"/>
-              </a:rPr>
-              <a:t>RAG</a:t>
+              <a:t>Подбор </a:t>
+            </a:r>
+            <a:r>
+              <a:rPr lang="ru-RU" sz="4800" dirty="0">
+                <a:latin typeface="Times New Roman" panose="02020603050405020304" pitchFamily="18" charset="0"/>
+                <a:cs typeface="Times New Roman" panose="02020603050405020304" pitchFamily="18" charset="0"/>
+              </a:rPr>
+              <a:t>параметров </a:t>
+            </a:r>
+            <a:r>
+              <a:rPr lang="ru-RU" sz="4800" dirty="0" smtClean="0">
+                <a:latin typeface="Times New Roman" panose="02020603050405020304" pitchFamily="18" charset="0"/>
+                <a:cs typeface="Times New Roman" panose="02020603050405020304" pitchFamily="18" charset="0"/>
+              </a:rPr>
+              <a:t>поиска</a:t>
             </a:r>
             <a:endParaRPr lang="ru-RU" sz="4800" dirty="0">
               <a:latin typeface="Times New Roman" panose="02020603050405020304" pitchFamily="18" charset="0"/>
@@ -5034,13 +5042,180 @@
         </p:nvSpPr>
         <p:spPr/>
         <p:txBody>
-          <a:bodyPr>
-            <a:normAutofit/>
+          <a:bodyPr/>
+          <a:lstStyle/>
+          <a:p>
+            <a:r>
+              <a:rPr lang="ru-RU" dirty="0">
+                <a:latin typeface="Times New Roman" panose="02020603050405020304" pitchFamily="18" charset="0"/>
+                <a:cs typeface="Times New Roman" panose="02020603050405020304" pitchFamily="18" charset="0"/>
+              </a:rPr>
+              <a:t>Подбор параметров поиска</a:t>
+            </a:r>
+            <a:endParaRPr lang="ru-RU" dirty="0">
+              <a:latin typeface="Times New Roman" panose="02020603050405020304" pitchFamily="18" charset="0"/>
+              <a:cs typeface="Times New Roman" panose="02020603050405020304" pitchFamily="18" charset="0"/>
+            </a:endParaRPr>
+          </a:p>
+        </p:txBody>
+      </p:sp>
+      <p:sp>
+        <p:nvSpPr>
+          <p:cNvPr id="6" name="TextBox 5"/>
+          <p:cNvSpPr txBox="1"/>
+          <p:nvPr/>
+        </p:nvSpPr>
+        <p:spPr>
+          <a:xfrm>
+            <a:off x="838200" y="1690688"/>
+            <a:ext cx="3849624" cy="2677656"/>
+          </a:xfrm>
+          <a:prstGeom prst="rect">
+            <a:avLst/>
+          </a:prstGeom>
+          <a:noFill/>
+        </p:spPr>
+        <p:txBody>
+          <a:bodyPr wrap="square" rtlCol="0">
+            <a:spAutoFit/>
           </a:bodyPr>
           <a:lstStyle/>
           <a:p>
-            <a:r>
-              <a:rPr lang="ru-RU" sz="4800" dirty="0">
+            <a:pPr algn="just"/>
+            <a:r>
+              <a:rPr lang="ru-RU" sz="2800" dirty="0" smtClean="0">
+                <a:latin typeface="Times New Roman" panose="02020603050405020304" pitchFamily="18" charset="0"/>
+                <a:cs typeface="Times New Roman" panose="02020603050405020304" pitchFamily="18" charset="0"/>
+              </a:rPr>
+              <a:t>Распределение значений </a:t>
+            </a:r>
+            <a:r>
+              <a:rPr lang="ru-RU" sz="2800" dirty="0" err="1" smtClean="0">
+                <a:latin typeface="Times New Roman" panose="02020603050405020304" pitchFamily="18" charset="0"/>
+                <a:cs typeface="Times New Roman" panose="02020603050405020304" pitchFamily="18" charset="0"/>
+              </a:rPr>
+              <a:t>precision@k</a:t>
+            </a:r>
+            <a:r>
+              <a:rPr lang="ru-RU" sz="2800" dirty="0" smtClean="0">
+                <a:latin typeface="Times New Roman" panose="02020603050405020304" pitchFamily="18" charset="0"/>
+                <a:cs typeface="Times New Roman" panose="02020603050405020304" pitchFamily="18" charset="0"/>
+              </a:rPr>
+              <a:t> и точности классификации итоговой конфигурации поиска по типам сделок</a:t>
+            </a:r>
+            <a:endParaRPr lang="ru-RU" sz="2800" dirty="0">
+              <a:latin typeface="Times New Roman" panose="02020603050405020304" pitchFamily="18" charset="0"/>
+              <a:cs typeface="Times New Roman" panose="02020603050405020304" pitchFamily="18" charset="0"/>
+            </a:endParaRPr>
+          </a:p>
+        </p:txBody>
+      </p:sp>
+      <p:pic>
+        <p:nvPicPr>
+          <p:cNvPr id="5" name="Объект 4"/>
+          <p:cNvPicPr>
+            <a:picLocks noGrp="1" noChangeAspect="1"/>
+          </p:cNvPicPr>
+          <p:nvPr>
+            <p:ph idx="1"/>
+          </p:nvPr>
+        </p:nvPicPr>
+        <p:blipFill>
+          <a:blip r:embed="rId2">
+            <a:extLst>
+              <a:ext uri="{28A0092B-C50C-407E-A947-70E740481C1C}">
+                <a14:useLocalDpi xmlns:a14="http://schemas.microsoft.com/office/drawing/2010/main" val="0"/>
+              </a:ext>
+            </a:extLst>
+          </a:blip>
+          <a:stretch>
+            <a:fillRect/>
+          </a:stretch>
+        </p:blipFill>
+        <p:spPr>
+          <a:xfrm>
+            <a:off x="6440540" y="1422464"/>
+            <a:ext cx="4913260" cy="5203700"/>
+          </a:xfrm>
+        </p:spPr>
+      </p:pic>
+      <p:sp>
+        <p:nvSpPr>
+          <p:cNvPr id="3" name="Номер слайда 2"/>
+          <p:cNvSpPr>
+            <a:spLocks noGrp="1"/>
+          </p:cNvSpPr>
+          <p:nvPr>
+            <p:ph type="sldNum" sz="quarter" idx="12"/>
+          </p:nvPr>
+        </p:nvSpPr>
+        <p:spPr/>
+        <p:txBody>
+          <a:bodyPr/>
+          <a:lstStyle/>
+          <a:p>
+            <a:fld id="{65A3789A-D406-449F-860F-117B58A45219}" type="slidenum">
+              <a:rPr lang="ru-RU" smtClean="0"/>
+              <a:t>11</a:t>
+            </a:fld>
+            <a:endParaRPr lang="ru-RU"/>
+          </a:p>
+        </p:txBody>
+      </p:sp>
+    </p:spTree>
+    <p:extLst>
+      <p:ext uri="{BB962C8B-B14F-4D97-AF65-F5344CB8AC3E}">
+        <p14:creationId xmlns:p14="http://schemas.microsoft.com/office/powerpoint/2010/main" val="2185253317"/>
+      </p:ext>
+    </p:extLst>
+  </p:cSld>
+  <p:clrMapOvr>
+    <a:masterClrMapping/>
+  </p:clrMapOvr>
+  <p:timing>
+    <p:tnLst>
+      <p:par>
+        <p:cTn id="1" dur="indefinite" restart="never" nodeType="tmRoot"/>
+      </p:par>
+    </p:tnLst>
+  </p:timing>
+</p:sld>
+</file>
+
+<file path=ppt/slides/slide12.xml><?xml version="1.0" encoding="utf-8"?>
+<p:sld xmlns:a="http://schemas.openxmlformats.org/drawingml/2006/main" xmlns:r="http://schemas.openxmlformats.org/officeDocument/2006/relationships" xmlns:p="http://schemas.openxmlformats.org/presentationml/2006/main">
+  <p:cSld>
+    <p:spTree>
+      <p:nvGrpSpPr>
+        <p:cNvPr id="1" name=""/>
+        <p:cNvGrpSpPr/>
+        <p:nvPr/>
+      </p:nvGrpSpPr>
+      <p:grpSpPr>
+        <a:xfrm>
+          <a:off x="0" y="0"/>
+          <a:ext cx="0" cy="0"/>
+          <a:chOff x="0" y="0"/>
+          <a:chExt cx="0" cy="0"/>
+        </a:xfrm>
+      </p:grpSpPr>
+      <p:sp>
+        <p:nvSpPr>
+          <p:cNvPr id="2" name="Заголовок 1"/>
+          <p:cNvSpPr>
+            <a:spLocks noGrp="1"/>
+          </p:cNvSpPr>
+          <p:nvPr>
+            <p:ph type="title"/>
+          </p:nvPr>
+        </p:nvSpPr>
+        <p:spPr/>
+        <p:txBody>
+          <a:bodyPr/>
+          <a:lstStyle/>
+          <a:p>
+            <a:r>
+              <a:rPr lang="ru-RU" dirty="0">
                 <a:latin typeface="Times New Roman" panose="02020603050405020304" pitchFamily="18" charset="0"/>
                 <a:cs typeface="Times New Roman" panose="02020603050405020304" pitchFamily="18" charset="0"/>
               </a:rPr>
@@ -5132,14 +5307,14 @@
                 <a:latin typeface="Times New Roman" panose="02020603050405020304" pitchFamily="18" charset="0"/>
                 <a:cs typeface="Times New Roman" panose="02020603050405020304" pitchFamily="18" charset="0"/>
               </a:rPr>
-              <a:t>шкале </a:t>
+              <a:t>шкале по </a:t>
             </a:r>
             <a:r>
               <a:rPr lang="ru-RU" sz="2400" dirty="0">
                 <a:latin typeface="Times New Roman" panose="02020603050405020304" pitchFamily="18" charset="0"/>
                 <a:cs typeface="Times New Roman" panose="02020603050405020304" pitchFamily="18" charset="0"/>
               </a:rPr>
-              <a:t>по двум показателям: качество проекта договора и качество юридических рекомендаций.</a:t>
+              <a:t>двум показателям: качество проекта договора и качество юридических рекомендаций.</a:t>
             </a:r>
           </a:p>
         </p:txBody>
@@ -5161,7 +5336,7 @@
           <a:p>
             <a:fld id="{65A3789A-D406-449F-860F-117B58A45221}" type="slidenum">
               <a:rPr lang="ru-RU" smtClean="0"/>
-              <a:t>11</a:t>
+              <a:t>12</a:t>
             </a:fld>
             <a:endParaRPr lang="ru-RU"/>
           </a:p>
@@ -5187,7 +5362,7 @@
 </p:sld>
 </file>
 
-<file path=ppt/slides/slide12.xml><?xml version="1.0" encoding="utf-8"?>
+<file path=ppt/slides/slide13.xml><?xml version="1.0" encoding="utf-8"?>
 <p:sld xmlns:a="http://schemas.openxmlformats.org/drawingml/2006/main" xmlns:r="http://schemas.openxmlformats.org/officeDocument/2006/relationships" xmlns:p="http://schemas.openxmlformats.org/presentationml/2006/main">
   <p:cSld>
     <p:spTree>
@@ -5381,7 +5556,7 @@
           <a:p>
             <a:fld id="{65A3789A-D406-449F-860F-117B58A45219}" type="slidenum">
               <a:rPr lang="ru-RU" smtClean="0"/>
-              <a:t>12</a:t>
+              <a:t>13</a:t>
             </a:fld>
             <a:endParaRPr lang="ru-RU"/>
           </a:p>
@@ -5391,182 +5566,6 @@
     <p:extLst>
       <p:ext uri="{BB962C8B-B14F-4D97-AF65-F5344CB8AC3E}">
         <p14:creationId xmlns:p14="http://schemas.microsoft.com/office/powerpoint/2010/main" val="578811203"/>
-      </p:ext>
-    </p:extLst>
-  </p:cSld>
-  <p:clrMapOvr>
-    <a:masterClrMapping/>
-  </p:clrMapOvr>
-  <p:timing>
-    <p:tnLst>
-      <p:par>
-        <p:cTn id="1" dur="indefinite" restart="never" nodeType="tmRoot"/>
-      </p:par>
-    </p:tnLst>
-  </p:timing>
-</p:sld>
-</file>
-
-<file path=ppt/slides/slide13.xml><?xml version="1.0" encoding="utf-8"?>
-<p:sld xmlns:a="http://schemas.openxmlformats.org/drawingml/2006/main" xmlns:r="http://schemas.openxmlformats.org/officeDocument/2006/relationships" xmlns:p="http://schemas.openxmlformats.org/presentationml/2006/main">
-  <p:cSld>
-    <p:spTree>
-      <p:nvGrpSpPr>
-        <p:cNvPr id="1" name=""/>
-        <p:cNvGrpSpPr/>
-        <p:nvPr/>
-      </p:nvGrpSpPr>
-      <p:grpSpPr>
-        <a:xfrm>
-          <a:off x="0" y="0"/>
-          <a:ext cx="0" cy="0"/>
-          <a:chOff x="0" y="0"/>
-          <a:chExt cx="0" cy="0"/>
-        </a:xfrm>
-      </p:grpSpPr>
-      <p:sp>
-        <p:nvSpPr>
-          <p:cNvPr id="2" name="Заголовок 1"/>
-          <p:cNvSpPr>
-            <a:spLocks noGrp="1"/>
-          </p:cNvSpPr>
-          <p:nvPr>
-            <p:ph type="title"/>
-          </p:nvPr>
-        </p:nvSpPr>
-        <p:spPr/>
-        <p:txBody>
-          <a:bodyPr/>
-          <a:lstStyle/>
-          <a:p>
-            <a:r>
-              <a:rPr lang="ru-RU" dirty="0" smtClean="0">
-                <a:latin typeface="Times New Roman" panose="02020603050405020304" pitchFamily="18" charset="0"/>
-                <a:cs typeface="Times New Roman" panose="02020603050405020304" pitchFamily="18" charset="0"/>
-              </a:rPr>
-              <a:t>Демонстрация </a:t>
-            </a:r>
-            <a:r>
-              <a:rPr lang="en-US" dirty="0" smtClean="0">
-                <a:latin typeface="Times New Roman" panose="02020603050405020304" pitchFamily="18" charset="0"/>
-                <a:cs typeface="Times New Roman" panose="02020603050405020304" pitchFamily="18" charset="0"/>
-              </a:rPr>
-              <a:t>UI</a:t>
-            </a:r>
-            <a:endParaRPr lang="ru-RU" dirty="0">
-              <a:latin typeface="Times New Roman" panose="02020603050405020304" pitchFamily="18" charset="0"/>
-              <a:cs typeface="Times New Roman" panose="02020603050405020304" pitchFamily="18" charset="0"/>
-            </a:endParaRPr>
-          </a:p>
-        </p:txBody>
-      </p:sp>
-      <p:pic>
-        <p:nvPicPr>
-          <p:cNvPr id="4" name="Объект 3"/>
-          <p:cNvPicPr>
-            <a:picLocks noGrp="1" noChangeAspect="1"/>
-          </p:cNvPicPr>
-          <p:nvPr>
-            <p:ph idx="1"/>
-          </p:nvPr>
-        </p:nvPicPr>
-        <p:blipFill>
-          <a:blip r:embed="rId2" cstate="print">
-            <a:extLst>
-              <a:ext uri="{28A0092B-C50C-407E-A947-70E740481C1C}">
-                <a14:useLocalDpi xmlns:a14="http://schemas.microsoft.com/office/drawing/2010/main" val="0"/>
-              </a:ext>
-            </a:extLst>
-          </a:blip>
-          <a:stretch>
-            <a:fillRect/>
-          </a:stretch>
-        </p:blipFill>
-        <p:spPr>
-          <a:xfrm>
-            <a:off x="2073348" y="1690688"/>
-            <a:ext cx="8045303" cy="4351338"/>
-          </a:xfrm>
-        </p:spPr>
-      </p:pic>
-      <p:sp>
-        <p:nvSpPr>
-          <p:cNvPr id="5" name="TextBox 4"/>
-          <p:cNvSpPr txBox="1"/>
-          <p:nvPr/>
-        </p:nvSpPr>
-        <p:spPr>
-          <a:xfrm>
-            <a:off x="2073348" y="6042026"/>
-            <a:ext cx="7985051" cy="646331"/>
-          </a:xfrm>
-          <a:prstGeom prst="rect">
-            <a:avLst/>
-          </a:prstGeom>
-          <a:noFill/>
-        </p:spPr>
-        <p:txBody>
-          <a:bodyPr wrap="square" rtlCol="0">
-            <a:spAutoFit/>
-          </a:bodyPr>
-          <a:lstStyle/>
-          <a:p>
-            <a:pPr algn="ctr"/>
-            <a:r>
-              <a:rPr lang="ru-RU" dirty="0" smtClean="0">
-                <a:latin typeface="Times New Roman" panose="02020603050405020304" pitchFamily="18" charset="0"/>
-                <a:cs typeface="Times New Roman" panose="02020603050405020304" pitchFamily="18" charset="0"/>
-              </a:rPr>
-              <a:t>Окно чата с диалогом: запрос</a:t>
-            </a:r>
-            <a:r>
-              <a:rPr lang="en-US" dirty="0" smtClean="0">
-                <a:latin typeface="Times New Roman" panose="02020603050405020304" pitchFamily="18" charset="0"/>
-                <a:cs typeface="Times New Roman" panose="02020603050405020304" pitchFamily="18" charset="0"/>
-              </a:rPr>
-              <a:t> </a:t>
-            </a:r>
-            <a:r>
-              <a:rPr lang="ru-RU" dirty="0" smtClean="0">
-                <a:latin typeface="Times New Roman" panose="02020603050405020304" pitchFamily="18" charset="0"/>
-                <a:cs typeface="Times New Roman" panose="02020603050405020304" pitchFamily="18" charset="0"/>
-              </a:rPr>
-              <a:t>пользователя, уточняющий вопрос агента и ответ пользователя</a:t>
-            </a:r>
-            <a:endParaRPr lang="ru-RU" dirty="0">
-              <a:latin typeface="Times New Roman" panose="02020603050405020304" pitchFamily="18" charset="0"/>
-              <a:cs typeface="Times New Roman" panose="02020603050405020304" pitchFamily="18" charset="0"/>
-            </a:endParaRPr>
-          </a:p>
-        </p:txBody>
-      </p:sp>
-      <p:sp>
-        <p:nvSpPr>
-          <p:cNvPr id="3" name="Номер слайда 2"/>
-          <p:cNvSpPr>
-            <a:spLocks noGrp="1"/>
-          </p:cNvSpPr>
-          <p:nvPr>
-            <p:ph type="sldNum" sz="quarter" idx="12"/>
-          </p:nvPr>
-        </p:nvSpPr>
-        <p:spPr/>
-        <p:txBody>
-          <a:bodyPr/>
-          <a:lstStyle/>
-          <a:p>
-            <a:fld id="{65A3789A-D406-449F-860F-117B58A45219}" type="slidenum">
-              <a:rPr lang="ru-RU" smtClean="0"/>
-              <a:t>13</a:t>
-            </a:fld>
-            <a:endParaRPr lang="ru-RU"/>
-          </a:p>
-        </p:txBody>
-      </p:sp>
-    </p:spTree>
-    <p:extLst>
-      <p:ext uri="{BB962C8B-B14F-4D97-AF65-F5344CB8AC3E}">
-        <p14:creationId xmlns:p14="http://schemas.microsoft.com/office/powerpoint/2010/main" val="2205547682"/>
       </p:ext>
     </p:extLst>
   </p:cSld>
@@ -5636,6 +5635,35 @@
           </a:p>
         </p:txBody>
       </p:sp>
+      <p:pic>
+        <p:nvPicPr>
+          <p:cNvPr id="4" name="Объект 3"/>
+          <p:cNvPicPr>
+            <a:picLocks noGrp="1" noChangeAspect="1"/>
+          </p:cNvPicPr>
+          <p:nvPr>
+            <p:ph idx="1"/>
+          </p:nvPr>
+        </p:nvPicPr>
+        <p:blipFill>
+          <a:blip r:embed="rId2" cstate="print">
+            <a:extLst>
+              <a:ext uri="{28A0092B-C50C-407E-A947-70E740481C1C}">
+                <a14:useLocalDpi xmlns:a14="http://schemas.microsoft.com/office/drawing/2010/main" val="0"/>
+              </a:ext>
+            </a:extLst>
+          </a:blip>
+          <a:stretch>
+            <a:fillRect/>
+          </a:stretch>
+        </p:blipFill>
+        <p:spPr>
+          <a:xfrm>
+            <a:off x="2073348" y="1690688"/>
+            <a:ext cx="8045303" cy="4351338"/>
+          </a:xfrm>
+        </p:spPr>
+      </p:pic>
       <p:sp>
         <p:nvSpPr>
           <p:cNvPr id="5" name="TextBox 4"/>
@@ -5644,7 +5672,7 @@
         </p:nvSpPr>
         <p:spPr>
           <a:xfrm>
-            <a:off x="2103473" y="5876544"/>
+            <a:off x="2073348" y="6042026"/>
             <a:ext cx="7985051" cy="646331"/>
           </a:xfrm>
           <a:prstGeom prst="rect">
@@ -5664,7 +5692,7 @@
                 <a:latin typeface="Times New Roman" panose="02020603050405020304" pitchFamily="18" charset="0"/>
                 <a:cs typeface="Times New Roman" panose="02020603050405020304" pitchFamily="18" charset="0"/>
               </a:rPr>
-              <a:t>Окно чата с готовыми юридическими</a:t>
+              <a:t>Окно чата с диалогом: запрос</a:t>
             </a:r>
             <a:r>
               <a:rPr lang="en-US" dirty="0" smtClean="0">
@@ -5678,53 +5706,15 @@
                 <a:latin typeface="Times New Roman" panose="02020603050405020304" pitchFamily="18" charset="0"/>
                 <a:cs typeface="Times New Roman" panose="02020603050405020304" pitchFamily="18" charset="0"/>
               </a:rPr>
-              <a:t>рекомендациями и ссылкой на скачивание сгенерированного</a:t>
-            </a:r>
-            <a:r>
-              <a:rPr lang="en-US" dirty="0" smtClean="0">
-                <a:latin typeface="Times New Roman" panose="02020603050405020304" pitchFamily="18" charset="0"/>
-                <a:cs typeface="Times New Roman" panose="02020603050405020304" pitchFamily="18" charset="0"/>
-              </a:rPr>
-              <a:t> </a:t>
-            </a:r>
-            <a:r>
-              <a:rPr lang="ru-RU" dirty="0" smtClean="0">
-                <a:latin typeface="Times New Roman" panose="02020603050405020304" pitchFamily="18" charset="0"/>
-                <a:cs typeface="Times New Roman" panose="02020603050405020304" pitchFamily="18" charset="0"/>
-              </a:rPr>
-              <a:t>проекта договора</a:t>
-            </a:r>
-          </a:p>
-        </p:txBody>
-      </p:sp>
-      <p:pic>
-        <p:nvPicPr>
-          <p:cNvPr id="6" name="Объект 5"/>
-          <p:cNvPicPr>
-            <a:picLocks noGrp="1" noChangeAspect="1"/>
-          </p:cNvPicPr>
-          <p:nvPr>
-            <p:ph idx="1"/>
-          </p:nvPr>
-        </p:nvPicPr>
-        <p:blipFill rotWithShape="1">
-          <a:blip r:embed="rId2" cstate="print">
-            <a:extLst>
-              <a:ext uri="{28A0092B-C50C-407E-A947-70E740481C1C}">
-                <a14:useLocalDpi xmlns:a14="http://schemas.microsoft.com/office/drawing/2010/main" val="0"/>
-              </a:ext>
-            </a:extLst>
-          </a:blip>
-          <a:srcRect b="3803"/>
-          <a:stretch/>
-        </p:blipFill>
-        <p:spPr>
-          <a:xfrm>
-            <a:off x="2229388" y="1690688"/>
-            <a:ext cx="7733223" cy="4185856"/>
-          </a:xfrm>
-        </p:spPr>
-      </p:pic>
+              <a:t>пользователя, уточняющий вопрос агента и ответ пользователя</a:t>
+            </a:r>
+            <a:endParaRPr lang="ru-RU" dirty="0">
+              <a:latin typeface="Times New Roman" panose="02020603050405020304" pitchFamily="18" charset="0"/>
+              <a:cs typeface="Times New Roman" panose="02020603050405020304" pitchFamily="18" charset="0"/>
+            </a:endParaRPr>
+          </a:p>
+        </p:txBody>
+      </p:sp>
       <p:sp>
         <p:nvSpPr>
           <p:cNvPr id="3" name="Номер слайда 2"/>
@@ -5751,7 +5741,7 @@
     </p:spTree>
     <p:extLst>
       <p:ext uri="{BB962C8B-B14F-4D97-AF65-F5344CB8AC3E}">
-        <p14:creationId xmlns:p14="http://schemas.microsoft.com/office/powerpoint/2010/main" val="2364807525"/>
+        <p14:creationId xmlns:p14="http://schemas.microsoft.com/office/powerpoint/2010/main" val="2205547682"/>
       </p:ext>
     </p:extLst>
   </p:cSld>
@@ -5829,8 +5819,8 @@
         </p:nvSpPr>
         <p:spPr>
           <a:xfrm>
-            <a:off x="838200" y="1690688"/>
-            <a:ext cx="5058972" cy="646331"/>
+            <a:off x="2103473" y="5876544"/>
+            <a:ext cx="7985051" cy="646331"/>
           </a:xfrm>
           <a:prstGeom prst="rect">
             <a:avLst/>
@@ -5843,13 +5833,13 @@
           </a:bodyPr>
           <a:lstStyle/>
           <a:p>
-            <a:pPr algn="just"/>
+            <a:pPr algn="ctr"/>
             <a:r>
               <a:rPr lang="ru-RU" dirty="0" smtClean="0">
                 <a:latin typeface="Times New Roman" panose="02020603050405020304" pitchFamily="18" charset="0"/>
                 <a:cs typeface="Times New Roman" panose="02020603050405020304" pitchFamily="18" charset="0"/>
               </a:rPr>
-              <a:t>Содержательная страница сгенерированного</a:t>
+              <a:t>Окно чата с готовыми юридическими</a:t>
             </a:r>
             <a:r>
               <a:rPr lang="en-US" dirty="0" smtClean="0">
@@ -5863,48 +5853,56 @@
                 <a:latin typeface="Times New Roman" panose="02020603050405020304" pitchFamily="18" charset="0"/>
                 <a:cs typeface="Times New Roman" panose="02020603050405020304" pitchFamily="18" charset="0"/>
               </a:rPr>
-              <a:t>проекта договора в формате DOCX</a:t>
-            </a:r>
-            <a:endParaRPr lang="ru-RU" dirty="0">
-              <a:latin typeface="Times New Roman" panose="02020603050405020304" pitchFamily="18" charset="0"/>
-              <a:cs typeface="Times New Roman" panose="02020603050405020304" pitchFamily="18" charset="0"/>
-            </a:endParaRPr>
+              <a:t>рекомендациями и ссылкой на скачивание сгенерированного</a:t>
+            </a:r>
+            <a:r>
+              <a:rPr lang="en-US" dirty="0" smtClean="0">
+                <a:latin typeface="Times New Roman" panose="02020603050405020304" pitchFamily="18" charset="0"/>
+                <a:cs typeface="Times New Roman" panose="02020603050405020304" pitchFamily="18" charset="0"/>
+              </a:rPr>
+              <a:t> </a:t>
+            </a:r>
+            <a:r>
+              <a:rPr lang="ru-RU" dirty="0" smtClean="0">
+                <a:latin typeface="Times New Roman" panose="02020603050405020304" pitchFamily="18" charset="0"/>
+                <a:cs typeface="Times New Roman" panose="02020603050405020304" pitchFamily="18" charset="0"/>
+              </a:rPr>
+              <a:t>проекта договора</a:t>
+            </a:r>
           </a:p>
         </p:txBody>
       </p:sp>
       <p:pic>
         <p:nvPicPr>
-          <p:cNvPr id="3" name="Рисунок 2"/>
+          <p:cNvPr id="6" name="Объект 5"/>
           <p:cNvPicPr>
-            <a:picLocks noChangeAspect="1"/>
+            <a:picLocks noGrp="1" noChangeAspect="1"/>
           </p:cNvPicPr>
-          <p:nvPr/>
+          <p:nvPr>
+            <p:ph idx="1"/>
+          </p:nvPr>
         </p:nvPicPr>
-        <p:blipFill>
-          <a:blip r:embed="rId2">
+        <p:blipFill rotWithShape="1">
+          <a:blip r:embed="rId2" cstate="print">
             <a:extLst>
               <a:ext uri="{28A0092B-C50C-407E-A947-70E740481C1C}">
                 <a14:useLocalDpi xmlns:a14="http://schemas.microsoft.com/office/drawing/2010/main" val="0"/>
               </a:ext>
             </a:extLst>
           </a:blip>
-          <a:stretch>
-            <a:fillRect/>
-          </a:stretch>
+          <a:srcRect b="3803"/>
+          <a:stretch/>
         </p:blipFill>
         <p:spPr>
           <a:xfrm>
-            <a:off x="6485174" y="291415"/>
-            <a:ext cx="4868626" cy="6300575"/>
+            <a:off x="2229388" y="1690688"/>
+            <a:ext cx="7733223" cy="4185856"/>
           </a:xfrm>
-          <a:prstGeom prst="rect">
-            <a:avLst/>
-          </a:prstGeom>
         </p:spPr>
       </p:pic>
       <p:sp>
         <p:nvSpPr>
-          <p:cNvPr id="4" name="Номер слайда 3"/>
+          <p:cNvPr id="3" name="Номер слайда 2"/>
           <p:cNvSpPr>
             <a:spLocks noGrp="1"/>
           </p:cNvSpPr>
@@ -5928,7 +5926,7 @@
     </p:spTree>
     <p:extLst>
       <p:ext uri="{BB962C8B-B14F-4D97-AF65-F5344CB8AC3E}">
-        <p14:creationId xmlns:p14="http://schemas.microsoft.com/office/powerpoint/2010/main" val="1125818833"/>
+        <p14:creationId xmlns:p14="http://schemas.microsoft.com/office/powerpoint/2010/main" val="2364807525"/>
       </p:ext>
     </p:extLst>
   </p:cSld>
@@ -6006,8 +6004,8 @@
         </p:nvSpPr>
         <p:spPr>
           <a:xfrm>
-            <a:off x="2103474" y="5879518"/>
-            <a:ext cx="7985051" cy="369332"/>
+            <a:off x="838200" y="1690688"/>
+            <a:ext cx="5058972" cy="646331"/>
           </a:xfrm>
           <a:prstGeom prst="rect">
             <a:avLst/>
@@ -6020,13 +6018,13 @@
           </a:bodyPr>
           <a:lstStyle/>
           <a:p>
-            <a:pPr algn="ctr"/>
+            <a:pPr algn="just"/>
             <a:r>
               <a:rPr lang="ru-RU" dirty="0" smtClean="0">
                 <a:latin typeface="Times New Roman" panose="02020603050405020304" pitchFamily="18" charset="0"/>
                 <a:cs typeface="Times New Roman" panose="02020603050405020304" pitchFamily="18" charset="0"/>
               </a:rPr>
-              <a:t>Административная панель управления</a:t>
+              <a:t>Содержательная страница сгенерированного</a:t>
             </a:r>
             <a:r>
               <a:rPr lang="en-US" dirty="0" smtClean="0">
@@ -6040,21 +6038,25 @@
                 <a:latin typeface="Times New Roman" panose="02020603050405020304" pitchFamily="18" charset="0"/>
                 <a:cs typeface="Times New Roman" panose="02020603050405020304" pitchFamily="18" charset="0"/>
               </a:rPr>
-              <a:t>корпусом нормативных правовых актов</a:t>
-            </a:r>
+              <a:t>проекта договора в формате DOCX</a:t>
+            </a:r>
+            <a:endParaRPr lang="ru-RU" dirty="0">
+              <a:latin typeface="Times New Roman" panose="02020603050405020304" pitchFamily="18" charset="0"/>
+              <a:cs typeface="Times New Roman" panose="02020603050405020304" pitchFamily="18" charset="0"/>
+            </a:endParaRPr>
           </a:p>
         </p:txBody>
       </p:sp>
       <p:pic>
         <p:nvPicPr>
-          <p:cNvPr id="6" name="Рисунок 5"/>
+          <p:cNvPr id="3" name="Рисунок 2"/>
           <p:cNvPicPr>
             <a:picLocks noChangeAspect="1"/>
           </p:cNvPicPr>
           <p:nvPr/>
         </p:nvPicPr>
         <p:blipFill>
-          <a:blip r:embed="rId2" cstate="print">
+          <a:blip r:embed="rId2">
             <a:extLst>
               <a:ext uri="{28A0092B-C50C-407E-A947-70E740481C1C}">
                 <a14:useLocalDpi xmlns:a14="http://schemas.microsoft.com/office/drawing/2010/main" val="0"/>
@@ -6067,8 +6069,8 @@
         </p:blipFill>
         <p:spPr>
           <a:xfrm>
-            <a:off x="2229388" y="1690688"/>
-            <a:ext cx="7733224" cy="4188830"/>
+            <a:off x="6485174" y="291415"/>
+            <a:ext cx="4868626" cy="6300575"/>
           </a:xfrm>
           <a:prstGeom prst="rect">
             <a:avLst/>
@@ -6077,7 +6079,7 @@
       </p:pic>
       <p:sp>
         <p:nvSpPr>
-          <p:cNvPr id="3" name="Номер слайда 2"/>
+          <p:cNvPr id="4" name="Номер слайда 3"/>
           <p:cNvSpPr>
             <a:spLocks noGrp="1"/>
           </p:cNvSpPr>
@@ -6101,7 +6103,7 @@
     </p:spTree>
     <p:extLst>
       <p:ext uri="{BB962C8B-B14F-4D97-AF65-F5344CB8AC3E}">
-        <p14:creationId xmlns:p14="http://schemas.microsoft.com/office/powerpoint/2010/main" val="826703114"/>
+        <p14:creationId xmlns:p14="http://schemas.microsoft.com/office/powerpoint/2010/main" val="1125818833"/>
       </p:ext>
     </p:extLst>
   </p:cSld>
@@ -6179,7 +6181,7 @@
         </p:nvSpPr>
         <p:spPr>
           <a:xfrm>
-            <a:off x="2097732" y="5879518"/>
+            <a:off x="2103474" y="5879518"/>
             <a:ext cx="7985051" cy="369332"/>
           </a:xfrm>
           <a:prstGeom prst="rect">
@@ -6220,7 +6222,7 @@
       </p:sp>
       <p:pic>
         <p:nvPicPr>
-          <p:cNvPr id="4" name="Рисунок 3"/>
+          <p:cNvPr id="6" name="Рисунок 5"/>
           <p:cNvPicPr>
             <a:picLocks noChangeAspect="1"/>
           </p:cNvPicPr>
@@ -6274,7 +6276,7 @@
     </p:spTree>
     <p:extLst>
       <p:ext uri="{BB962C8B-B14F-4D97-AF65-F5344CB8AC3E}">
-        <p14:creationId xmlns:p14="http://schemas.microsoft.com/office/powerpoint/2010/main" val="2897832750"/>
+        <p14:creationId xmlns:p14="http://schemas.microsoft.com/office/powerpoint/2010/main" val="826703114"/>
       </p:ext>
     </p:extLst>
   </p:cSld>
@@ -6318,26 +6320,26 @@
             <p:ph type="title"/>
           </p:nvPr>
         </p:nvSpPr>
-        <p:spPr>
-          <a:xfrm>
-            <a:off x="647700" y="258445"/>
-            <a:ext cx="10515600" cy="1094740"/>
-          </a:xfrm>
-        </p:spPr>
-        <p:txBody>
-          <a:bodyPr>
-            <a:noAutofit/>
-          </a:bodyPr>
-          <a:lstStyle/>
-          <a:p>
-            <a:r>
-              <a:rPr lang="ru-RU" altLang="en-US" sz="4800" dirty="0" smtClean="0">
-                <a:latin typeface="Times New Roman" panose="02020603050405020304" pitchFamily="18" charset="0"/>
-                <a:cs typeface="Times New Roman" panose="02020603050405020304" pitchFamily="18" charset="0"/>
-              </a:rPr>
-              <a:t>Результаты работы</a:t>
-            </a:r>
-            <a:endParaRPr lang="ru-RU" altLang="en-US" sz="4800" dirty="0">
+        <p:spPr/>
+        <p:txBody>
+          <a:bodyPr/>
+          <a:lstStyle/>
+          <a:p>
+            <a:r>
+              <a:rPr lang="ru-RU" dirty="0" smtClean="0">
+                <a:latin typeface="Times New Roman" panose="02020603050405020304" pitchFamily="18" charset="0"/>
+                <a:cs typeface="Times New Roman" panose="02020603050405020304" pitchFamily="18" charset="0"/>
+              </a:rPr>
+              <a:t>Демонстрация </a:t>
+            </a:r>
+            <a:r>
+              <a:rPr lang="en-US" dirty="0" smtClean="0">
+                <a:latin typeface="Times New Roman" panose="02020603050405020304" pitchFamily="18" charset="0"/>
+                <a:cs typeface="Times New Roman" panose="02020603050405020304" pitchFamily="18" charset="0"/>
+              </a:rPr>
+              <a:t>UI</a:t>
+            </a:r>
+            <a:endParaRPr lang="ru-RU" dirty="0">
               <a:latin typeface="Times New Roman" panose="02020603050405020304" pitchFamily="18" charset="0"/>
               <a:cs typeface="Times New Roman" panose="02020603050405020304" pitchFamily="18" charset="0"/>
             </a:endParaRPr>
@@ -6346,20 +6348,14 @@
       </p:sp>
       <p:sp>
         <p:nvSpPr>
-          <p:cNvPr id="6" name="TextBox 5">
-            <a:extLst>
-              <a:ext uri="{FF2B5EF4-FFF2-40B4-BE49-F238E27FC236}">
-                <a16:creationId xmlns="" xmlns:a16="http://schemas.microsoft.com/office/drawing/2014/main" id="{9C1EAA17-F0DF-4F15-9558-5B5F6A368814}"/>
-              </a:ext>
-            </a:extLst>
-          </p:cNvPr>
+          <p:cNvPr id="5" name="TextBox 4"/>
           <p:cNvSpPr txBox="1"/>
           <p:nvPr/>
         </p:nvSpPr>
         <p:spPr>
           <a:xfrm>
-            <a:off x="387991" y="1353185"/>
-            <a:ext cx="11416018" cy="5200000"/>
+            <a:off x="2097732" y="5879518"/>
+            <a:ext cx="7985051" cy="369332"/>
           </a:xfrm>
           <a:prstGeom prst="rect">
             <a:avLst/>
@@ -6367,47 +6363,66 @@
           <a:noFill/>
         </p:spPr>
         <p:txBody>
-          <a:bodyPr wrap="square">
+          <a:bodyPr wrap="square" rtlCol="0">
             <a:spAutoFit/>
           </a:bodyPr>
           <a:lstStyle/>
           <a:p>
-            <a:pPr algn="just"/>
-            <a:r>
-              <a:rPr lang="ru-RU" sz="2800" dirty="0" smtClean="0">
-                <a:latin typeface="Times New Roman" panose="02020603050405020304" pitchFamily="18" charset="0"/>
-                <a:cs typeface="Times New Roman" panose="02020603050405020304" pitchFamily="18" charset="0"/>
-              </a:rPr>
-              <a:t>В ходе выполнения настоящей работы сформирован корпус нормативных правовых актов российского договорного права с реализованным поиском релевантных норм по словесному описанию сделки; спроектирован и реализован интеллектуальный агент, осуществляющий преобразование свободного описания сделки в проект договора и сопровождающие юридические рекомендации со ссылками на статьи нормативных правовых актов.</a:t>
-            </a:r>
-            <a:endParaRPr lang="en-US" sz="2800" dirty="0" smtClean="0">
-              <a:latin typeface="Times New Roman" panose="02020603050405020304" pitchFamily="18" charset="0"/>
-              <a:cs typeface="Times New Roman" panose="02020603050405020304" pitchFamily="18" charset="0"/>
-            </a:endParaRPr>
-          </a:p>
-          <a:p>
-            <a:pPr algn="just"/>
-            <a:r>
-              <a:rPr lang="en-US" sz="2800" dirty="0">
-                <a:latin typeface="Times New Roman" panose="02020603050405020304" pitchFamily="18" charset="0"/>
-                <a:cs typeface="Times New Roman" panose="02020603050405020304" pitchFamily="18" charset="0"/>
-              </a:rPr>
-              <a:t>	</a:t>
-            </a:r>
-            <a:r>
-              <a:rPr lang="ru-RU" sz="2800" dirty="0" smtClean="0">
-                <a:latin typeface="Times New Roman" panose="02020603050405020304" pitchFamily="18" charset="0"/>
-                <a:cs typeface="Times New Roman" panose="02020603050405020304" pitchFamily="18" charset="0"/>
-              </a:rPr>
-              <a:t>Проведена эмпирическая оценка качества поиска норм, по результатам которой обоснован выбор итоговой конфигурации подсистемы поиска; внешняя экспертная апробация подготовленных артефактов с привлечением практикующих юристов подтвердила практическую применимость предложенного подхода.</a:t>
-            </a:r>
-            <a:endParaRPr lang="ru-RU" sz="2800" dirty="0">
-              <a:latin typeface="Times New Roman" panose="02020603050405020304" pitchFamily="18" charset="0"/>
-              <a:cs typeface="Times New Roman" panose="02020603050405020304" pitchFamily="18" charset="0"/>
-            </a:endParaRPr>
-          </a:p>
-        </p:txBody>
-      </p:sp>
+            <a:pPr algn="ctr"/>
+            <a:r>
+              <a:rPr lang="ru-RU" dirty="0" smtClean="0">
+                <a:latin typeface="Times New Roman" panose="02020603050405020304" pitchFamily="18" charset="0"/>
+                <a:cs typeface="Times New Roman" panose="02020603050405020304" pitchFamily="18" charset="0"/>
+              </a:rPr>
+              <a:t>Административная панель управления</a:t>
+            </a:r>
+            <a:r>
+              <a:rPr lang="en-US" dirty="0" smtClean="0">
+                <a:latin typeface="Times New Roman" panose="02020603050405020304" pitchFamily="18" charset="0"/>
+                <a:cs typeface="Times New Roman" panose="02020603050405020304" pitchFamily="18" charset="0"/>
+              </a:rPr>
+              <a:t> </a:t>
+            </a:r>
+            <a:r>
+              <a:rPr lang="ru-RU" dirty="0" smtClean="0">
+                <a:latin typeface="Times New Roman" panose="02020603050405020304" pitchFamily="18" charset="0"/>
+                <a:cs typeface="Times New Roman" panose="02020603050405020304" pitchFamily="18" charset="0"/>
+              </a:rPr>
+              <a:t>корпусом нормативных правовых актов</a:t>
+            </a:r>
+          </a:p>
+        </p:txBody>
+      </p:sp>
+      <p:pic>
+        <p:nvPicPr>
+          <p:cNvPr id="4" name="Рисунок 3"/>
+          <p:cNvPicPr>
+            <a:picLocks noChangeAspect="1"/>
+          </p:cNvPicPr>
+          <p:nvPr/>
+        </p:nvPicPr>
+        <p:blipFill>
+          <a:blip r:embed="rId2" cstate="print">
+            <a:extLst>
+              <a:ext uri="{28A0092B-C50C-407E-A947-70E740481C1C}">
+                <a14:useLocalDpi xmlns:a14="http://schemas.microsoft.com/office/drawing/2010/main" val="0"/>
+              </a:ext>
+            </a:extLst>
+          </a:blip>
+          <a:stretch>
+            <a:fillRect/>
+          </a:stretch>
+        </p:blipFill>
+        <p:spPr>
+          <a:xfrm>
+            <a:off x="2229388" y="1690688"/>
+            <a:ext cx="7733224" cy="4188830"/>
+          </a:xfrm>
+          <a:prstGeom prst="rect">
+            <a:avLst/>
+          </a:prstGeom>
+        </p:spPr>
+      </p:pic>
       <p:sp>
         <p:nvSpPr>
           <p:cNvPr id="3" name="Номер слайда 2"/>
@@ -6434,7 +6449,7 @@
     </p:spTree>
     <p:extLst>
       <p:ext uri="{BB962C8B-B14F-4D97-AF65-F5344CB8AC3E}">
-        <p14:creationId xmlns:p14="http://schemas.microsoft.com/office/powerpoint/2010/main" val="2645754192"/>
+        <p14:creationId xmlns:p14="http://schemas.microsoft.com/office/powerpoint/2010/main" val="2897832750"/>
       </p:ext>
     </p:extLst>
   </p:cSld>
@@ -6478,70 +6493,96 @@
             <p:ph type="title"/>
           </p:nvPr>
         </p:nvSpPr>
-        <p:spPr/>
+        <p:spPr>
+          <a:xfrm>
+            <a:off x="647700" y="258445"/>
+            <a:ext cx="10515600" cy="1094740"/>
+          </a:xfrm>
+        </p:spPr>
         <p:txBody>
           <a:bodyPr>
-            <a:normAutofit/>
+            <a:noAutofit/>
           </a:bodyPr>
           <a:lstStyle/>
           <a:p>
             <a:r>
-              <a:rPr lang="en-US" sz="4800" dirty="0" smtClean="0">
-                <a:latin typeface="Times New Roman" panose="02020603050405020304" pitchFamily="18" charset="0"/>
-                <a:cs typeface="Times New Roman" panose="02020603050405020304" pitchFamily="18" charset="0"/>
-              </a:rPr>
-              <a:t>QR-</a:t>
-            </a:r>
-            <a:r>
-              <a:rPr lang="ru-RU" sz="4800" dirty="0" smtClean="0">
-                <a:latin typeface="Times New Roman" panose="02020603050405020304" pitchFamily="18" charset="0"/>
-                <a:cs typeface="Times New Roman" panose="02020603050405020304" pitchFamily="18" charset="0"/>
-              </a:rPr>
-              <a:t>код </a:t>
-            </a:r>
-            <a:r>
-              <a:rPr lang="ru-RU" sz="4800" dirty="0" err="1" smtClean="0">
-                <a:latin typeface="Times New Roman" panose="02020603050405020304" pitchFamily="18" charset="0"/>
-                <a:cs typeface="Times New Roman" panose="02020603050405020304" pitchFamily="18" charset="0"/>
-              </a:rPr>
-              <a:t>репозитория</a:t>
-            </a:r>
-            <a:endParaRPr lang="ru-RU" sz="4800" dirty="0">
+              <a:rPr lang="ru-RU" altLang="en-US" sz="4800" dirty="0" smtClean="0">
+                <a:latin typeface="Times New Roman" panose="02020603050405020304" pitchFamily="18" charset="0"/>
+                <a:cs typeface="Times New Roman" panose="02020603050405020304" pitchFamily="18" charset="0"/>
+              </a:rPr>
+              <a:t>Результаты работы</a:t>
+            </a:r>
+            <a:endParaRPr lang="ru-RU" altLang="en-US" sz="4800" dirty="0">
               <a:latin typeface="Times New Roman" panose="02020603050405020304" pitchFamily="18" charset="0"/>
               <a:cs typeface="Times New Roman" panose="02020603050405020304" pitchFamily="18" charset="0"/>
             </a:endParaRPr>
           </a:p>
         </p:txBody>
       </p:sp>
-      <p:pic>
-        <p:nvPicPr>
-          <p:cNvPr id="4" name="Объект 3"/>
-          <p:cNvPicPr>
-            <a:picLocks noGrp="1" noChangeAspect="1"/>
-          </p:cNvPicPr>
-          <p:nvPr>
-            <p:ph idx="1"/>
-          </p:nvPr>
-        </p:nvPicPr>
-        <p:blipFill>
-          <a:blip r:embed="rId2">
+      <p:sp>
+        <p:nvSpPr>
+          <p:cNvPr id="6" name="TextBox 5">
             <a:extLst>
-              <a:ext uri="{28A0092B-C50C-407E-A947-70E740481C1C}">
-                <a14:useLocalDpi xmlns:a14="http://schemas.microsoft.com/office/drawing/2010/main" val="0"/>
+              <a:ext uri="{FF2B5EF4-FFF2-40B4-BE49-F238E27FC236}">
+                <a16:creationId xmlns="" xmlns:a16="http://schemas.microsoft.com/office/drawing/2014/main" id="{9C1EAA17-F0DF-4F15-9558-5B5F6A368814}"/>
               </a:ext>
             </a:extLst>
-          </a:blip>
-          <a:stretch>
-            <a:fillRect/>
-          </a:stretch>
-        </p:blipFill>
+          </p:cNvPr>
+          <p:cNvSpPr txBox="1"/>
+          <p:nvPr/>
+        </p:nvSpPr>
         <p:spPr>
           <a:xfrm>
-            <a:off x="3920331" y="1825625"/>
-            <a:ext cx="4351338" cy="4351338"/>
+            <a:off x="387991" y="1353185"/>
+            <a:ext cx="11416018" cy="5200000"/>
           </a:xfrm>
+          <a:prstGeom prst="rect">
+            <a:avLst/>
+          </a:prstGeom>
+          <a:noFill/>
         </p:spPr>
-      </p:pic>
+        <p:txBody>
+          <a:bodyPr wrap="square">
+            <a:spAutoFit/>
+          </a:bodyPr>
+          <a:lstStyle/>
+          <a:p>
+            <a:pPr algn="just"/>
+            <a:r>
+              <a:rPr lang="ru-RU" sz="2800" dirty="0" smtClean="0">
+                <a:latin typeface="Times New Roman" panose="02020603050405020304" pitchFamily="18" charset="0"/>
+                <a:cs typeface="Times New Roman" panose="02020603050405020304" pitchFamily="18" charset="0"/>
+              </a:rPr>
+              <a:t>В ходе выполнения настоящей работы сформирован корпус нормативных правовых актов российского договорного права с реализованным поиском релевантных норм по словесному описанию сделки; спроектирован и реализован интеллектуальный агент, осуществляющий преобразование свободного описания сделки в проект договора и сопровождающие юридические рекомендации со ссылками на статьи нормативных правовых актов.</a:t>
+            </a:r>
+            <a:endParaRPr lang="en-US" sz="2800" dirty="0" smtClean="0">
+              <a:latin typeface="Times New Roman" panose="02020603050405020304" pitchFamily="18" charset="0"/>
+              <a:cs typeface="Times New Roman" panose="02020603050405020304" pitchFamily="18" charset="0"/>
+            </a:endParaRPr>
+          </a:p>
+          <a:p>
+            <a:pPr algn="just"/>
+            <a:r>
+              <a:rPr lang="en-US" sz="2800" dirty="0">
+                <a:latin typeface="Times New Roman" panose="02020603050405020304" pitchFamily="18" charset="0"/>
+                <a:cs typeface="Times New Roman" panose="02020603050405020304" pitchFamily="18" charset="0"/>
+              </a:rPr>
+              <a:t>	</a:t>
+            </a:r>
+            <a:r>
+              <a:rPr lang="ru-RU" sz="2800" dirty="0" smtClean="0">
+                <a:latin typeface="Times New Roman" panose="02020603050405020304" pitchFamily="18" charset="0"/>
+                <a:cs typeface="Times New Roman" panose="02020603050405020304" pitchFamily="18" charset="0"/>
+              </a:rPr>
+              <a:t>Проведена эмпирическая оценка качества поиска норм, по результатам которой обоснован выбор итоговой конфигурации подсистемы поиска; внешняя экспертная апробация подготовленных артефактов с привлечением практикующих юристов подтвердила практическую применимость предложенного подхода.</a:t>
+            </a:r>
+            <a:endParaRPr lang="ru-RU" sz="2800" dirty="0">
+              <a:latin typeface="Times New Roman" panose="02020603050405020304" pitchFamily="18" charset="0"/>
+              <a:cs typeface="Times New Roman" panose="02020603050405020304" pitchFamily="18" charset="0"/>
+            </a:endParaRPr>
+          </a:p>
+        </p:txBody>
+      </p:sp>
       <p:sp>
         <p:nvSpPr>
           <p:cNvPr id="3" name="Номер слайда 2"/>
@@ -6568,7 +6609,7 @@
     </p:spTree>
     <p:extLst>
       <p:ext uri="{BB962C8B-B14F-4D97-AF65-F5344CB8AC3E}">
-        <p14:creationId xmlns:p14="http://schemas.microsoft.com/office/powerpoint/2010/main" val="2224594822"/>
+        <p14:creationId xmlns:p14="http://schemas.microsoft.com/office/powerpoint/2010/main" val="2645754192"/>
       </p:ext>
     </p:extLst>
   </p:cSld>
@@ -6714,6 +6755,147 @@
     <p:extLst>
       <p:ext uri="{BB962C8B-B14F-4D97-AF65-F5344CB8AC3E}">
         <p14:creationId xmlns:p14="http://schemas.microsoft.com/office/powerpoint/2010/main" val="974967338"/>
+      </p:ext>
+    </p:extLst>
+  </p:cSld>
+  <p:clrMapOvr>
+    <a:masterClrMapping/>
+  </p:clrMapOvr>
+  <p:timing>
+    <p:tnLst>
+      <p:par>
+        <p:cTn id="1" dur="indefinite" restart="never" nodeType="tmRoot"/>
+      </p:par>
+    </p:tnLst>
+  </p:timing>
+</p:sld>
+</file>
+
+<file path=ppt/slides/slide20.xml><?xml version="1.0" encoding="utf-8"?>
+<p:sld xmlns:a="http://schemas.openxmlformats.org/drawingml/2006/main" xmlns:r="http://schemas.openxmlformats.org/officeDocument/2006/relationships" xmlns:p="http://schemas.openxmlformats.org/presentationml/2006/main">
+  <p:cSld>
+    <p:spTree>
+      <p:nvGrpSpPr>
+        <p:cNvPr id="1" name=""/>
+        <p:cNvGrpSpPr/>
+        <p:nvPr/>
+      </p:nvGrpSpPr>
+      <p:grpSpPr>
+        <a:xfrm>
+          <a:off x="0" y="0"/>
+          <a:ext cx="0" cy="0"/>
+          <a:chOff x="0" y="0"/>
+          <a:chExt cx="0" cy="0"/>
+        </a:xfrm>
+      </p:grpSpPr>
+      <p:sp>
+        <p:nvSpPr>
+          <p:cNvPr id="2" name="Заголовок 1"/>
+          <p:cNvSpPr>
+            <a:spLocks noGrp="1"/>
+          </p:cNvSpPr>
+          <p:nvPr>
+            <p:ph type="title"/>
+          </p:nvPr>
+        </p:nvSpPr>
+        <p:spPr/>
+        <p:txBody>
+          <a:bodyPr>
+            <a:normAutofit/>
+          </a:bodyPr>
+          <a:lstStyle/>
+          <a:p>
+            <a:r>
+              <a:rPr lang="en-US" sz="4800" dirty="0" smtClean="0">
+                <a:latin typeface="Times New Roman" panose="02020603050405020304" pitchFamily="18" charset="0"/>
+                <a:cs typeface="Times New Roman" panose="02020603050405020304" pitchFamily="18" charset="0"/>
+              </a:rPr>
+              <a:t>QR-</a:t>
+            </a:r>
+            <a:r>
+              <a:rPr lang="ru-RU" sz="4800" dirty="0" smtClean="0">
+                <a:latin typeface="Times New Roman" panose="02020603050405020304" pitchFamily="18" charset="0"/>
+                <a:cs typeface="Times New Roman" panose="02020603050405020304" pitchFamily="18" charset="0"/>
+              </a:rPr>
+              <a:t>код </a:t>
+            </a:r>
+            <a:r>
+              <a:rPr lang="ru-RU" sz="4800" dirty="0" err="1" smtClean="0">
+                <a:latin typeface="Times New Roman" panose="02020603050405020304" pitchFamily="18" charset="0"/>
+                <a:cs typeface="Times New Roman" panose="02020603050405020304" pitchFamily="18" charset="0"/>
+              </a:rPr>
+              <a:t>репозитория</a:t>
+            </a:r>
+            <a:r>
+              <a:rPr lang="ru-RU" sz="4800" dirty="0" smtClean="0">
+                <a:latin typeface="Times New Roman" panose="02020603050405020304" pitchFamily="18" charset="0"/>
+                <a:cs typeface="Times New Roman" panose="02020603050405020304" pitchFamily="18" charset="0"/>
+              </a:rPr>
+              <a:t> с кодом</a:t>
+            </a:r>
+            <a:endParaRPr lang="ru-RU" sz="4800" dirty="0">
+              <a:latin typeface="Times New Roman" panose="02020603050405020304" pitchFamily="18" charset="0"/>
+              <a:cs typeface="Times New Roman" panose="02020603050405020304" pitchFamily="18" charset="0"/>
+            </a:endParaRPr>
+          </a:p>
+        </p:txBody>
+      </p:sp>
+      <p:pic>
+        <p:nvPicPr>
+          <p:cNvPr id="4" name="Объект 3"/>
+          <p:cNvPicPr>
+            <a:picLocks noGrp="1" noChangeAspect="1"/>
+          </p:cNvPicPr>
+          <p:nvPr>
+            <p:ph idx="1"/>
+          </p:nvPr>
+        </p:nvPicPr>
+        <p:blipFill>
+          <a:blip r:embed="rId2">
+            <a:extLst>
+              <a:ext uri="{28A0092B-C50C-407E-A947-70E740481C1C}">
+                <a14:useLocalDpi xmlns:a14="http://schemas.microsoft.com/office/drawing/2010/main" val="0"/>
+              </a:ext>
+            </a:extLst>
+          </a:blip>
+          <a:stretch>
+            <a:fillRect/>
+          </a:stretch>
+        </p:blipFill>
+        <p:spPr>
+          <a:xfrm>
+            <a:off x="3920331" y="1825625"/>
+            <a:ext cx="4351338" cy="4351338"/>
+          </a:xfrm>
+        </p:spPr>
+      </p:pic>
+      <p:sp>
+        <p:nvSpPr>
+          <p:cNvPr id="3" name="Номер слайда 2"/>
+          <p:cNvSpPr>
+            <a:spLocks noGrp="1"/>
+          </p:cNvSpPr>
+          <p:nvPr>
+            <p:ph type="sldNum" sz="quarter" idx="12"/>
+          </p:nvPr>
+        </p:nvSpPr>
+        <p:spPr/>
+        <p:txBody>
+          <a:bodyPr/>
+          <a:lstStyle/>
+          <a:p>
+            <a:fld id="{65A3789A-D406-449F-860F-117B58A45219}" type="slidenum">
+              <a:rPr lang="ru-RU" smtClean="0"/>
+              <a:t>20</a:t>
+            </a:fld>
+            <a:endParaRPr lang="ru-RU"/>
+          </a:p>
+        </p:txBody>
+      </p:sp>
+    </p:spTree>
+    <p:extLst>
+      <p:ext uri="{BB962C8B-B14F-4D97-AF65-F5344CB8AC3E}">
+        <p14:creationId xmlns:p14="http://schemas.microsoft.com/office/powerpoint/2010/main" val="2224594822"/>
       </p:ext>
     </p:extLst>
   </p:cSld>
@@ -6970,7 +7152,7 @@
         <p:spPr/>
         <p:txBody>
           <a:bodyPr>
-            <a:normAutofit/>
+            <a:noAutofit/>
           </a:bodyPr>
           <a:lstStyle/>
           <a:p>
@@ -6979,7 +7161,21 @@
                 <a:latin typeface="Times New Roman" panose="02020603050405020304" pitchFamily="18" charset="0"/>
                 <a:cs typeface="Times New Roman" panose="02020603050405020304" pitchFamily="18" charset="0"/>
               </a:rPr>
-              <a:t>Модели и </a:t>
+              <a:t>Используемые м</a:t>
+            </a:r>
+            <a:r>
+              <a:rPr lang="ru-RU" sz="4800" dirty="0" smtClean="0">
+                <a:latin typeface="Times New Roman" panose="02020603050405020304" pitchFamily="18" charset="0"/>
+                <a:cs typeface="Times New Roman" panose="02020603050405020304" pitchFamily="18" charset="0"/>
+              </a:rPr>
+              <a:t>одели </a:t>
+            </a:r>
+            <a:r>
+              <a:rPr lang="ru-RU" sz="4800" dirty="0" smtClean="0">
+                <a:latin typeface="Times New Roman" panose="02020603050405020304" pitchFamily="18" charset="0"/>
+                <a:cs typeface="Times New Roman" panose="02020603050405020304" pitchFamily="18" charset="0"/>
+              </a:rPr>
+              <a:t>и </a:t>
             </a:r>
             <a:r>
               <a:rPr lang="ru-RU" sz="4800" dirty="0" err="1" smtClean="0">
@@ -7003,7 +7199,7 @@
         </p:nvSpPr>
         <p:spPr>
           <a:xfrm>
-            <a:off x="500000" y="1500000"/>
+            <a:off x="492000" y="1500000"/>
             <a:ext cx="5400000" cy="5000000"/>
           </a:xfrm>
           <a:prstGeom prst="rect">
@@ -7038,8 +7234,19 @@
                 <a:latin typeface="Times New Roman" panose="02020603050405020304" pitchFamily="18" charset="0"/>
                 <a:cs typeface="Times New Roman" panose="02020603050405020304" pitchFamily="18" charset="0"/>
               </a:rPr>
-              <a:t>Инференс LLM: Gemma 4: 31b</a:t>
-            </a:r>
+              <a:t>Инференс LLM: Gemma 4: </a:t>
+            </a:r>
+            <a:r>
+              <a:rPr lang="ru-RU" sz="2400" dirty="0" smtClean="0">
+                <a:latin typeface="Times New Roman" panose="02020603050405020304" pitchFamily="18" charset="0"/>
+                <a:cs typeface="Times New Roman" panose="02020603050405020304" pitchFamily="18" charset="0"/>
+              </a:rPr>
+              <a:t>31b</a:t>
+            </a:r>
+            <a:endParaRPr lang="ru-RU" sz="2400" dirty="0">
+              <a:latin typeface="Times New Roman" panose="02020603050405020304" pitchFamily="18" charset="0"/>
+              <a:cs typeface="Times New Roman" panose="02020603050405020304" pitchFamily="18" charset="0"/>
+            </a:endParaRPr>
           </a:p>
           <a:p>
             <a:pPr marL="457200" indent="-457200">
@@ -7103,6 +7310,7 @@
             </a:r>
           </a:p>
           <a:p>
+            <a:pPr algn="just"/>
             <a:r>
               <a:rPr lang="ru-RU" sz="2400" dirty="0">
                 <a:latin typeface="Times New Roman" panose="02020603050405020304" pitchFamily="18" charset="0"/>
@@ -7822,35 +8030,6 @@
           <a:chExt cx="0" cy="0"/>
         </a:xfrm>
       </p:grpSpPr>
-      <p:sp>
-        <p:nvSpPr>
-          <p:cNvPr id="2" name="Заголовок 1"/>
-          <p:cNvSpPr>
-            <a:spLocks noGrp="1"/>
-          </p:cNvSpPr>
-          <p:nvPr>
-            <p:ph type="title"/>
-          </p:nvPr>
-        </p:nvSpPr>
-        <p:spPr/>
-        <p:txBody>
-          <a:bodyPr/>
-          <a:lstStyle/>
-          <a:p>
-            <a:r>
-              <a:rPr lang="ru-RU" dirty="0" smtClean="0">
-                <a:latin typeface="Times New Roman" panose="02020603050405020304" pitchFamily="18" charset="0"/>
-                <a:cs typeface="Times New Roman" panose="02020603050405020304" pitchFamily="18" charset="0"/>
-              </a:rPr>
-              <a:t>Граф состояний агента</a:t>
-            </a:r>
-            <a:endParaRPr lang="ru-RU" dirty="0">
-              <a:latin typeface="Times New Roman" panose="02020603050405020304" pitchFamily="18" charset="0"/>
-              <a:cs typeface="Times New Roman" panose="02020603050405020304" pitchFamily="18" charset="0"/>
-            </a:endParaRPr>
-          </a:p>
-        </p:txBody>
-      </p:sp>
       <p:pic>
         <p:nvPicPr>
           <p:cNvPr id="4" name="Объект 3"/>
@@ -7869,8 +8048,8 @@
         </p:blipFill>
         <p:spPr>
           <a:xfrm>
-            <a:off x="1031000" y="1370000"/>
-            <a:ext cx="10130000" cy="5470000"/>
+            <a:off x="167718" y="365125"/>
+            <a:ext cx="12024282" cy="6492875"/>
           </a:xfrm>
           <a:prstGeom prst="rect">
             <a:avLst/>
@@ -7897,6 +8076,42 @@
               <a:t>7</a:t>
             </a:fld>
             <a:endParaRPr lang="ru-RU"/>
+          </a:p>
+        </p:txBody>
+      </p:sp>
+      <p:sp>
+        <p:nvSpPr>
+          <p:cNvPr id="2" name="Заголовок 1"/>
+          <p:cNvSpPr>
+            <a:spLocks noGrp="1"/>
+          </p:cNvSpPr>
+          <p:nvPr>
+            <p:ph type="title"/>
+          </p:nvPr>
+        </p:nvSpPr>
+        <p:spPr>
+          <a:xfrm>
+            <a:off x="0" y="0"/>
+            <a:ext cx="10515600" cy="645459"/>
+          </a:xfrm>
+        </p:spPr>
+        <p:txBody>
+          <a:bodyPr>
+            <a:normAutofit fontScale="90000"/>
+          </a:bodyPr>
+          <a:lstStyle/>
+          <a:p>
+            <a:r>
+              <a:rPr lang="ru-RU" dirty="0" smtClean="0">
+                <a:latin typeface="Times New Roman" panose="02020603050405020304" pitchFamily="18" charset="0"/>
+                <a:cs typeface="Times New Roman" panose="02020603050405020304" pitchFamily="18" charset="0"/>
+              </a:rPr>
+              <a:t>Граф состояний агента</a:t>
+            </a:r>
+            <a:endParaRPr lang="ru-RU" dirty="0">
+              <a:latin typeface="Times New Roman" panose="02020603050405020304" pitchFamily="18" charset="0"/>
+              <a:cs typeface="Times New Roman" panose="02020603050405020304" pitchFamily="18" charset="0"/>
+            </a:endParaRPr>
           </a:p>
         </p:txBody>
       </p:sp>
@@ -7957,8 +8172,19 @@
                 <a:latin typeface="Times New Roman" panose="02020603050405020304" pitchFamily="18" charset="0"/>
                 <a:cs typeface="Times New Roman" panose="02020603050405020304" pitchFamily="18" charset="0"/>
               </a:rPr>
-              <a:t>Подсистема RAG: двухступенчатый поиск</a:t>
-            </a:r>
+              <a:t>Подсистема RAG: </a:t>
+            </a:r>
+            <a:r>
+              <a:rPr lang="ru-RU" dirty="0" smtClean="0">
+                <a:latin typeface="Times New Roman" panose="02020603050405020304" pitchFamily="18" charset="0"/>
+                <a:cs typeface="Times New Roman" panose="02020603050405020304" pitchFamily="18" charset="0"/>
+              </a:rPr>
+              <a:t>поиск</a:t>
+            </a:r>
+            <a:endParaRPr lang="ru-RU" dirty="0">
+              <a:latin typeface="Times New Roman" panose="02020603050405020304" pitchFamily="18" charset="0"/>
+              <a:cs typeface="Times New Roman" panose="02020603050405020304" pitchFamily="18" charset="0"/>
+            </a:endParaRPr>
           </a:p>
         </p:txBody>
       </p:sp>
@@ -7970,7 +8196,7 @@
         </p:nvSpPr>
         <p:spPr>
           <a:xfrm>
-            <a:off x="400000" y="1800000"/>
+            <a:off x="500000" y="1800000"/>
             <a:ext cx="2400000" cy="1500000"/>
           </a:xfrm>
           <a:prstGeom prst="roundRect">
@@ -7991,20 +8217,13 @@
           <a:p>
             <a:pPr algn="ctr"/>
             <a:r>
-              <a:rPr lang="ru-RU" sz="2000" b="1" dirty="0">
-                <a:latin typeface="Times New Roman" panose="02020603050405020304" pitchFamily="18" charset="0"/>
-                <a:cs typeface="Times New Roman" panose="02020603050405020304" pitchFamily="18" charset="0"/>
-              </a:rPr>
-              <a:t>1. </a:t>
-            </a:r>
-            <a:r>
               <a:rPr lang="ru-RU" sz="2000" b="1" dirty="0" err="1" smtClean="0">
                 <a:latin typeface="Times New Roman" panose="02020603050405020304" pitchFamily="18" charset="0"/>
                 <a:cs typeface="Times New Roman" panose="02020603050405020304" pitchFamily="18" charset="0"/>
               </a:rPr>
               <a:t>Эмбеддер</a:t>
             </a:r>
-            <a:endParaRPr lang="ru-RU" sz="2000" b="1" dirty="0">
+            <a:endParaRPr lang="en-US" sz="2000" b="1" dirty="0" smtClean="0">
               <a:latin typeface="Times New Roman" panose="02020603050405020304" pitchFamily="18" charset="0"/>
               <a:cs typeface="Times New Roman" panose="02020603050405020304" pitchFamily="18" charset="0"/>
             </a:endParaRPr>
@@ -8012,28 +8231,25 @@
           <a:p>
             <a:pPr algn="ctr"/>
             <a:r>
+              <a:rPr lang="ru-RU" sz="1600" dirty="0" err="1" smtClean="0">
+                <a:latin typeface="Times New Roman" panose="02020603050405020304" pitchFamily="18" charset="0"/>
+                <a:cs typeface="Times New Roman" panose="02020603050405020304" pitchFamily="18" charset="0"/>
+              </a:rPr>
+              <a:t>Giga-Embeddings</a:t>
+            </a:r>
+            <a:endParaRPr lang="ru-RU" sz="1600" dirty="0">
+              <a:latin typeface="Times New Roman" panose="02020603050405020304" pitchFamily="18" charset="0"/>
+              <a:cs typeface="Times New Roman" panose="02020603050405020304" pitchFamily="18" charset="0"/>
+            </a:endParaRPr>
+          </a:p>
+          <a:p>
+            <a:pPr algn="ctr"/>
+            <a:r>
               <a:rPr lang="ru-RU" sz="1600" dirty="0">
                 <a:latin typeface="Times New Roman" panose="02020603050405020304" pitchFamily="18" charset="0"/>
                 <a:cs typeface="Times New Roman" panose="02020603050405020304" pitchFamily="18" charset="0"/>
               </a:rPr>
-              <a:t>Giga-Embeddings</a:t>
-            </a:r>
-          </a:p>
-          <a:p>
-            <a:pPr algn="ctr"/>
-            <a:r>
-              <a:rPr lang="en-US" sz="1600" dirty="0">
-                <a:latin typeface="Times New Roman" panose="02020603050405020304" pitchFamily="18" charset="0"/>
-                <a:cs typeface="Times New Roman" panose="02020603050405020304" pitchFamily="18" charset="0"/>
-              </a:rPr>
-              <a:t>top-80</a:t>
-            </a:r>
-            <a:r>
-              <a:rPr lang="ru-RU" sz="1600" dirty="0" smtClean="0">
-                <a:latin typeface="Times New Roman" panose="02020603050405020304" pitchFamily="18" charset="0"/>
-                <a:cs typeface="Times New Roman" panose="02020603050405020304" pitchFamily="18" charset="0"/>
-              </a:rPr>
-              <a:t> </a:t>
+              <a:t>top-80 </a:t>
             </a:r>
             <a:r>
               <a:rPr lang="ru-RU" sz="1600" dirty="0">
@@ -8053,8 +8269,8 @@
         </p:nvSpPr>
         <p:spPr>
           <a:xfrm>
-            <a:off x="2850000" y="2400000"/>
-            <a:ext cx="600000" cy="300000"/>
+            <a:off x="2950000" y="2400000"/>
+            <a:ext cx="345224" cy="300000"/>
           </a:xfrm>
           <a:prstGeom prst="rightArrow">
             <a:avLst/>
@@ -8082,8 +8298,8 @@
         </p:nvSpPr>
         <p:spPr>
           <a:xfrm>
-            <a:off x="3500000" y="1800000"/>
-            <a:ext cx="2400000" cy="1500000"/>
+            <a:off x="3345224" y="1800000"/>
+            <a:ext cx="2654776" cy="1500000"/>
           </a:xfrm>
           <a:prstGeom prst="roundRect">
             <a:avLst/>
@@ -8103,72 +8319,75 @@
           <a:p>
             <a:pPr algn="ctr"/>
             <a:r>
-              <a:rPr lang="ru-RU" sz="2000" b="1" dirty="0">
-                <a:latin typeface="Times New Roman" panose="02020603050405020304" pitchFamily="18" charset="0"/>
-                <a:cs typeface="Times New Roman" panose="02020603050405020304" pitchFamily="18" charset="0"/>
-              </a:rPr>
-              <a:t>2. Реранкер</a:t>
-            </a:r>
-          </a:p>
-          <a:p>
-            <a:pPr algn="ctr"/>
-            <a:r>
-              <a:rPr lang="ru-RU" sz="1600" dirty="0">
-                <a:latin typeface="Times New Roman" panose="02020603050405020304" pitchFamily="18" charset="0"/>
-                <a:cs typeface="Times New Roman" panose="02020603050405020304" pitchFamily="18" charset="0"/>
-              </a:rPr>
-              <a:t>Qwen3-Reranker-0.6B</a:t>
-            </a:r>
-          </a:p>
-          <a:p>
-            <a:pPr algn="ctr"/>
-            <a:r>
-              <a:rPr lang="en-US" sz="1600" dirty="0" err="1" smtClean="0">
-                <a:latin typeface="Times New Roman" panose="02020603050405020304" pitchFamily="18" charset="0"/>
-                <a:cs typeface="Times New Roman" panose="02020603050405020304" pitchFamily="18" charset="0"/>
-              </a:rPr>
-              <a:t>reranking</a:t>
-            </a:r>
-            <a:r>
-              <a:rPr lang="ru-RU" sz="1600" dirty="0" smtClean="0">
-                <a:latin typeface="Times New Roman" panose="02020603050405020304" pitchFamily="18" charset="0"/>
-                <a:cs typeface="Times New Roman" panose="02020603050405020304" pitchFamily="18" charset="0"/>
-              </a:rPr>
-              <a:t> top-30</a:t>
-            </a:r>
-            <a:endParaRPr lang="ru-RU" sz="1600" dirty="0">
+              <a:rPr lang="ru-RU" sz="2000" b="1" dirty="0" err="1" smtClean="0">
+                <a:latin typeface="Times New Roman" panose="02020603050405020304" pitchFamily="18" charset="0"/>
+                <a:cs typeface="Times New Roman" panose="02020603050405020304" pitchFamily="18" charset="0"/>
+              </a:rPr>
+              <a:t>Реранкер</a:t>
+            </a:r>
+            <a:endParaRPr lang="ru-RU" sz="2000" b="1" dirty="0">
               <a:latin typeface="Times New Roman" panose="02020603050405020304" pitchFamily="18" charset="0"/>
               <a:cs typeface="Times New Roman" panose="02020603050405020304" pitchFamily="18" charset="0"/>
             </a:endParaRPr>
           </a:p>
-        </p:txBody>
-      </p:sp>
-      <p:sp>
-        <p:nvSpPr>
-          <p:cNvPr id="23" name="Arrow2"/>
-          <p:cNvSpPr/>
-          <p:nvPr/>
-        </p:nvSpPr>
-        <p:spPr>
-          <a:xfrm>
-            <a:off x="5950000" y="2400000"/>
-            <a:ext cx="600000" cy="300000"/>
-          </a:xfrm>
-          <a:prstGeom prst="rightArrow">
-            <a:avLst/>
-          </a:prstGeom>
-          <a:solidFill>
-            <a:srgbClr val="808080"/>
-          </a:solidFill>
-          <a:ln>
-            <a:noFill/>
-          </a:ln>
-        </p:spPr>
-        <p:txBody>
-          <a:bodyPr/>
-          <a:lstStyle/>
-          <a:p>
-            <a:endParaRPr/>
+          <a:p>
+            <a:pPr algn="ctr"/>
+            <a:r>
+              <a:rPr lang="ru-RU" dirty="0">
+                <a:latin typeface="Times New Roman" panose="02020603050405020304" pitchFamily="18" charset="0"/>
+                <a:cs typeface="Times New Roman" panose="02020603050405020304" pitchFamily="18" charset="0"/>
+              </a:rPr>
+              <a:t>Qwen3-Reranker-0.6B</a:t>
+            </a:r>
+          </a:p>
+          <a:p>
+            <a:pPr algn="ctr"/>
+            <a:r>
+              <a:rPr lang="en-US" dirty="0" err="1">
+                <a:latin typeface="Times New Roman" panose="02020603050405020304" pitchFamily="18" charset="0"/>
+                <a:cs typeface="Times New Roman" panose="02020603050405020304" pitchFamily="18" charset="0"/>
+              </a:rPr>
+              <a:t>r</a:t>
+            </a:r>
+            <a:r>
+              <a:rPr lang="en-US" dirty="0" err="1" smtClean="0">
+                <a:latin typeface="Times New Roman" panose="02020603050405020304" pitchFamily="18" charset="0"/>
+                <a:cs typeface="Times New Roman" panose="02020603050405020304" pitchFamily="18" charset="0"/>
+              </a:rPr>
+              <a:t>eranking</a:t>
+            </a:r>
+            <a:r>
+              <a:rPr lang="en-US" dirty="0" smtClean="0">
+                <a:latin typeface="Times New Roman" panose="02020603050405020304" pitchFamily="18" charset="0"/>
+                <a:cs typeface="Times New Roman" panose="02020603050405020304" pitchFamily="18" charset="0"/>
+              </a:rPr>
+              <a:t> </a:t>
+            </a:r>
+            <a:r>
+              <a:rPr lang="ru-RU" dirty="0" err="1" smtClean="0">
+                <a:latin typeface="Times New Roman" panose="02020603050405020304" pitchFamily="18" charset="0"/>
+                <a:cs typeface="Times New Roman" panose="02020603050405020304" pitchFamily="18" charset="0"/>
+              </a:rPr>
+              <a:t>top</a:t>
+            </a:r>
+            <a:r>
+              <a:rPr lang="ru-RU" dirty="0" smtClean="0">
+                <a:latin typeface="Times New Roman" panose="02020603050405020304" pitchFamily="18" charset="0"/>
+                <a:cs typeface="Times New Roman" panose="02020603050405020304" pitchFamily="18" charset="0"/>
+              </a:rPr>
+              <a:t>-</a:t>
+            </a:r>
+            <a:r>
+              <a:rPr lang="en-US" dirty="0" smtClean="0">
+                <a:latin typeface="Times New Roman" panose="02020603050405020304" pitchFamily="18" charset="0"/>
+                <a:cs typeface="Times New Roman" panose="02020603050405020304" pitchFamily="18" charset="0"/>
+              </a:rPr>
+              <a:t>30</a:t>
+            </a:r>
+            <a:endParaRPr lang="ru-RU" dirty="0">
+              <a:latin typeface="Times New Roman" panose="02020603050405020304" pitchFamily="18" charset="0"/>
+              <a:cs typeface="Times New Roman" panose="02020603050405020304" pitchFamily="18" charset="0"/>
+            </a:endParaRPr>
           </a:p>
         </p:txBody>
       </p:sp>
@@ -8180,7 +8399,7 @@
         </p:nvSpPr>
         <p:spPr>
           <a:xfrm>
-            <a:off x="6600000" y="1800000"/>
+            <a:off x="6445224" y="1800000"/>
             <a:ext cx="2400000" cy="1500000"/>
           </a:xfrm>
           <a:prstGeom prst="roundRect">
@@ -8201,62 +8420,40 @@
           <a:p>
             <a:pPr algn="ctr"/>
             <a:r>
-              <a:rPr lang="ru-RU" sz="2000" b="1" dirty="0">
-                <a:latin typeface="Times New Roman" panose="02020603050405020304" pitchFamily="18" charset="0"/>
-                <a:cs typeface="Times New Roman" panose="02020603050405020304" pitchFamily="18" charset="0"/>
-              </a:rPr>
-              <a:t>3. LLM-фильтр</a:t>
-            </a:r>
-          </a:p>
-          <a:p>
-            <a:pPr algn="ctr"/>
-            <a:r>
-              <a:rPr lang="ru-RU" sz="1600" dirty="0">
-                <a:latin typeface="Times New Roman" panose="02020603050405020304" pitchFamily="18" charset="0"/>
-                <a:cs typeface="Times New Roman" panose="02020603050405020304" pitchFamily="18" charset="0"/>
-              </a:rPr>
-              <a:t>отсев </a:t>
-            </a:r>
-            <a:r>
-              <a:rPr lang="ru-RU" sz="1600" dirty="0" smtClean="0">
-                <a:latin typeface="Times New Roman" panose="02020603050405020304" pitchFamily="18" charset="0"/>
-                <a:cs typeface="Times New Roman" panose="02020603050405020304" pitchFamily="18" charset="0"/>
-              </a:rPr>
-              <a:t>нерелевантных выбросов</a:t>
-            </a:r>
-            <a:endParaRPr lang="ru-RU" sz="1600" dirty="0">
+              <a:rPr lang="ru-RU" sz="2000" b="1" dirty="0" smtClean="0">
+                <a:latin typeface="Times New Roman" panose="02020603050405020304" pitchFamily="18" charset="0"/>
+                <a:cs typeface="Times New Roman" panose="02020603050405020304" pitchFamily="18" charset="0"/>
+              </a:rPr>
+              <a:t>LLM-фильтр</a:t>
+            </a:r>
+            <a:endParaRPr lang="ru-RU" sz="2000" b="1" dirty="0">
               <a:latin typeface="Times New Roman" panose="02020603050405020304" pitchFamily="18" charset="0"/>
               <a:cs typeface="Times New Roman" panose="02020603050405020304" pitchFamily="18" charset="0"/>
             </a:endParaRPr>
           </a:p>
-        </p:txBody>
-      </p:sp>
-      <p:sp>
-        <p:nvSpPr>
-          <p:cNvPr id="25" name="Arrow3"/>
-          <p:cNvSpPr/>
-          <p:nvPr/>
-        </p:nvSpPr>
-        <p:spPr>
-          <a:xfrm>
-            <a:off x="9050000" y="2400000"/>
-            <a:ext cx="600000" cy="300000"/>
-          </a:xfrm>
-          <a:prstGeom prst="rightArrow">
-            <a:avLst/>
-          </a:prstGeom>
-          <a:solidFill>
-            <a:srgbClr val="808080"/>
-          </a:solidFill>
-          <a:ln>
-            <a:noFill/>
-          </a:ln>
-        </p:spPr>
-        <p:txBody>
-          <a:bodyPr/>
-          <a:lstStyle/>
-          <a:p>
-            <a:endParaRPr/>
+          <a:p>
+            <a:pPr algn="ctr"/>
+            <a:r>
+              <a:rPr lang="ru-RU" dirty="0">
+                <a:latin typeface="Times New Roman" panose="02020603050405020304" pitchFamily="18" charset="0"/>
+                <a:cs typeface="Times New Roman" panose="02020603050405020304" pitchFamily="18" charset="0"/>
+              </a:rPr>
+              <a:t>отсев нерелевантных</a:t>
+            </a:r>
+          </a:p>
+          <a:p>
+            <a:pPr algn="ctr"/>
+            <a:r>
+              <a:rPr lang="ru-RU" dirty="0" smtClean="0">
+                <a:latin typeface="Times New Roman" panose="02020603050405020304" pitchFamily="18" charset="0"/>
+                <a:cs typeface="Times New Roman" panose="02020603050405020304" pitchFamily="18" charset="0"/>
+              </a:rPr>
+              <a:t>выбросов</a:t>
+            </a:r>
+            <a:endParaRPr lang="ru-RU" dirty="0">
+              <a:latin typeface="Times New Roman" panose="02020603050405020304" pitchFamily="18" charset="0"/>
+              <a:cs typeface="Times New Roman" panose="02020603050405020304" pitchFamily="18" charset="0"/>
+            </a:endParaRPr>
           </a:p>
         </p:txBody>
       </p:sp>
@@ -8268,7 +8465,7 @@
         </p:nvSpPr>
         <p:spPr>
           <a:xfrm>
-            <a:off x="9700000" y="1800000"/>
+            <a:off x="9301224" y="1800000"/>
             <a:ext cx="2200000" cy="1500000"/>
           </a:xfrm>
           <a:prstGeom prst="roundRect">
@@ -8299,7 +8496,7 @@
           <a:p>
             <a:pPr algn="ctr"/>
             <a:r>
-              <a:rPr lang="ru-RU" sz="1600" dirty="0">
+              <a:rPr lang="ru-RU" dirty="0">
                 <a:latin typeface="Times New Roman" panose="02020603050405020304" pitchFamily="18" charset="0"/>
                 <a:cs typeface="Times New Roman" panose="02020603050405020304" pitchFamily="18" charset="0"/>
               </a:rPr>
@@ -8309,7 +8506,7 @@
           <a:p>
             <a:pPr algn="ctr"/>
             <a:r>
-              <a:rPr lang="ru-RU" sz="1600" dirty="0">
+              <a:rPr lang="ru-RU" dirty="0">
                 <a:latin typeface="Times New Roman" panose="02020603050405020304" pitchFamily="18" charset="0"/>
                 <a:cs typeface="Times New Roman" panose="02020603050405020304" pitchFamily="18" charset="0"/>
               </a:rPr>
@@ -8336,7 +8533,7 @@
         </p:spPr>
         <p:txBody>
           <a:bodyPr wrap="square" rtlCol="0">
-            <a:normAutofit/>
+            <a:normAutofit fontScale="92500"/>
           </a:bodyPr>
           <a:lstStyle/>
           <a:p>
@@ -8348,19 +8545,8 @@
                 <a:latin typeface="Times New Roman" panose="02020603050405020304" pitchFamily="18" charset="0"/>
                 <a:cs typeface="Times New Roman" panose="02020603050405020304" pitchFamily="18" charset="0"/>
               </a:rPr>
-              <a:t>Параметры </a:t>
-            </a:r>
-            <a:r>
-              <a:rPr lang="ru-RU" sz="2400" b="1" dirty="0" smtClean="0">
-                <a:latin typeface="Times New Roman" panose="02020603050405020304" pitchFamily="18" charset="0"/>
-                <a:cs typeface="Times New Roman" panose="02020603050405020304" pitchFamily="18" charset="0"/>
-              </a:rPr>
-              <a:t>подсистемы</a:t>
-            </a:r>
-            <a:endParaRPr lang="ru-RU" sz="2400" b="1" dirty="0">
-              <a:latin typeface="Times New Roman" panose="02020603050405020304" pitchFamily="18" charset="0"/>
-              <a:cs typeface="Times New Roman" panose="02020603050405020304" pitchFamily="18" charset="0"/>
-            </a:endParaRPr>
+              <a:t>Параметры подсистемы</a:t>
+            </a:r>
           </a:p>
           <a:p>
             <a:pPr marL="457200" indent="-457200">
@@ -8368,18 +8554,11 @@
               <a:buAutoNum type="arabicPeriod"/>
             </a:pPr>
             <a:r>
-              <a:rPr lang="ru-RU" sz="2000" dirty="0" smtClean="0">
-                <a:latin typeface="Times New Roman" panose="02020603050405020304" pitchFamily="18" charset="0"/>
-                <a:cs typeface="Times New Roman" panose="02020603050405020304" pitchFamily="18" charset="0"/>
-              </a:rPr>
-              <a:t>Размерность </a:t>
-            </a:r>
-            <a:r>
               <a:rPr lang="ru-RU" sz="2000" dirty="0">
                 <a:latin typeface="Times New Roman" panose="02020603050405020304" pitchFamily="18" charset="0"/>
                 <a:cs typeface="Times New Roman" panose="02020603050405020304" pitchFamily="18" charset="0"/>
               </a:rPr>
-              <a:t>векторов эмбеддера — 2048; режим инференса bfloat16; мера близости — косинусная</a:t>
+              <a:t>Размерность векторов эмбеддера — 2048; режим инференса bfloat16; мера близости — косинусная</a:t>
             </a:r>
           </a:p>
           <a:p>
@@ -8388,39 +8567,95 @@
               <a:buAutoNum type="arabicPeriod"/>
             </a:pPr>
             <a:r>
+              <a:rPr lang="ru-RU" sz="2000" dirty="0">
+                <a:latin typeface="Times New Roman" panose="02020603050405020304" pitchFamily="18" charset="0"/>
+                <a:cs typeface="Times New Roman" panose="02020603050405020304" pitchFamily="18" charset="0"/>
+              </a:rPr>
+              <a:t>Корпус разделён на </a:t>
+            </a:r>
+            <a:r>
+              <a:rPr lang="en-US" sz="2000" dirty="0" smtClean="0">
+                <a:latin typeface="Times New Roman" panose="02020603050405020304" pitchFamily="18" charset="0"/>
+                <a:cs typeface="Times New Roman" panose="02020603050405020304" pitchFamily="18" charset="0"/>
+              </a:rPr>
+              <a:t>3</a:t>
+            </a:r>
+            <a:r>
               <a:rPr lang="ru-RU" sz="2000" dirty="0" smtClean="0">
                 <a:latin typeface="Times New Roman" panose="02020603050405020304" pitchFamily="18" charset="0"/>
                 <a:cs typeface="Times New Roman" panose="02020603050405020304" pitchFamily="18" charset="0"/>
               </a:rPr>
-              <a:t>Корпус </a:t>
+              <a:t> </a:t>
             </a:r>
             <a:r>
               <a:rPr lang="ru-RU" sz="2000" dirty="0">
                 <a:latin typeface="Times New Roman" panose="02020603050405020304" pitchFamily="18" charset="0"/>
                 <a:cs typeface="Times New Roman" panose="02020603050405020304" pitchFamily="18" charset="0"/>
               </a:rPr>
-              <a:t>разделён на </a:t>
+              <a:t>коллекции </a:t>
+            </a:r>
+            <a:r>
+              <a:rPr lang="ru-RU" sz="2000" dirty="0" err="1" smtClean="0">
+                <a:latin typeface="Times New Roman" panose="02020603050405020304" pitchFamily="18" charset="0"/>
+                <a:cs typeface="Times New Roman" panose="02020603050405020304" pitchFamily="18" charset="0"/>
+              </a:rPr>
+              <a:t>Qdrant</a:t>
+            </a:r>
+            <a:r>
+              <a:rPr lang="en-US" sz="2000" dirty="0" smtClean="0">
+                <a:latin typeface="Times New Roman" panose="02020603050405020304" pitchFamily="18" charset="0"/>
+                <a:cs typeface="Times New Roman" panose="02020603050405020304" pitchFamily="18" charset="0"/>
+              </a:rPr>
+              <a:t> (general – </a:t>
             </a:r>
             <a:r>
               <a:rPr lang="ru-RU" sz="2000" dirty="0" smtClean="0">
                 <a:latin typeface="Times New Roman" panose="02020603050405020304" pitchFamily="18" charset="0"/>
                 <a:cs typeface="Times New Roman" panose="02020603050405020304" pitchFamily="18" charset="0"/>
               </a:rPr>
-              <a:t>3 </a:t>
-            </a:r>
-            <a:r>
-              <a:rPr lang="ru-RU" sz="2000" dirty="0">
-                <a:latin typeface="Times New Roman" panose="02020603050405020304" pitchFamily="18" charset="0"/>
-                <a:cs typeface="Times New Roman" panose="02020603050405020304" pitchFamily="18" charset="0"/>
-              </a:rPr>
-              <a:t>коллекции Qdrant: </a:t>
+              <a:t>общие источники права (ГК РФ общие положения о договорах)</a:t>
             </a:r>
             <a:r>
               <a:rPr lang="en-US" sz="2000" dirty="0" smtClean="0">
                 <a:latin typeface="Times New Roman" panose="02020603050405020304" pitchFamily="18" charset="0"/>
                 <a:cs typeface="Times New Roman" panose="02020603050405020304" pitchFamily="18" charset="0"/>
               </a:rPr>
-              <a:t>general, primal, secondary;</a:t>
+              <a:t>; primal</a:t>
+            </a:r>
+            <a:r>
+              <a:rPr lang="ru-RU" sz="2000" dirty="0" smtClean="0">
+                <a:latin typeface="Times New Roman" panose="02020603050405020304" pitchFamily="18" charset="0"/>
+                <a:cs typeface="Times New Roman" panose="02020603050405020304" pitchFamily="18" charset="0"/>
+              </a:rPr>
+              <a:t> – первичные статьи ГК, содержащие описание договоров</a:t>
+            </a:r>
+            <a:r>
+              <a:rPr lang="en-US" sz="2000" dirty="0">
+                <a:latin typeface="Times New Roman" panose="02020603050405020304" pitchFamily="18" charset="0"/>
+                <a:cs typeface="Times New Roman" panose="02020603050405020304" pitchFamily="18" charset="0"/>
+              </a:rPr>
+              <a:t>;</a:t>
+            </a:r>
+            <a:r>
+              <a:rPr lang="en-US" sz="2000" dirty="0" smtClean="0">
+                <a:latin typeface="Times New Roman" panose="02020603050405020304" pitchFamily="18" charset="0"/>
+                <a:cs typeface="Times New Roman" panose="02020603050405020304" pitchFamily="18" charset="0"/>
+              </a:rPr>
+              <a:t> secondary</a:t>
+            </a:r>
+            <a:r>
+              <a:rPr lang="ru-RU" sz="2000" dirty="0" smtClean="0">
+                <a:latin typeface="Times New Roman" panose="02020603050405020304" pitchFamily="18" charset="0"/>
+                <a:cs typeface="Times New Roman" panose="02020603050405020304" pitchFamily="18" charset="0"/>
+              </a:rPr>
+              <a:t> – все остальные источники права</a:t>
+            </a:r>
+            <a:r>
+              <a:rPr lang="en-US" sz="2000" dirty="0" smtClean="0">
+                <a:latin typeface="Times New Roman" panose="02020603050405020304" pitchFamily="18" charset="0"/>
+                <a:cs typeface="Times New Roman" panose="02020603050405020304" pitchFamily="18" charset="0"/>
+              </a:rPr>
+              <a:t>)</a:t>
             </a:r>
             <a:endParaRPr lang="ru-RU" sz="2000" dirty="0">
               <a:latin typeface="Times New Roman" panose="02020603050405020304" pitchFamily="18" charset="0"/>
@@ -8437,40 +8672,64 @@
                 <a:latin typeface="Times New Roman" panose="02020603050405020304" pitchFamily="18" charset="0"/>
                 <a:cs typeface="Times New Roman" panose="02020603050405020304" pitchFamily="18" charset="0"/>
               </a:rPr>
-              <a:t>Запрос формулируется </a:t>
+              <a:t>LLM формулирует запрос для </a:t>
+            </a:r>
+            <a:r>
+              <a:rPr lang="ru-RU" sz="2000" dirty="0" err="1" smtClean="0">
+                <a:latin typeface="Times New Roman" panose="02020603050405020304" pitchFamily="18" charset="0"/>
+                <a:cs typeface="Times New Roman" panose="02020603050405020304" pitchFamily="18" charset="0"/>
+              </a:rPr>
+              <a:t>эмбеддера</a:t>
+            </a:r>
+            <a:r>
+              <a:rPr lang="ru-RU" sz="2000" dirty="0" smtClean="0">
+                <a:latin typeface="Times New Roman" panose="02020603050405020304" pitchFamily="18" charset="0"/>
+                <a:cs typeface="Times New Roman" panose="02020603050405020304" pitchFamily="18" charset="0"/>
+              </a:rPr>
+              <a:t>, к нему добавляется инструкция-</a:t>
+            </a:r>
+            <a:r>
+              <a:rPr lang="ru-RU" sz="2000" dirty="0" err="1" smtClean="0">
+                <a:latin typeface="Times New Roman" panose="02020603050405020304" pitchFamily="18" charset="0"/>
+                <a:cs typeface="Times New Roman" panose="02020603050405020304" pitchFamily="18" charset="0"/>
+              </a:rPr>
+              <a:t>промпт</a:t>
+            </a:r>
+            <a:r>
+              <a:rPr lang="ru-RU" sz="2000" dirty="0" smtClean="0">
+                <a:latin typeface="Times New Roman" panose="02020603050405020304" pitchFamily="18" charset="0"/>
+                <a:cs typeface="Times New Roman" panose="02020603050405020304" pitchFamily="18" charset="0"/>
+              </a:rPr>
+              <a:t> </a:t>
+            </a:r>
+            <a:r>
+              <a:rPr lang="ru-RU" sz="2000" dirty="0" smtClean="0">
+                <a:latin typeface="Times New Roman" panose="02020603050405020304" pitchFamily="18" charset="0"/>
+                <a:cs typeface="Times New Roman" panose="02020603050405020304" pitchFamily="18" charset="0"/>
+              </a:rPr>
+              <a:t>(</a:t>
+            </a:r>
+            <a:r>
+              <a:rPr lang="ru-RU" sz="2000" dirty="0" err="1" smtClean="0">
+                <a:latin typeface="Times New Roman" panose="02020603050405020304" pitchFamily="18" charset="0"/>
+                <a:cs typeface="Times New Roman" panose="02020603050405020304" pitchFamily="18" charset="0"/>
+              </a:rPr>
+              <a:t>instruction-tuned</a:t>
+            </a:r>
+            <a:r>
+              <a:rPr lang="ru-RU" sz="2000" dirty="0" smtClean="0">
+                <a:latin typeface="Times New Roman" panose="02020603050405020304" pitchFamily="18" charset="0"/>
+                <a:cs typeface="Times New Roman" panose="02020603050405020304" pitchFamily="18" charset="0"/>
+              </a:rPr>
+              <a:t> </a:t>
             </a:r>
             <a:r>
               <a:rPr lang="ru-RU" sz="2000" dirty="0">
                 <a:latin typeface="Times New Roman" panose="02020603050405020304" pitchFamily="18" charset="0"/>
                 <a:cs typeface="Times New Roman" panose="02020603050405020304" pitchFamily="18" charset="0"/>
               </a:rPr>
-              <a:t>LLM, для эмбеддера обёртывается в инструкцию-промпт (instruction-tuned режим </a:t>
-            </a:r>
-            <a:r>
-              <a:rPr lang="ru-RU" sz="2000" dirty="0" err="1">
-                <a:latin typeface="Times New Roman" panose="02020603050405020304" pitchFamily="18" charset="0"/>
-                <a:cs typeface="Times New Roman" panose="02020603050405020304" pitchFamily="18" charset="0"/>
-              </a:rPr>
-              <a:t>Giga-Embeddings</a:t>
-            </a:r>
-            <a:r>
-              <a:rPr lang="ru-RU" sz="2000" dirty="0" smtClean="0">
-                <a:latin typeface="Times New Roman" panose="02020603050405020304" pitchFamily="18" charset="0"/>
-                <a:cs typeface="Times New Roman" panose="02020603050405020304" pitchFamily="18" charset="0"/>
-              </a:rPr>
-              <a:t>)</a:t>
-            </a:r>
-            <a:r>
-              <a:rPr lang="en-US" sz="2000" dirty="0" smtClean="0">
-                <a:latin typeface="Times New Roman" panose="02020603050405020304" pitchFamily="18" charset="0"/>
-                <a:cs typeface="Times New Roman" panose="02020603050405020304" pitchFamily="18" charset="0"/>
-              </a:rPr>
-              <a:t>;</a:t>
-            </a:r>
-            <a:endParaRPr lang="ru-RU" sz="2000" dirty="0">
-              <a:latin typeface="Times New Roman" panose="02020603050405020304" pitchFamily="18" charset="0"/>
-              <a:cs typeface="Times New Roman" panose="02020603050405020304" pitchFamily="18" charset="0"/>
-            </a:endParaRPr>
+              <a:t>режим Giga-Embeddings)</a:t>
+            </a:r>
           </a:p>
           <a:p>
             <a:pPr marL="457200" indent="-457200">
@@ -8478,37 +8737,47 @@
               <a:buAutoNum type="arabicPeriod"/>
             </a:pPr>
             <a:r>
-              <a:rPr lang="ru-RU" sz="2000" dirty="0" err="1" smtClean="0">
-                <a:latin typeface="Times New Roman" panose="02020603050405020304" pitchFamily="18" charset="0"/>
-                <a:cs typeface="Times New Roman" panose="02020603050405020304" pitchFamily="18" charset="0"/>
-              </a:rPr>
-              <a:t>Гиперпараметры</a:t>
+              <a:rPr lang="ru-RU" sz="2000" dirty="0">
+                <a:latin typeface="Times New Roman" panose="02020603050405020304" pitchFamily="18" charset="0"/>
+                <a:cs typeface="Times New Roman" panose="02020603050405020304" pitchFamily="18" charset="0"/>
+              </a:rPr>
+              <a:t>Гиперпараметры подсистемы (наличие реранкера, наличие LLM-фильтра, глубина выдачи </a:t>
             </a:r>
             <a:r>
               <a:rPr lang="ru-RU" sz="2000" dirty="0" smtClean="0">
                 <a:latin typeface="Times New Roman" panose="02020603050405020304" pitchFamily="18" charset="0"/>
                 <a:cs typeface="Times New Roman" panose="02020603050405020304" pitchFamily="18" charset="0"/>
               </a:rPr>
+              <a:t>k</a:t>
+            </a:r>
+            <a:r>
+              <a:rPr lang="ru-RU" sz="2000" dirty="0">
+                <a:latin typeface="Times New Roman" panose="02020603050405020304" pitchFamily="18" charset="0"/>
+                <a:cs typeface="Times New Roman" panose="02020603050405020304" pitchFamily="18" charset="0"/>
+              </a:rPr>
               <a:t> </a:t>
             </a:r>
             <a:r>
+              <a:rPr lang="ru-RU" sz="2000" dirty="0" smtClean="0">
+                <a:latin typeface="Times New Roman" panose="02020603050405020304" pitchFamily="18" charset="0"/>
+                <a:cs typeface="Times New Roman" panose="02020603050405020304" pitchFamily="18" charset="0"/>
+              </a:rPr>
+              <a:t>и т.д.</a:t>
+            </a:r>
+            <a:r>
+              <a:rPr lang="ru-RU" sz="2000" dirty="0" smtClean="0">
+                <a:latin typeface="Times New Roman" panose="02020603050405020304" pitchFamily="18" charset="0"/>
+                <a:cs typeface="Times New Roman" panose="02020603050405020304" pitchFamily="18" charset="0"/>
+              </a:rPr>
+              <a:t>) </a:t>
+            </a:r>
+            <a:r>
               <a:rPr lang="ru-RU" sz="2000" dirty="0">
                 <a:latin typeface="Times New Roman" panose="02020603050405020304" pitchFamily="18" charset="0"/>
                 <a:cs typeface="Times New Roman" panose="02020603050405020304" pitchFamily="18" charset="0"/>
               </a:rPr>
-              <a:t>подсистемы (наличие реранкера, наличие LLM-фильтра, глубина выдачи k) подобраны </a:t>
-            </a:r>
-            <a:r>
-              <a:rPr lang="ru-RU" sz="2000" dirty="0" smtClean="0">
-                <a:latin typeface="Times New Roman" panose="02020603050405020304" pitchFamily="18" charset="0"/>
-                <a:cs typeface="Times New Roman" panose="02020603050405020304" pitchFamily="18" charset="0"/>
-              </a:rPr>
-              <a:t>эмпирически</a:t>
-            </a:r>
-            <a:endParaRPr lang="ru-RU" sz="2000" dirty="0">
-              <a:latin typeface="Times New Roman" panose="02020603050405020304" pitchFamily="18" charset="0"/>
-              <a:cs typeface="Times New Roman" panose="02020603050405020304" pitchFamily="18" charset="0"/>
-            </a:endParaRPr>
+              <a:t>подобраны эмпирически</a:t>
+            </a:r>
           </a:p>
         </p:txBody>
       </p:sp>
@@ -8532,6 +8801,64 @@
               <a:t>8</a:t>
             </a:fld>
             <a:endParaRPr lang="ru-RU"/>
+          </a:p>
+        </p:txBody>
+      </p:sp>
+      <p:sp>
+        <p:nvSpPr>
+          <p:cNvPr id="14" name="Arrow1"/>
+          <p:cNvSpPr/>
+          <p:nvPr/>
+        </p:nvSpPr>
+        <p:spPr>
+          <a:xfrm>
+            <a:off x="6050000" y="2400000"/>
+            <a:ext cx="345224" cy="300000"/>
+          </a:xfrm>
+          <a:prstGeom prst="rightArrow">
+            <a:avLst/>
+          </a:prstGeom>
+          <a:solidFill>
+            <a:srgbClr val="808080"/>
+          </a:solidFill>
+          <a:ln>
+            <a:noFill/>
+          </a:ln>
+        </p:spPr>
+        <p:txBody>
+          <a:bodyPr/>
+          <a:lstStyle/>
+          <a:p>
+            <a:endParaRPr/>
+          </a:p>
+        </p:txBody>
+      </p:sp>
+      <p:sp>
+        <p:nvSpPr>
+          <p:cNvPr id="15" name="Arrow1"/>
+          <p:cNvSpPr/>
+          <p:nvPr/>
+        </p:nvSpPr>
+        <p:spPr>
+          <a:xfrm>
+            <a:off x="8900612" y="2390688"/>
+            <a:ext cx="345224" cy="300000"/>
+          </a:xfrm>
+          <a:prstGeom prst="rightArrow">
+            <a:avLst/>
+          </a:prstGeom>
+          <a:solidFill>
+            <a:srgbClr val="808080"/>
+          </a:solidFill>
+          <a:ln>
+            <a:noFill/>
+          </a:ln>
+        </p:spPr>
+        <p:txBody>
+          <a:bodyPr/>
+          <a:lstStyle/>
+          <a:p>
+            <a:endParaRPr/>
           </a:p>
         </p:txBody>
       </p:sp>
@@ -8594,14 +8921,14 @@
                 <a:latin typeface="Times New Roman" panose="02020603050405020304" pitchFamily="18" charset="0"/>
                 <a:cs typeface="Times New Roman" panose="02020603050405020304" pitchFamily="18" charset="0"/>
               </a:rPr>
-              <a:t>Подбор параметров </a:t>
-            </a:r>
-            <a:r>
-              <a:rPr lang="en-US" sz="4800" dirty="0" smtClean="0">
-                <a:latin typeface="Times New Roman" panose="02020603050405020304" pitchFamily="18" charset="0"/>
-                <a:cs typeface="Times New Roman" panose="02020603050405020304" pitchFamily="18" charset="0"/>
-              </a:rPr>
-              <a:t>RAG</a:t>
+              <a:t>Подбор </a:t>
+            </a:r>
+            <a:r>
+              <a:rPr lang="ru-RU" sz="4800" dirty="0" smtClean="0">
+                <a:latin typeface="Times New Roman" panose="02020603050405020304" pitchFamily="18" charset="0"/>
+                <a:cs typeface="Times New Roman" panose="02020603050405020304" pitchFamily="18" charset="0"/>
+              </a:rPr>
+              <a:t>параметров поиска</a:t>
             </a:r>
             <a:endParaRPr lang="ru-RU" sz="4800" dirty="0">
               <a:latin typeface="Times New Roman" panose="02020603050405020304" pitchFamily="18" charset="0"/>
@@ -8638,7 +8965,14 @@
                 <a:latin typeface="Times New Roman" panose="02020603050405020304" pitchFamily="18" charset="0"/>
                 <a:cs typeface="Times New Roman" panose="02020603050405020304" pitchFamily="18" charset="0"/>
               </a:rPr>
-              <a:t>Сравнительный анализ конфигураций двухступенчатого поиска </a:t>
+              <a:t>Сравнительный анализ конфигураций </a:t>
+            </a:r>
+            <a:r>
+              <a:rPr lang="ru-RU" dirty="0" smtClean="0">
+                <a:latin typeface="Times New Roman" panose="02020603050405020304" pitchFamily="18" charset="0"/>
+                <a:cs typeface="Times New Roman" panose="02020603050405020304" pitchFamily="18" charset="0"/>
+              </a:rPr>
+              <a:t>поиска </a:t>
             </a:r>
             <a:r>
               <a:rPr lang="ru-RU" dirty="0">
